--- a/reports/phase_retrieval_experiment_results_brief.pptx
+++ b/reports/phase_retrieval_experiment_results_brief.pptx
@@ -2,19 +2,23 @@
 <file path=ppt/presentation.xml><?xml version="1.0" encoding="utf-8"?>
 <p:presentation xmlns:p="http://schemas.openxmlformats.org/presentationml/2006/main">
   <p:sldMasterIdLst>
-    <p:sldMasterId xmlns:r="http://schemas.openxmlformats.org/officeDocument/2006/relationships" id="2147483648" r:id="Ra9c5b842987d4d33"/>
+    <p:sldMasterId xmlns:r="http://schemas.openxmlformats.org/officeDocument/2006/relationships" id="2147483648" r:id="R72d4a57a865e4561"/>
   </p:sldMasterIdLst>
   <p:notesMasterIdLst>
-    <p:notesMasterId xmlns:r="http://schemas.openxmlformats.org/officeDocument/2006/relationships" r:id="R5059d2a1312041cd"/>
+    <p:notesMasterId xmlns:r="http://schemas.openxmlformats.org/officeDocument/2006/relationships" r:id="R123befc66ccd4215"/>
   </p:notesMasterIdLst>
   <p:sldIdLst>
-    <p:sldId xmlns:r="http://schemas.openxmlformats.org/officeDocument/2006/relationships" id="256" r:id="R95aa4df390924bb2"/>
-    <p:sldId xmlns:r="http://schemas.openxmlformats.org/officeDocument/2006/relationships" id="257" r:id="R8fd870aa80b2490e"/>
-    <p:sldId xmlns:r="http://schemas.openxmlformats.org/officeDocument/2006/relationships" id="258" r:id="R22c8da24ad4f49ea"/>
-    <p:sldId xmlns:r="http://schemas.openxmlformats.org/officeDocument/2006/relationships" id="259" r:id="Rf2b0b92b7de644da"/>
-    <p:sldId xmlns:r="http://schemas.openxmlformats.org/officeDocument/2006/relationships" id="260" r:id="Raf016609a81e45bc"/>
-    <p:sldId xmlns:r="http://schemas.openxmlformats.org/officeDocument/2006/relationships" id="261" r:id="Rce3c70d15a644b99"/>
-    <p:sldId xmlns:r="http://schemas.openxmlformats.org/officeDocument/2006/relationships" id="262" r:id="R40a2a35a8b274b11"/>
+    <p:sldId xmlns:r="http://schemas.openxmlformats.org/officeDocument/2006/relationships" id="256" r:id="R003492157ff64579"/>
+    <p:sldId xmlns:r="http://schemas.openxmlformats.org/officeDocument/2006/relationships" id="257" r:id="R65a18b1214014576"/>
+    <p:sldId xmlns:r="http://schemas.openxmlformats.org/officeDocument/2006/relationships" id="258" r:id="Rf96720ec0af849ca"/>
+    <p:sldId xmlns:r="http://schemas.openxmlformats.org/officeDocument/2006/relationships" id="259" r:id="R318430fab3014d09"/>
+    <p:sldId xmlns:r="http://schemas.openxmlformats.org/officeDocument/2006/relationships" id="260" r:id="R7737aad955ce405e"/>
+    <p:sldId xmlns:r="http://schemas.openxmlformats.org/officeDocument/2006/relationships" id="261" r:id="Re1be7c18c99c4e15"/>
+    <p:sldId xmlns:r="http://schemas.openxmlformats.org/officeDocument/2006/relationships" id="262" r:id="R0e49f1a798c5494b"/>
+    <p:sldId xmlns:r="http://schemas.openxmlformats.org/officeDocument/2006/relationships" id="263" r:id="Rae2e8fd0ac4a466d"/>
+    <p:sldId xmlns:r="http://schemas.openxmlformats.org/officeDocument/2006/relationships" id="264" r:id="Rf7677b21cf80446a"/>
+    <p:sldId xmlns:r="http://schemas.openxmlformats.org/officeDocument/2006/relationships" id="265" r:id="Ra82ec82784de4c38"/>
+    <p:sldId xmlns:r="http://schemas.openxmlformats.org/officeDocument/2006/relationships" id="266" r:id="R71f564b51e45464d"/>
   </p:sldIdLst>
   <p:sldSz cx="12192000" cy="6858000"/>
   <p:notesSz cx="6858000" cy="9144000"/>
@@ -569,6 +573,138 @@
 </p:notes>
 </file>
 
+<file path=ppt/notesSlides/notesSlide10.xml><?xml version="1.0" encoding="utf-8"?>
+<p:notes xmlns:p="http://schemas.openxmlformats.org/presentationml/2006/main">
+  <p:cSld>
+    <p:spTree>
+      <p:nvGrpSpPr>
+        <p:cNvPr id="1" name=""/>
+        <p:cNvGrpSpPr/>
+        <p:nvPr/>
+      </p:nvGrpSpPr>
+      <p:grpSpPr>
+        <a:xfrm xmlns:a="http://schemas.openxmlformats.org/drawingml/2006/main"/>
+      </p:grpSpPr>
+      <p:sp>
+        <p:nvSpPr>
+          <p:cNvPr id="2" name="Slide Image Placeholder 1"/>
+          <p:cNvSpPr>
+            <a:spLocks xmlns:a="http://schemas.openxmlformats.org/drawingml/2006/main" noGrp="1"/>
+          </p:cNvSpPr>
+          <p:nvPr>
+            <p:ph type="sldImg" idx="0"/>
+          </p:nvPr>
+        </p:nvSpPr>
+        <p:spPr/>
+      </p:sp>
+      <p:sp>
+        <p:nvSpPr>
+          <p:cNvPr id="3" name="Notes Placeholder 2"/>
+          <p:cNvSpPr>
+            <a:spLocks xmlns:a="http://schemas.openxmlformats.org/drawingml/2006/main" noGrp="1"/>
+          </p:cNvSpPr>
+          <p:nvPr>
+            <p:ph type="body" idx="1"/>
+          </p:nvPr>
+        </p:nvSpPr>
+        <p:spPr/>
+        <p:txBody>
+          <a:bodyPr xmlns:a="http://schemas.openxmlformats.org/drawingml/2006/main"/>
+          <a:lstStyle xmlns:a="http://schemas.openxmlformats.org/drawingml/2006/main"/>
+          <a:p xmlns:a="http://schemas.openxmlformats.org/drawingml/2006/main"/>
+        </p:txBody>
+      </p:sp>
+      <p:sp>
+        <p:nvSpPr>
+          <p:cNvPr id="4" name="Slide Number Placeholder 3"/>
+          <p:cNvSpPr>
+            <a:spLocks xmlns:a="http://schemas.openxmlformats.org/drawingml/2006/main" noGrp="1"/>
+          </p:cNvSpPr>
+          <p:nvPr>
+            <p:ph type="sldNum" idx="5"/>
+          </p:nvPr>
+        </p:nvSpPr>
+        <p:spPr/>
+        <p:txBody>
+          <a:bodyPr xmlns:a="http://schemas.openxmlformats.org/drawingml/2006/main"/>
+          <a:lstStyle xmlns:a="http://schemas.openxmlformats.org/drawingml/2006/main"/>
+          <a:p xmlns:a="http://schemas.openxmlformats.org/drawingml/2006/main"/>
+        </p:txBody>
+      </p:sp>
+    </p:spTree>
+  </p:cSld>
+  <p:clrMapOvr>
+    <a:masterClrMapping xmlns:a="http://schemas.openxmlformats.org/drawingml/2006/main"/>
+  </p:clrMapOvr>
+</p:notes>
+</file>
+
+<file path=ppt/notesSlides/notesSlide11.xml><?xml version="1.0" encoding="utf-8"?>
+<p:notes xmlns:p="http://schemas.openxmlformats.org/presentationml/2006/main">
+  <p:cSld>
+    <p:spTree>
+      <p:nvGrpSpPr>
+        <p:cNvPr id="1" name=""/>
+        <p:cNvGrpSpPr/>
+        <p:nvPr/>
+      </p:nvGrpSpPr>
+      <p:grpSpPr>
+        <a:xfrm xmlns:a="http://schemas.openxmlformats.org/drawingml/2006/main"/>
+      </p:grpSpPr>
+      <p:sp>
+        <p:nvSpPr>
+          <p:cNvPr id="2" name="Slide Image Placeholder 1"/>
+          <p:cNvSpPr>
+            <a:spLocks xmlns:a="http://schemas.openxmlformats.org/drawingml/2006/main" noGrp="1"/>
+          </p:cNvSpPr>
+          <p:nvPr>
+            <p:ph type="sldImg" idx="0"/>
+          </p:nvPr>
+        </p:nvSpPr>
+        <p:spPr/>
+      </p:sp>
+      <p:sp>
+        <p:nvSpPr>
+          <p:cNvPr id="3" name="Notes Placeholder 2"/>
+          <p:cNvSpPr>
+            <a:spLocks xmlns:a="http://schemas.openxmlformats.org/drawingml/2006/main" noGrp="1"/>
+          </p:cNvSpPr>
+          <p:nvPr>
+            <p:ph type="body" idx="1"/>
+          </p:nvPr>
+        </p:nvSpPr>
+        <p:spPr/>
+        <p:txBody>
+          <a:bodyPr xmlns:a="http://schemas.openxmlformats.org/drawingml/2006/main"/>
+          <a:lstStyle xmlns:a="http://schemas.openxmlformats.org/drawingml/2006/main"/>
+          <a:p xmlns:a="http://schemas.openxmlformats.org/drawingml/2006/main"/>
+        </p:txBody>
+      </p:sp>
+      <p:sp>
+        <p:nvSpPr>
+          <p:cNvPr id="4" name="Slide Number Placeholder 3"/>
+          <p:cNvSpPr>
+            <a:spLocks xmlns:a="http://schemas.openxmlformats.org/drawingml/2006/main" noGrp="1"/>
+          </p:cNvSpPr>
+          <p:nvPr>
+            <p:ph type="sldNum" idx="5"/>
+          </p:nvPr>
+        </p:nvSpPr>
+        <p:spPr/>
+        <p:txBody>
+          <a:bodyPr xmlns:a="http://schemas.openxmlformats.org/drawingml/2006/main"/>
+          <a:lstStyle xmlns:a="http://schemas.openxmlformats.org/drawingml/2006/main"/>
+          <a:p xmlns:a="http://schemas.openxmlformats.org/drawingml/2006/main"/>
+        </p:txBody>
+      </p:sp>
+    </p:spTree>
+  </p:cSld>
+  <p:clrMapOvr>
+    <a:masterClrMapping xmlns:a="http://schemas.openxmlformats.org/drawingml/2006/main"/>
+  </p:clrMapOvr>
+</p:notes>
+</file>
+
 <file path=ppt/notesSlides/notesSlide2.xml><?xml version="1.0" encoding="utf-8"?>
 <p:notes xmlns:p="http://schemas.openxmlformats.org/presentationml/2006/main">
   <p:cSld>
@@ -900,6 +1036,138 @@
 </file>
 
 <file path=ppt/notesSlides/notesSlide7.xml><?xml version="1.0" encoding="utf-8"?>
+<p:notes xmlns:p="http://schemas.openxmlformats.org/presentationml/2006/main">
+  <p:cSld>
+    <p:spTree>
+      <p:nvGrpSpPr>
+        <p:cNvPr id="1" name=""/>
+        <p:cNvGrpSpPr/>
+        <p:nvPr/>
+      </p:nvGrpSpPr>
+      <p:grpSpPr>
+        <a:xfrm xmlns:a="http://schemas.openxmlformats.org/drawingml/2006/main"/>
+      </p:grpSpPr>
+      <p:sp>
+        <p:nvSpPr>
+          <p:cNvPr id="2" name="Slide Image Placeholder 1"/>
+          <p:cNvSpPr>
+            <a:spLocks xmlns:a="http://schemas.openxmlformats.org/drawingml/2006/main" noGrp="1"/>
+          </p:cNvSpPr>
+          <p:nvPr>
+            <p:ph type="sldImg" idx="0"/>
+          </p:nvPr>
+        </p:nvSpPr>
+        <p:spPr/>
+      </p:sp>
+      <p:sp>
+        <p:nvSpPr>
+          <p:cNvPr id="3" name="Notes Placeholder 2"/>
+          <p:cNvSpPr>
+            <a:spLocks xmlns:a="http://schemas.openxmlformats.org/drawingml/2006/main" noGrp="1"/>
+          </p:cNvSpPr>
+          <p:nvPr>
+            <p:ph type="body" idx="1"/>
+          </p:nvPr>
+        </p:nvSpPr>
+        <p:spPr/>
+        <p:txBody>
+          <a:bodyPr xmlns:a="http://schemas.openxmlformats.org/drawingml/2006/main"/>
+          <a:lstStyle xmlns:a="http://schemas.openxmlformats.org/drawingml/2006/main"/>
+          <a:p xmlns:a="http://schemas.openxmlformats.org/drawingml/2006/main"/>
+        </p:txBody>
+      </p:sp>
+      <p:sp>
+        <p:nvSpPr>
+          <p:cNvPr id="4" name="Slide Number Placeholder 3"/>
+          <p:cNvSpPr>
+            <a:spLocks xmlns:a="http://schemas.openxmlformats.org/drawingml/2006/main" noGrp="1"/>
+          </p:cNvSpPr>
+          <p:nvPr>
+            <p:ph type="sldNum" idx="5"/>
+          </p:nvPr>
+        </p:nvSpPr>
+        <p:spPr/>
+        <p:txBody>
+          <a:bodyPr xmlns:a="http://schemas.openxmlformats.org/drawingml/2006/main"/>
+          <a:lstStyle xmlns:a="http://schemas.openxmlformats.org/drawingml/2006/main"/>
+          <a:p xmlns:a="http://schemas.openxmlformats.org/drawingml/2006/main"/>
+        </p:txBody>
+      </p:sp>
+    </p:spTree>
+  </p:cSld>
+  <p:clrMapOvr>
+    <a:masterClrMapping xmlns:a="http://schemas.openxmlformats.org/drawingml/2006/main"/>
+  </p:clrMapOvr>
+</p:notes>
+</file>
+
+<file path=ppt/notesSlides/notesSlide8.xml><?xml version="1.0" encoding="utf-8"?>
+<p:notes xmlns:p="http://schemas.openxmlformats.org/presentationml/2006/main">
+  <p:cSld>
+    <p:spTree>
+      <p:nvGrpSpPr>
+        <p:cNvPr id="1" name=""/>
+        <p:cNvGrpSpPr/>
+        <p:nvPr/>
+      </p:nvGrpSpPr>
+      <p:grpSpPr>
+        <a:xfrm xmlns:a="http://schemas.openxmlformats.org/drawingml/2006/main"/>
+      </p:grpSpPr>
+      <p:sp>
+        <p:nvSpPr>
+          <p:cNvPr id="2" name="Slide Image Placeholder 1"/>
+          <p:cNvSpPr>
+            <a:spLocks xmlns:a="http://schemas.openxmlformats.org/drawingml/2006/main" noGrp="1"/>
+          </p:cNvSpPr>
+          <p:nvPr>
+            <p:ph type="sldImg" idx="0"/>
+          </p:nvPr>
+        </p:nvSpPr>
+        <p:spPr/>
+      </p:sp>
+      <p:sp>
+        <p:nvSpPr>
+          <p:cNvPr id="3" name="Notes Placeholder 2"/>
+          <p:cNvSpPr>
+            <a:spLocks xmlns:a="http://schemas.openxmlformats.org/drawingml/2006/main" noGrp="1"/>
+          </p:cNvSpPr>
+          <p:nvPr>
+            <p:ph type="body" idx="1"/>
+          </p:nvPr>
+        </p:nvSpPr>
+        <p:spPr/>
+        <p:txBody>
+          <a:bodyPr xmlns:a="http://schemas.openxmlformats.org/drawingml/2006/main"/>
+          <a:lstStyle xmlns:a="http://schemas.openxmlformats.org/drawingml/2006/main"/>
+          <a:p xmlns:a="http://schemas.openxmlformats.org/drawingml/2006/main"/>
+        </p:txBody>
+      </p:sp>
+      <p:sp>
+        <p:nvSpPr>
+          <p:cNvPr id="4" name="Slide Number Placeholder 3"/>
+          <p:cNvSpPr>
+            <a:spLocks xmlns:a="http://schemas.openxmlformats.org/drawingml/2006/main" noGrp="1"/>
+          </p:cNvSpPr>
+          <p:nvPr>
+            <p:ph type="sldNum" idx="5"/>
+          </p:nvPr>
+        </p:nvSpPr>
+        <p:spPr/>
+        <p:txBody>
+          <a:bodyPr xmlns:a="http://schemas.openxmlformats.org/drawingml/2006/main"/>
+          <a:lstStyle xmlns:a="http://schemas.openxmlformats.org/drawingml/2006/main"/>
+          <a:p xmlns:a="http://schemas.openxmlformats.org/drawingml/2006/main"/>
+        </p:txBody>
+      </p:sp>
+    </p:spTree>
+  </p:cSld>
+  <p:clrMapOvr>
+    <a:masterClrMapping xmlns:a="http://schemas.openxmlformats.org/drawingml/2006/main"/>
+  </p:clrMapOvr>
+</p:notes>
+</file>
+
+<file path=ppt/notesSlides/notesSlide9.xml><?xml version="1.0" encoding="utf-8"?>
 <p:notes xmlns:p="http://schemas.openxmlformats.org/presentationml/2006/main">
   <p:cSld>
     <p:spTree>
@@ -1003,7 +1271,7 @@
   </p:cSld>
   <p:clrMap bg1="lt1" tx1="dk1" bg2="lt2" tx2="dk2" accent1="accent1" accent2="accent2" accent3="accent3" accent4="accent4" accent5="accent5" accent6="accent6" hlink="hlink" folHlink="folHlink"/>
   <p:sldLayoutIdLst>
-    <p:sldLayoutId xmlns:r="http://schemas.openxmlformats.org/officeDocument/2006/relationships" id="2147483649" r:id="R6b9753d7a78147a4"/>
+    <p:sldLayoutId xmlns:r="http://schemas.openxmlformats.org/officeDocument/2006/relationships" id="2147483649" r:id="R3cb455cd1e1d454f"/>
   </p:sldLayoutIdLst>
   <p:txStyles>
     <p:titleStyle>
@@ -2007,7 +2275,7 @@
           <p:cNvPr id="1" name="">
             <a:extLst xmlns:a="http://schemas.openxmlformats.org/drawingml/2006/main">
               <a:ext uri="{FF2B5EF4-FFF2-40B4-BE49-F238E27FC236}">
-                <a16:creationId xmlns:a16="http://schemas.microsoft.com/office/drawing/2014/main" id="{10E6032D-399F-4609-B772-42B6D5135A22}"/>
+                <a16:creationId xmlns:a16="http://schemas.microsoft.com/office/drawing/2014/main" id="{5B569F3E-165E-4FBF-98C2-6C3C1486C482}"/>
               </a:ext>
             </a:extLst>
           </p:cNvPr>
@@ -2047,7 +2315,7 @@
                   <a:srgbClr val="0F172A"/>
                 </a:solidFill>
               </a:rPr>
-              <a:t>AutoPhaseNN 复现与 UMamba 替换实验结果</a:t>
+              <a:t>AutoPhaseNN 是什么</a:t>
             </a:r>
           </a:p>
         </p:txBody>
@@ -2057,7 +2325,7 @@
           <p:cNvPr id="2" name="">
             <a:extLst xmlns:a="http://schemas.openxmlformats.org/drawingml/2006/main">
               <a:ext uri="{FF2B5EF4-FFF2-40B4-BE49-F238E27FC236}">
-                <a16:creationId xmlns:a16="http://schemas.microsoft.com/office/drawing/2014/main" id="{47573D11-6A79-4F36-B741-AA0564D1154B}"/>
+                <a16:creationId xmlns:a16="http://schemas.microsoft.com/office/drawing/2014/main" id="{86D17765-ABB5-4ABE-9968-AF7EBC245721}"/>
               </a:ext>
             </a:extLst>
           </p:cNvPr>
@@ -2069,7 +2337,7 @@
         <p:spPr>
           <a:xfrm xmlns:a="http://schemas.openxmlformats.org/drawingml/2006/main">
             <a:off x="476250" y="742950"/>
-            <a:ext cx="9334500" cy="266700"/>
+            <a:ext cx="10096500" cy="266700"/>
           </a:xfrm>
           <a:prstGeom xmlns:a="http://schemas.openxmlformats.org/drawingml/2006/main" prst="rect">
             <a:avLst/>
@@ -2097,7 +2365,7 @@
                   <a:srgbClr val="475569"/>
                 </a:solidFill>
               </a:rPr>
-              <a:t>简洁版：只展示关键曲线、完整可视化图和主要指标</a:t>
+              <a:t>用于 3D 相位恢复：从衍射强度 diff 预测实空间 amp / phase，再用物理前向模型回到衍射域</a:t>
             </a:r>
           </a:p>
         </p:txBody>
@@ -2107,7 +2375,7 @@
           <p:cNvPr id="3" name="">
             <a:extLst xmlns:a="http://schemas.openxmlformats.org/drawingml/2006/main">
               <a:ext uri="{FF2B5EF4-FFF2-40B4-BE49-F238E27FC236}">
-                <a16:creationId xmlns:a16="http://schemas.microsoft.com/office/drawing/2014/main" id="{97BE2841-B761-4316-8DD5-72E36534BB93}"/>
+                <a16:creationId xmlns:a16="http://schemas.microsoft.com/office/drawing/2014/main" id="{891FD405-C5B5-46E8-960C-CAF43A443F3C}"/>
               </a:ext>
             </a:extLst>
           </p:cNvPr>
@@ -2140,7 +2408,7 @@
           <p:cNvPr id="4" name="">
             <a:extLst xmlns:a="http://schemas.openxmlformats.org/drawingml/2006/main">
               <a:ext uri="{FF2B5EF4-FFF2-40B4-BE49-F238E27FC236}">
-                <a16:creationId xmlns:a16="http://schemas.microsoft.com/office/drawing/2014/main" id="{01CB6DC7-BF45-4318-AB63-EE1784128495}"/>
+                <a16:creationId xmlns:a16="http://schemas.microsoft.com/office/drawing/2014/main" id="{3AAF5826-2C80-41FC-BDA1-602E3E4DAF94}"/>
               </a:ext>
             </a:extLst>
           </p:cNvPr>
@@ -2151,20 +2419,20 @@
         </p:nvSpPr>
         <p:spPr>
           <a:xfrm xmlns:a="http://schemas.openxmlformats.org/drawingml/2006/main">
-            <a:off x="838200" y="1619250"/>
-            <a:ext cx="2238375" cy="876300"/>
+            <a:off x="781050" y="1952625"/>
+            <a:ext cx="1428750" cy="533400"/>
           </a:xfrm>
           <a:prstGeom xmlns:a="http://schemas.openxmlformats.org/drawingml/2006/main" prst="roundRect">
             <a:avLst>
-              <a:gd name="adj" fmla="val 13043"/>
+              <a:gd name="adj" fmla="val 14286"/>
             </a:avLst>
           </a:prstGeom>
           <a:solidFill xmlns:a="http://schemas.openxmlformats.org/drawingml/2006/main">
-            <a:srgbClr val="FFFFFF"/>
+            <a:srgbClr val="DBEAFE"/>
           </a:solidFill>
           <a:ln xmlns:a="http://schemas.openxmlformats.org/drawingml/2006/main" w="9525">
             <a:solidFill>
-              <a:srgbClr val="E2E8F0"/>
+              <a:srgbClr val="99F6E4"/>
             </a:solidFill>
             <a:prstDash val="solid"/>
           </a:ln>
@@ -2175,7 +2443,7 @@
           <p:cNvPr id="5" name="">
             <a:extLst xmlns:a="http://schemas.openxmlformats.org/drawingml/2006/main">
               <a:ext uri="{FF2B5EF4-FFF2-40B4-BE49-F238E27FC236}">
-                <a16:creationId xmlns:a16="http://schemas.microsoft.com/office/drawing/2014/main" id="{3FD24B01-8969-4A6E-A350-BB9EB3FB3984}"/>
+                <a16:creationId xmlns:a16="http://schemas.microsoft.com/office/drawing/2014/main" id="{BBBB70BE-D9A5-4C8A-829F-8FE0422A80BD}"/>
               </a:ext>
             </a:extLst>
           </p:cNvPr>
@@ -2186,8 +2454,8 @@
         </p:nvSpPr>
         <p:spPr>
           <a:xfrm xmlns:a="http://schemas.openxmlformats.org/drawingml/2006/main">
-            <a:off x="990600" y="1733550"/>
-            <a:ext cx="1905000" cy="228600"/>
+            <a:off x="876300" y="2095500"/>
+            <a:ext cx="1238250" cy="228600"/>
           </a:xfrm>
           <a:prstGeom xmlns:a="http://schemas.openxmlformats.org/drawingml/2006/main" prst="rect">
             <a:avLst/>
@@ -2202,20 +2470,20 @@
           <a:bodyPr xmlns:a="http://schemas.openxmlformats.org/drawingml/2006/main"/>
           <a:lstStyle xmlns:a="http://schemas.openxmlformats.org/drawingml/2006/main"/>
           <a:p xmlns:a="http://schemas.openxmlformats.org/drawingml/2006/main">
-            <a:pPr>
-              <a:defRPr sz="900" b="1">
-                <a:solidFill>
-                  <a:srgbClr val="475569"/>
+            <a:pPr algn="ctr">
+              <a:defRPr sz="1125" b="1">
+                <a:solidFill>
+                  <a:srgbClr val="0F172A"/>
                 </a:solidFill>
               </a:defRPr>
             </a:pPr>
             <a:r>
-              <a:rPr sz="900" b="1">
-                <a:solidFill>
-                  <a:srgbClr val="475569"/>
+              <a:rPr sz="1125" b="1">
+                <a:solidFill>
+                  <a:srgbClr val="0F172A"/>
                 </a:solidFill>
               </a:rPr>
-              <a:t>AutoPhaseNN full val L1</a:t>
+              <a:t>输入 diff</a:t>
             </a:r>
           </a:p>
         </p:txBody>
@@ -2225,7 +2493,7 @@
           <p:cNvPr id="6" name="">
             <a:extLst xmlns:a="http://schemas.openxmlformats.org/drawingml/2006/main">
               <a:ext uri="{FF2B5EF4-FFF2-40B4-BE49-F238E27FC236}">
-                <a16:creationId xmlns:a16="http://schemas.microsoft.com/office/drawing/2014/main" id="{F4CE99D3-638B-4BDB-8074-91C60A8374BE}"/>
+                <a16:creationId xmlns:a16="http://schemas.microsoft.com/office/drawing/2014/main" id="{4AB9A3F4-39E0-4AD7-A493-7DC0FA8D4959}"/>
               </a:ext>
             </a:extLst>
           </p:cNvPr>
@@ -2236,8 +2504,43 @@
         </p:nvSpPr>
         <p:spPr>
           <a:xfrm xmlns:a="http://schemas.openxmlformats.org/drawingml/2006/main">
-            <a:off x="990600" y="2019300"/>
-            <a:ext cx="1905000" cy="323850"/>
+            <a:off x="2781300" y="1952625"/>
+            <a:ext cx="1619250" cy="533400"/>
+          </a:xfrm>
+          <a:prstGeom xmlns:a="http://schemas.openxmlformats.org/drawingml/2006/main" prst="roundRect">
+            <a:avLst>
+              <a:gd name="adj" fmla="val 14286"/>
+            </a:avLst>
+          </a:prstGeom>
+          <a:solidFill xmlns:a="http://schemas.openxmlformats.org/drawingml/2006/main">
+            <a:srgbClr val="ECFDF5"/>
+          </a:solidFill>
+          <a:ln xmlns:a="http://schemas.openxmlformats.org/drawingml/2006/main" w="9525">
+            <a:solidFill>
+              <a:srgbClr val="99F6E4"/>
+            </a:solidFill>
+            <a:prstDash val="solid"/>
+          </a:ln>
+        </p:spPr>
+      </p:sp>
+      <p:sp>
+        <p:nvSpPr>
+          <p:cNvPr id="7" name="">
+            <a:extLst xmlns:a="http://schemas.openxmlformats.org/drawingml/2006/main">
+              <a:ext uri="{FF2B5EF4-FFF2-40B4-BE49-F238E27FC236}">
+                <a16:creationId xmlns:a16="http://schemas.microsoft.com/office/drawing/2014/main" id="{4C1289D8-23BF-4E90-B2E1-008478A37EF0}"/>
+              </a:ext>
+            </a:extLst>
+          </p:cNvPr>
+          <p:cNvSpPr>
+            <a:spLocks xmlns:a="http://schemas.openxmlformats.org/drawingml/2006/main" noGrp="1"/>
+          </p:cNvSpPr>
+          <p:nvPr/>
+        </p:nvSpPr>
+        <p:spPr>
+          <a:xfrm xmlns:a="http://schemas.openxmlformats.org/drawingml/2006/main">
+            <a:off x="2876550" y="2095500"/>
+            <a:ext cx="1428750" cy="228600"/>
           </a:xfrm>
           <a:prstGeom xmlns:a="http://schemas.openxmlformats.org/drawingml/2006/main" prst="rect">
             <a:avLst/>
@@ -2252,30 +2555,47 @@
           <a:bodyPr xmlns:a="http://schemas.openxmlformats.org/drawingml/2006/main"/>
           <a:lstStyle xmlns:a="http://schemas.openxmlformats.org/drawingml/2006/main"/>
           <a:p xmlns:a="http://schemas.openxmlformats.org/drawingml/2006/main">
-            <a:pPr>
-              <a:defRPr sz="1800" b="1">
-                <a:solidFill>
-                  <a:srgbClr val="0F766E"/>
+            <a:pPr algn="ctr">
+              <a:defRPr sz="1125" b="1">
+                <a:solidFill>
+                  <a:srgbClr val="0F172A"/>
                 </a:solidFill>
               </a:defRPr>
             </a:pPr>
             <a:r>
-              <a:rPr sz="1800" b="1">
-                <a:solidFill>
-                  <a:srgbClr val="0F766E"/>
+              <a:rPr sz="1125" b="1">
+                <a:solidFill>
+                  <a:srgbClr val="0F172A"/>
                 </a:solidFill>
               </a:rPr>
-              <a:t>3.70</a:t>
+              <a:t>AutoPhaseNN</a:t>
+            </a:r>
+          </a:p>
+          <a:p xmlns:a="http://schemas.openxmlformats.org/drawingml/2006/main">
+            <a:pPr algn="ctr">
+              <a:defRPr sz="1125" b="1">
+                <a:solidFill>
+                  <a:srgbClr val="0F172A"/>
+                </a:solidFill>
+              </a:defRPr>
+            </a:pPr>
+            <a:r>
+              <a:rPr sz="1125" b="1">
+                <a:solidFill>
+                  <a:srgbClr val="0F172A"/>
+                </a:solidFill>
+              </a:rPr>
+              <a:t>CNN 编码器</a:t>
             </a:r>
           </a:p>
         </p:txBody>
       </p:sp>
       <p:sp>
         <p:nvSpPr>
-          <p:cNvPr id="7" name="">
+          <p:cNvPr id="8" name="">
             <a:extLst xmlns:a="http://schemas.openxmlformats.org/drawingml/2006/main">
               <a:ext uri="{FF2B5EF4-FFF2-40B4-BE49-F238E27FC236}">
-                <a16:creationId xmlns:a16="http://schemas.microsoft.com/office/drawing/2014/main" id="{740969E7-4809-4075-837D-41B684A20B20}"/>
+                <a16:creationId xmlns:a16="http://schemas.microsoft.com/office/drawing/2014/main" id="{632D39AF-DBAF-48AB-BCAE-A78BA7B57D8F}"/>
               </a:ext>
             </a:extLst>
           </p:cNvPr>
@@ -2286,20 +2606,20 @@
         </p:nvSpPr>
         <p:spPr>
           <a:xfrm xmlns:a="http://schemas.openxmlformats.org/drawingml/2006/main">
-            <a:off x="3429000" y="1619250"/>
-            <a:ext cx="2238375" cy="876300"/>
+            <a:off x="5067300" y="1952625"/>
+            <a:ext cx="1714500" cy="533400"/>
           </a:xfrm>
           <a:prstGeom xmlns:a="http://schemas.openxmlformats.org/drawingml/2006/main" prst="roundRect">
             <a:avLst>
-              <a:gd name="adj" fmla="val 13043"/>
+              <a:gd name="adj" fmla="val 14286"/>
             </a:avLst>
           </a:prstGeom>
           <a:solidFill xmlns:a="http://schemas.openxmlformats.org/drawingml/2006/main">
-            <a:srgbClr val="FFFFFF"/>
+            <a:srgbClr val="ECFDF5"/>
           </a:solidFill>
           <a:ln xmlns:a="http://schemas.openxmlformats.org/drawingml/2006/main" w="9525">
             <a:solidFill>
-              <a:srgbClr val="E2E8F0"/>
+              <a:srgbClr val="99F6E4"/>
             </a:solidFill>
             <a:prstDash val="solid"/>
           </a:ln>
@@ -2307,10 +2627,10 @@
       </p:sp>
       <p:sp>
         <p:nvSpPr>
-          <p:cNvPr id="8" name="">
+          <p:cNvPr id="9" name="">
             <a:extLst xmlns:a="http://schemas.openxmlformats.org/drawingml/2006/main">
               <a:ext uri="{FF2B5EF4-FFF2-40B4-BE49-F238E27FC236}">
-                <a16:creationId xmlns:a16="http://schemas.microsoft.com/office/drawing/2014/main" id="{145499AC-BDC5-45DD-9915-91ACD8F67BB2}"/>
+                <a16:creationId xmlns:a16="http://schemas.microsoft.com/office/drawing/2014/main" id="{3223D139-8C4C-44DA-B525-BB3EAA77F68B}"/>
               </a:ext>
             </a:extLst>
           </p:cNvPr>
@@ -2321,8 +2641,8 @@
         </p:nvSpPr>
         <p:spPr>
           <a:xfrm xmlns:a="http://schemas.openxmlformats.org/drawingml/2006/main">
-            <a:off x="3581400" y="1733550"/>
-            <a:ext cx="1905000" cy="228600"/>
+            <a:off x="5162550" y="2095500"/>
+            <a:ext cx="1524000" cy="228600"/>
           </a:xfrm>
           <a:prstGeom xmlns:a="http://schemas.openxmlformats.org/drawingml/2006/main" prst="rect">
             <a:avLst/>
@@ -2337,30 +2657,47 @@
           <a:bodyPr xmlns:a="http://schemas.openxmlformats.org/drawingml/2006/main"/>
           <a:lstStyle xmlns:a="http://schemas.openxmlformats.org/drawingml/2006/main"/>
           <a:p xmlns:a="http://schemas.openxmlformats.org/drawingml/2006/main">
-            <a:pPr>
-              <a:defRPr sz="900" b="1">
-                <a:solidFill>
-                  <a:srgbClr val="475569"/>
+            <a:pPr algn="ctr">
+              <a:defRPr sz="1125" b="1">
+                <a:solidFill>
+                  <a:srgbClr val="0F172A"/>
                 </a:solidFill>
               </a:defRPr>
             </a:pPr>
             <a:r>
-              <a:rPr sz="900" b="1">
-                <a:solidFill>
-                  <a:srgbClr val="475569"/>
+              <a:rPr sz="1125" b="1">
+                <a:solidFill>
+                  <a:srgbClr val="0F172A"/>
                 </a:solidFill>
               </a:rPr>
-              <a:t>UMamba hard val L1</a:t>
+              <a:t>双解码器</a:t>
+            </a:r>
+          </a:p>
+          <a:p xmlns:a="http://schemas.openxmlformats.org/drawingml/2006/main">
+            <a:pPr algn="ctr">
+              <a:defRPr sz="1125" b="1">
+                <a:solidFill>
+                  <a:srgbClr val="0F172A"/>
+                </a:solidFill>
+              </a:defRPr>
+            </a:pPr>
+            <a:r>
+              <a:rPr sz="1125" b="1">
+                <a:solidFill>
+                  <a:srgbClr val="0F172A"/>
+                </a:solidFill>
+              </a:rPr>
+              <a:t>amp / phase</a:t>
             </a:r>
           </a:p>
         </p:txBody>
       </p:sp>
       <p:sp>
         <p:nvSpPr>
-          <p:cNvPr id="9" name="">
+          <p:cNvPr id="10" name="">
             <a:extLst xmlns:a="http://schemas.openxmlformats.org/drawingml/2006/main">
               <a:ext uri="{FF2B5EF4-FFF2-40B4-BE49-F238E27FC236}">
-                <a16:creationId xmlns:a16="http://schemas.microsoft.com/office/drawing/2014/main" id="{0A2EA723-6F7E-4633-95AC-269DF8925615}"/>
+                <a16:creationId xmlns:a16="http://schemas.microsoft.com/office/drawing/2014/main" id="{985C906D-E2D1-47B0-A32A-2E9976DD99FA}"/>
               </a:ext>
             </a:extLst>
           </p:cNvPr>
@@ -2371,8 +2708,43 @@
         </p:nvSpPr>
         <p:spPr>
           <a:xfrm xmlns:a="http://schemas.openxmlformats.org/drawingml/2006/main">
-            <a:off x="3581400" y="2019300"/>
-            <a:ext cx="1905000" cy="323850"/>
+            <a:off x="7448550" y="1952625"/>
+            <a:ext cx="1714500" cy="533400"/>
+          </a:xfrm>
+          <a:prstGeom xmlns:a="http://schemas.openxmlformats.org/drawingml/2006/main" prst="roundRect">
+            <a:avLst>
+              <a:gd name="adj" fmla="val 14286"/>
+            </a:avLst>
+          </a:prstGeom>
+          <a:solidFill xmlns:a="http://schemas.openxmlformats.org/drawingml/2006/main">
+            <a:srgbClr val="FFF7ED"/>
+          </a:solidFill>
+          <a:ln xmlns:a="http://schemas.openxmlformats.org/drawingml/2006/main" w="9525">
+            <a:solidFill>
+              <a:srgbClr val="99F6E4"/>
+            </a:solidFill>
+            <a:prstDash val="solid"/>
+          </a:ln>
+        </p:spPr>
+      </p:sp>
+      <p:sp>
+        <p:nvSpPr>
+          <p:cNvPr id="11" name="">
+            <a:extLst xmlns:a="http://schemas.openxmlformats.org/drawingml/2006/main">
+              <a:ext uri="{FF2B5EF4-FFF2-40B4-BE49-F238E27FC236}">
+                <a16:creationId xmlns:a16="http://schemas.microsoft.com/office/drawing/2014/main" id="{B73EFF66-CFF4-4882-8041-BA3D9B7B866C}"/>
+              </a:ext>
+            </a:extLst>
+          </p:cNvPr>
+          <p:cNvSpPr>
+            <a:spLocks xmlns:a="http://schemas.openxmlformats.org/drawingml/2006/main" noGrp="1"/>
+          </p:cNvSpPr>
+          <p:nvPr/>
+        </p:nvSpPr>
+        <p:spPr>
+          <a:xfrm xmlns:a="http://schemas.openxmlformats.org/drawingml/2006/main">
+            <a:off x="7543800" y="2095500"/>
+            <a:ext cx="1524000" cy="228600"/>
           </a:xfrm>
           <a:prstGeom xmlns:a="http://schemas.openxmlformats.org/drawingml/2006/main" prst="rect">
             <a:avLst/>
@@ -2387,30 +2759,47 @@
           <a:bodyPr xmlns:a="http://schemas.openxmlformats.org/drawingml/2006/main"/>
           <a:lstStyle xmlns:a="http://schemas.openxmlformats.org/drawingml/2006/main"/>
           <a:p xmlns:a="http://schemas.openxmlformats.org/drawingml/2006/main">
-            <a:pPr>
-              <a:defRPr sz="1800" b="1">
-                <a:solidFill>
-                  <a:srgbClr val="D97706"/>
+            <a:pPr algn="ctr">
+              <a:defRPr sz="1125" b="1">
+                <a:solidFill>
+                  <a:srgbClr val="0F172A"/>
                 </a:solidFill>
               </a:defRPr>
             </a:pPr>
             <a:r>
-              <a:rPr sz="1800" b="1">
-                <a:solidFill>
-                  <a:srgbClr val="D97706"/>
+              <a:rPr sz="1125" b="1">
+                <a:solidFill>
+                  <a:srgbClr val="0F172A"/>
                 </a:solidFill>
               </a:rPr>
-              <a:t>6.13</a:t>
+              <a:t>物理后处理</a:t>
+            </a:r>
+          </a:p>
+          <a:p xmlns:a="http://schemas.openxmlformats.org/drawingml/2006/main">
+            <a:pPr algn="ctr">
+              <a:defRPr sz="1125" b="1">
+                <a:solidFill>
+                  <a:srgbClr val="0F172A"/>
+                </a:solidFill>
+              </a:defRPr>
+            </a:pPr>
+            <a:r>
+              <a:rPr sz="1125" b="1">
+                <a:solidFill>
+                  <a:srgbClr val="0F172A"/>
+                </a:solidFill>
+              </a:rPr>
+              <a:t>FFT farfield</a:t>
             </a:r>
           </a:p>
         </p:txBody>
       </p:sp>
       <p:sp>
         <p:nvSpPr>
-          <p:cNvPr id="10" name="">
+          <p:cNvPr id="12" name="">
             <a:extLst xmlns:a="http://schemas.openxmlformats.org/drawingml/2006/main">
               <a:ext uri="{FF2B5EF4-FFF2-40B4-BE49-F238E27FC236}">
-                <a16:creationId xmlns:a16="http://schemas.microsoft.com/office/drawing/2014/main" id="{0E6E0647-388D-4E5B-BBA0-CB650A450419}"/>
+                <a16:creationId xmlns:a16="http://schemas.microsoft.com/office/drawing/2014/main" id="{3D6B9C6B-724B-4FD4-9EFF-5BD4CE8BDD11}"/>
               </a:ext>
             </a:extLst>
           </p:cNvPr>
@@ -2421,20 +2810,20 @@
         </p:nvSpPr>
         <p:spPr>
           <a:xfrm xmlns:a="http://schemas.openxmlformats.org/drawingml/2006/main">
-            <a:off x="6019800" y="1619250"/>
-            <a:ext cx="2238375" cy="876300"/>
+            <a:off x="9810750" y="1952625"/>
+            <a:ext cx="1428750" cy="533400"/>
           </a:xfrm>
           <a:prstGeom xmlns:a="http://schemas.openxmlformats.org/drawingml/2006/main" prst="roundRect">
             <a:avLst>
-              <a:gd name="adj" fmla="val 13043"/>
+              <a:gd name="adj" fmla="val 14286"/>
             </a:avLst>
           </a:prstGeom>
           <a:solidFill xmlns:a="http://schemas.openxmlformats.org/drawingml/2006/main">
-            <a:srgbClr val="FFFFFF"/>
+            <a:srgbClr val="DBEAFE"/>
           </a:solidFill>
           <a:ln xmlns:a="http://schemas.openxmlformats.org/drawingml/2006/main" w="9525">
             <a:solidFill>
-              <a:srgbClr val="E2E8F0"/>
+              <a:srgbClr val="99F6E4"/>
             </a:solidFill>
             <a:prstDash val="solid"/>
           </a:ln>
@@ -2442,10 +2831,10 @@
       </p:sp>
       <p:sp>
         <p:nvSpPr>
-          <p:cNvPr id="11" name="">
+          <p:cNvPr id="13" name="">
             <a:extLst xmlns:a="http://schemas.openxmlformats.org/drawingml/2006/main">
               <a:ext uri="{FF2B5EF4-FFF2-40B4-BE49-F238E27FC236}">
-                <a16:creationId xmlns:a16="http://schemas.microsoft.com/office/drawing/2014/main" id="{022F68E5-4BAE-46ED-81BA-A396B11B0E44}"/>
+                <a16:creationId xmlns:a16="http://schemas.microsoft.com/office/drawing/2014/main" id="{F18F98FD-37E0-41C6-B681-6A873DEE50E2}"/>
               </a:ext>
             </a:extLst>
           </p:cNvPr>
@@ -2456,8 +2845,8 @@
         </p:nvSpPr>
         <p:spPr>
           <a:xfrm xmlns:a="http://schemas.openxmlformats.org/drawingml/2006/main">
-            <a:off x="6172200" y="1733550"/>
-            <a:ext cx="1905000" cy="228600"/>
+            <a:off x="9906000" y="2095500"/>
+            <a:ext cx="1238250" cy="228600"/>
           </a:xfrm>
           <a:prstGeom xmlns:a="http://schemas.openxmlformats.org/drawingml/2006/main" prst="rect">
             <a:avLst/>
@@ -2472,30 +2861,30 @@
           <a:bodyPr xmlns:a="http://schemas.openxmlformats.org/drawingml/2006/main"/>
           <a:lstStyle xmlns:a="http://schemas.openxmlformats.org/drawingml/2006/main"/>
           <a:p xmlns:a="http://schemas.openxmlformats.org/drawingml/2006/main">
-            <a:pPr>
-              <a:defRPr sz="900" b="1">
-                <a:solidFill>
-                  <a:srgbClr val="475569"/>
+            <a:pPr algn="ctr">
+              <a:defRPr sz="1125" b="1">
+                <a:solidFill>
+                  <a:srgbClr val="0F172A"/>
                 </a:solidFill>
               </a:defRPr>
             </a:pPr>
             <a:r>
-              <a:rPr sz="900" b="1">
-                <a:solidFill>
-                  <a:srgbClr val="475569"/>
+              <a:rPr sz="1125" b="1">
+                <a:solidFill>
+                  <a:srgbClr val="0F172A"/>
                 </a:solidFill>
               </a:rPr>
-              <a:t>UMamba soft val L1</a:t>
+              <a:t>预测 diff</a:t>
             </a:r>
           </a:p>
         </p:txBody>
       </p:sp>
       <p:sp>
         <p:nvSpPr>
-          <p:cNvPr id="12" name="">
+          <p:cNvPr id="14" name="">
             <a:extLst xmlns:a="http://schemas.openxmlformats.org/drawingml/2006/main">
               <a:ext uri="{FF2B5EF4-FFF2-40B4-BE49-F238E27FC236}">
-                <a16:creationId xmlns:a16="http://schemas.microsoft.com/office/drawing/2014/main" id="{D9C663D0-0EF1-41B3-9ED3-24CB4DAFEAA3}"/>
+                <a16:creationId xmlns:a16="http://schemas.microsoft.com/office/drawing/2014/main" id="{BF83F388-6368-4EFE-AEB9-11F8B6014DFC}"/>
               </a:ext>
             </a:extLst>
           </p:cNvPr>
@@ -2506,46 +2895,26 @@
         </p:nvSpPr>
         <p:spPr>
           <a:xfrm xmlns:a="http://schemas.openxmlformats.org/drawingml/2006/main">
-            <a:off x="6172200" y="2019300"/>
-            <a:ext cx="1905000" cy="323850"/>
+            <a:off x="2247900" y="2219325"/>
+            <a:ext cx="476250" cy="0"/>
           </a:xfrm>
-          <a:prstGeom xmlns:a="http://schemas.openxmlformats.org/drawingml/2006/main" prst="rect">
+          <a:prstGeom xmlns:a="http://schemas.openxmlformats.org/drawingml/2006/main" prst="line">
             <a:avLst/>
           </a:prstGeom>
-          <a:noFill xmlns:a="http://schemas.openxmlformats.org/drawingml/2006/main"/>
-          <a:ln xmlns:a="http://schemas.openxmlformats.org/drawingml/2006/main" w="0">
-            <a:noFill/>
+          <a:ln xmlns:a="http://schemas.openxmlformats.org/drawingml/2006/main" w="19050">
+            <a:solidFill>
+              <a:srgbClr val="0F766E"/>
+            </a:solidFill>
             <a:prstDash val="solid"/>
           </a:ln>
         </p:spPr>
-        <p:txBody>
-          <a:bodyPr xmlns:a="http://schemas.openxmlformats.org/drawingml/2006/main"/>
-          <a:lstStyle xmlns:a="http://schemas.openxmlformats.org/drawingml/2006/main"/>
-          <a:p xmlns:a="http://schemas.openxmlformats.org/drawingml/2006/main">
-            <a:pPr>
-              <a:defRPr sz="1800" b="1">
-                <a:solidFill>
-                  <a:srgbClr val="B91C1C"/>
-                </a:solidFill>
-              </a:defRPr>
-            </a:pPr>
-            <a:r>
-              <a:rPr sz="1800" b="1">
-                <a:solidFill>
-                  <a:srgbClr val="B91C1C"/>
-                </a:solidFill>
-              </a:rPr>
-              <a:t>7.01</a:t>
-            </a:r>
-          </a:p>
-        </p:txBody>
-      </p:sp>
-      <p:sp>
-        <p:nvSpPr>
-          <p:cNvPr id="13" name="">
+      </p:sp>
+      <p:sp>
+        <p:nvSpPr>
+          <p:cNvPr id="15" name="">
             <a:extLst xmlns:a="http://schemas.openxmlformats.org/drawingml/2006/main">
               <a:ext uri="{FF2B5EF4-FFF2-40B4-BE49-F238E27FC236}">
-                <a16:creationId xmlns:a16="http://schemas.microsoft.com/office/drawing/2014/main" id="{541B6476-FE75-4E1A-AFC0-096A0233B28C}"/>
+                <a16:creationId xmlns:a16="http://schemas.microsoft.com/office/drawing/2014/main" id="{9F0567B1-696A-4F8A-A89E-A63DF1473670}"/>
               </a:ext>
             </a:extLst>
           </p:cNvPr>
@@ -2556,20 +2925,15 @@
         </p:nvSpPr>
         <p:spPr>
           <a:xfrm xmlns:a="http://schemas.openxmlformats.org/drawingml/2006/main">
-            <a:off x="8610600" y="1619250"/>
-            <a:ext cx="2238375" cy="876300"/>
+            <a:off x="4438650" y="2219325"/>
+            <a:ext cx="571500" cy="0"/>
           </a:xfrm>
-          <a:prstGeom xmlns:a="http://schemas.openxmlformats.org/drawingml/2006/main" prst="roundRect">
-            <a:avLst>
-              <a:gd name="adj" fmla="val 13043"/>
-            </a:avLst>
-          </a:prstGeom>
-          <a:solidFill xmlns:a="http://schemas.openxmlformats.org/drawingml/2006/main">
-            <a:srgbClr val="FFFFFF"/>
-          </a:solidFill>
-          <a:ln xmlns:a="http://schemas.openxmlformats.org/drawingml/2006/main" w="9525">
+          <a:prstGeom xmlns:a="http://schemas.openxmlformats.org/drawingml/2006/main" prst="line">
+            <a:avLst/>
+          </a:prstGeom>
+          <a:ln xmlns:a="http://schemas.openxmlformats.org/drawingml/2006/main" w="19050">
             <a:solidFill>
-              <a:srgbClr val="E2E8F0"/>
+              <a:srgbClr val="0F766E"/>
             </a:solidFill>
             <a:prstDash val="solid"/>
           </a:ln>
@@ -2577,10 +2941,10 @@
       </p:sp>
       <p:sp>
         <p:nvSpPr>
-          <p:cNvPr id="14" name="">
+          <p:cNvPr id="16" name="">
             <a:extLst xmlns:a="http://schemas.openxmlformats.org/drawingml/2006/main">
               <a:ext uri="{FF2B5EF4-FFF2-40B4-BE49-F238E27FC236}">
-                <a16:creationId xmlns:a16="http://schemas.microsoft.com/office/drawing/2014/main" id="{DE39C9F1-6877-46F7-8929-E4BB1D8A1718}"/>
+                <a16:creationId xmlns:a16="http://schemas.microsoft.com/office/drawing/2014/main" id="{3DCC667D-A65B-43CE-8176-6092B9665990}"/>
               </a:ext>
             </a:extLst>
           </p:cNvPr>
@@ -2591,46 +2955,26 @@
         </p:nvSpPr>
         <p:spPr>
           <a:xfrm xmlns:a="http://schemas.openxmlformats.org/drawingml/2006/main">
-            <a:off x="8763000" y="1733550"/>
-            <a:ext cx="1905000" cy="228600"/>
+            <a:off x="6819900" y="2219325"/>
+            <a:ext cx="571500" cy="0"/>
           </a:xfrm>
-          <a:prstGeom xmlns:a="http://schemas.openxmlformats.org/drawingml/2006/main" prst="rect">
+          <a:prstGeom xmlns:a="http://schemas.openxmlformats.org/drawingml/2006/main" prst="line">
             <a:avLst/>
           </a:prstGeom>
-          <a:noFill xmlns:a="http://schemas.openxmlformats.org/drawingml/2006/main"/>
-          <a:ln xmlns:a="http://schemas.openxmlformats.org/drawingml/2006/main" w="0">
-            <a:noFill/>
+          <a:ln xmlns:a="http://schemas.openxmlformats.org/drawingml/2006/main" w="19050">
+            <a:solidFill>
+              <a:srgbClr val="0F766E"/>
+            </a:solidFill>
             <a:prstDash val="solid"/>
           </a:ln>
         </p:spPr>
-        <p:txBody>
-          <a:bodyPr xmlns:a="http://schemas.openxmlformats.org/drawingml/2006/main"/>
-          <a:lstStyle xmlns:a="http://schemas.openxmlformats.org/drawingml/2006/main"/>
-          <a:p xmlns:a="http://schemas.openxmlformats.org/drawingml/2006/main">
-            <a:pPr>
-              <a:defRPr sz="900" b="1">
-                <a:solidFill>
-                  <a:srgbClr val="475569"/>
-                </a:solidFill>
-              </a:defRPr>
-            </a:pPr>
-            <a:r>
-              <a:rPr sz="900" b="1">
-                <a:solidFill>
-                  <a:srgbClr val="475569"/>
-                </a:solidFill>
-              </a:rPr>
-              <a:t>Soft FT Pearson</a:t>
-            </a:r>
-          </a:p>
-        </p:txBody>
-      </p:sp>
-      <p:sp>
-        <p:nvSpPr>
-          <p:cNvPr id="15" name="">
+      </p:sp>
+      <p:sp>
+        <p:nvSpPr>
+          <p:cNvPr id="17" name="">
             <a:extLst xmlns:a="http://schemas.openxmlformats.org/drawingml/2006/main">
               <a:ext uri="{FF2B5EF4-FFF2-40B4-BE49-F238E27FC236}">
-                <a16:creationId xmlns:a16="http://schemas.microsoft.com/office/drawing/2014/main" id="{520AE862-8567-4814-A833-CAF3D160CFFA}"/>
+                <a16:creationId xmlns:a16="http://schemas.microsoft.com/office/drawing/2014/main" id="{BD378945-2B77-48C5-9226-1DAED2138DC8}"/>
               </a:ext>
             </a:extLst>
           </p:cNvPr>
@@ -2641,49 +2985,29 @@
         </p:nvSpPr>
         <p:spPr>
           <a:xfrm xmlns:a="http://schemas.openxmlformats.org/drawingml/2006/main">
-            <a:off x="8763000" y="2019300"/>
-            <a:ext cx="1905000" cy="323850"/>
+            <a:off x="9201150" y="2219325"/>
+            <a:ext cx="552450" cy="0"/>
           </a:xfrm>
-          <a:prstGeom xmlns:a="http://schemas.openxmlformats.org/drawingml/2006/main" prst="rect">
+          <a:prstGeom xmlns:a="http://schemas.openxmlformats.org/drawingml/2006/main" prst="line">
             <a:avLst/>
           </a:prstGeom>
-          <a:noFill xmlns:a="http://schemas.openxmlformats.org/drawingml/2006/main"/>
-          <a:ln xmlns:a="http://schemas.openxmlformats.org/drawingml/2006/main" w="0">
-            <a:noFill/>
+          <a:ln xmlns:a="http://schemas.openxmlformats.org/drawingml/2006/main" w="19050">
+            <a:solidFill>
+              <a:srgbClr val="0F766E"/>
+            </a:solidFill>
             <a:prstDash val="solid"/>
           </a:ln>
         </p:spPr>
-        <p:txBody>
-          <a:bodyPr xmlns:a="http://schemas.openxmlformats.org/drawingml/2006/main"/>
-          <a:lstStyle xmlns:a="http://schemas.openxmlformats.org/drawingml/2006/main"/>
-          <a:p xmlns:a="http://schemas.openxmlformats.org/drawingml/2006/main">
-            <a:pPr>
-              <a:defRPr sz="1800" b="1">
-                <a:solidFill>
-                  <a:srgbClr val="2563EB"/>
-                </a:solidFill>
-              </a:defRPr>
-            </a:pPr>
-            <a:r>
-              <a:rPr sz="1800" b="1">
-                <a:solidFill>
-                  <a:srgbClr val="2563EB"/>
-                </a:solidFill>
-              </a:rPr>
-              <a:t>0.980</a:t>
-            </a:r>
-          </a:p>
-        </p:txBody>
       </p:sp>
       <p:graphicFrame>
         <p:nvGraphicFramePr>
-          <p:cNvPr id="33" name=""/>
+          <p:cNvPr id="36" name=""/>
           <p:cNvGraphicFramePr/>
           <p:nvPr/>
         </p:nvGraphicFramePr>
         <p:xfrm>
-          <a:off xmlns:a="http://schemas.openxmlformats.org/drawingml/2006/main" x="838200" y="3143250"/>
-          <a:ext xmlns:a="http://schemas.openxmlformats.org/drawingml/2006/main" cx="10287000" cy="2000250"/>
+          <a:off xmlns:a="http://schemas.openxmlformats.org/drawingml/2006/main" x="876300" y="3286125"/>
+          <a:ext xmlns:a="http://schemas.openxmlformats.org/drawingml/2006/main" cx="10287000" cy="2190750"/>
         </p:xfrm>
         <a:graphic xmlns:a="http://schemas.openxmlformats.org/drawingml/2006/main">
           <a:graphicData uri="http://schemas.openxmlformats.org/drawingml/2006/table">
@@ -2691,10 +3015,9 @@
               <a:tblPr firstRow="1" bandRow="1"/>
               <a:tblGrid>
                 <a:gridCol w="2000250"/>
-                <a:gridCol w="2952750"/>
-                <a:gridCol w="5334000"/>
+                <a:gridCol w="8286750"/>
               </a:tblGrid>
-              <a:tr h="500063">
+              <a:tr h="438150">
                 <a:tc>
                   <a:txBody>
                     <a:bodyPr/>
@@ -2706,7 +3029,7 @@
                             <a:srgbClr val="FFFFFF"/>
                           </a:solidFill>
                         </a:rPr>
-                        <a:t>实验</a:t>
+                        <a:t>模块</a:t>
                       </a:r>
                     </a:p>
                   </a:txBody>
@@ -2727,7 +3050,7 @@
                             <a:srgbClr val="FFFFFF"/>
                           </a:solidFill>
                         </a:rPr>
-                        <a:t>训练设置</a:t>
+                        <a:t>作用</a:t>
                       </a:r>
                     </a:p>
                   </a:txBody>
@@ -2737,6 +3060,338 @@
                     </a:solidFill>
                   </a:tcPr>
                 </a:tc>
+              </a:tr>
+              <a:tr h="438150">
+                <a:tc>
+                  <a:txBody>
+                    <a:bodyPr/>
+                    <a:lstStyle/>
+                    <a:p>
+                      <a:r>
+                        <a:rPr sz="900">
+                          <a:solidFill>
+                            <a:srgbClr val="0F172A"/>
+                          </a:solidFill>
+                        </a:rPr>
+                        <a:t>输入</a:t>
+                      </a:r>
+                    </a:p>
+                  </a:txBody>
+                  <a:tcPr marL="91440" marR="91440" marT="45720" marB="45720"/>
+                </a:tc>
+                <a:tc>
+                  <a:txBody>
+                    <a:bodyPr/>
+                    <a:lstStyle/>
+                    <a:p>
+                      <a:r>
+                        <a:rPr sz="900">
+                          <a:solidFill>
+                            <a:srgbClr val="0F172A"/>
+                          </a:solidFill>
+                        </a:rPr>
+                        <a:t>3D 衍射强度图 diff，shape 通常为 64³</a:t>
+                      </a:r>
+                    </a:p>
+                  </a:txBody>
+                  <a:tcPr marL="91440" marR="91440" marT="45720" marB="45720"/>
+                </a:tc>
+              </a:tr>
+              <a:tr h="438150">
+                <a:tc>
+                  <a:txBody>
+                    <a:bodyPr/>
+                    <a:lstStyle/>
+                    <a:p>
+                      <a:r>
+                        <a:rPr sz="900">
+                          <a:solidFill>
+                            <a:srgbClr val="0F172A"/>
+                          </a:solidFill>
+                        </a:rPr>
+                        <a:t>网络主体</a:t>
+                      </a:r>
+                    </a:p>
+                  </a:txBody>
+                  <a:tcPr marL="91440" marR="91440" marT="45720" marB="45720"/>
+                </a:tc>
+                <a:tc>
+                  <a:txBody>
+                    <a:bodyPr/>
+                    <a:lstStyle/>
+                    <a:p>
+                      <a:r>
+                        <a:rPr sz="900">
+                          <a:solidFill>
+                            <a:srgbClr val="0F172A"/>
+                          </a:solidFill>
+                        </a:rPr>
+                        <a:t>3D CNN encoder-decoder；两个输出头分别预测 amplitude 和 phase</a:t>
+                      </a:r>
+                    </a:p>
+                  </a:txBody>
+                  <a:tcPr marL="91440" marR="91440" marT="45720" marB="45720"/>
+                </a:tc>
+              </a:tr>
+              <a:tr h="438150">
+                <a:tc>
+                  <a:txBody>
+                    <a:bodyPr/>
+                    <a:lstStyle/>
+                    <a:p>
+                      <a:r>
+                        <a:rPr sz="900">
+                          <a:solidFill>
+                            <a:srgbClr val="0F172A"/>
+                          </a:solidFill>
+                        </a:rPr>
+                        <a:t>输出限制</a:t>
+                      </a:r>
+                    </a:p>
+                  </a:txBody>
+                  <a:tcPr marL="91440" marR="91440" marT="45720" marB="45720"/>
+                </a:tc>
+                <a:tc>
+                  <a:txBody>
+                    <a:bodyPr/>
+                    <a:lstStyle/>
+                    <a:p>
+                      <a:r>
+                        <a:rPr sz="900">
+                          <a:solidFill>
+                            <a:srgbClr val="0F172A"/>
+                          </a:solidFill>
+                        </a:rPr>
+                        <a:t>amp 经 Sigmoid 限制到 0-1；phase 经 Tanh 后乘 π 限制到 [-π, π]</a:t>
+                      </a:r>
+                    </a:p>
+                  </a:txBody>
+                  <a:tcPr marL="91440" marR="91440" marT="45720" marB="45720"/>
+                </a:tc>
+              </a:tr>
+              <a:tr h="438150">
+                <a:tc>
+                  <a:txBody>
+                    <a:bodyPr/>
+                    <a:lstStyle/>
+                    <a:p>
+                      <a:r>
+                        <a:rPr sz="900">
+                          <a:solidFill>
+                            <a:srgbClr val="0F172A"/>
+                          </a:solidFill>
+                        </a:rPr>
+                        <a:t>物理层</a:t>
+                      </a:r>
+                    </a:p>
+                  </a:txBody>
+                  <a:tcPr marL="91440" marR="91440" marT="45720" marB="45720"/>
+                </a:tc>
+                <a:tc>
+                  <a:txBody>
+                    <a:bodyPr/>
+                    <a:lstStyle/>
+                    <a:p>
+                      <a:r>
+                        <a:rPr sz="900">
+                          <a:solidFill>
+                            <a:srgbClr val="0F172A"/>
+                          </a:solidFill>
+                        </a:rPr>
+                        <a:t>用 support mask 形成复数物体，再 FFT 得到 predicted farfield</a:t>
+                      </a:r>
+                    </a:p>
+                  </a:txBody>
+                  <a:tcPr marL="91440" marR="91440" marT="45720" marB="45720"/>
+                </a:tc>
+              </a:tr>
+            </a:tbl>
+          </a:graphicData>
+        </a:graphic>
+      </p:graphicFrame>
+    </p:spTree>
+    <p:extLst>
+      <p:ext uri="{BB962C8B-B14F-4D97-AF65-F5344CB8AC3E}">
+        <p14:creationId xmlns:p14="http://schemas.microsoft.com/office/powerpoint/2010/main" val="2085336218"/>
+      </p:ext>
+    </p:extLst>
+  </p:cSld>
+</p:sld>
+</file>
+
+<file path=ppt/slides/slide10.xml><?xml version="1.0" encoding="utf-8"?>
+<p:sld xmlns:p="http://schemas.openxmlformats.org/presentationml/2006/main">
+  <p:cSld>
+    <p:bg>
+      <p:bgPr>
+        <a:solidFill xmlns:a="http://schemas.openxmlformats.org/drawingml/2006/main">
+          <a:srgbClr val="F8FAFC"/>
+        </a:solidFill>
+      </p:bgPr>
+    </p:bg>
+    <p:spTree>
+      <p:nvGrpSpPr>
+        <p:cNvPr id="1" name=""/>
+        <p:cNvGrpSpPr/>
+        <p:nvPr/>
+      </p:nvGrpSpPr>
+      <p:grpSpPr>
+        <a:xfrm xmlns:a="http://schemas.openxmlformats.org/drawingml/2006/main"/>
+      </p:grpSpPr>
+      <p:sp>
+        <p:nvSpPr>
+          <p:cNvPr id="1" name="">
+            <a:extLst xmlns:a="http://schemas.openxmlformats.org/drawingml/2006/main">
+              <a:ext uri="{FF2B5EF4-FFF2-40B4-BE49-F238E27FC236}">
+                <a16:creationId xmlns:a16="http://schemas.microsoft.com/office/drawing/2014/main" id="{236004D8-2876-40FA-AB7B-257112EC89FC}"/>
+              </a:ext>
+            </a:extLst>
+          </p:cNvPr>
+          <p:cNvSpPr>
+            <a:spLocks xmlns:a="http://schemas.openxmlformats.org/drawingml/2006/main" noGrp="1"/>
+          </p:cNvSpPr>
+          <p:nvPr/>
+        </p:nvSpPr>
+        <p:spPr>
+          <a:xfrm xmlns:a="http://schemas.openxmlformats.org/drawingml/2006/main">
+            <a:off x="457200" y="304800"/>
+            <a:ext cx="8858250" cy="438150"/>
+          </a:xfrm>
+          <a:prstGeom xmlns:a="http://schemas.openxmlformats.org/drawingml/2006/main" prst="rect">
+            <a:avLst/>
+          </a:prstGeom>
+          <a:noFill xmlns:a="http://schemas.openxmlformats.org/drawingml/2006/main"/>
+          <a:ln xmlns:a="http://schemas.openxmlformats.org/drawingml/2006/main" w="0">
+            <a:noFill/>
+            <a:prstDash val="solid"/>
+          </a:ln>
+        </p:spPr>
+        <p:txBody>
+          <a:bodyPr xmlns:a="http://schemas.openxmlformats.org/drawingml/2006/main"/>
+          <a:lstStyle xmlns:a="http://schemas.openxmlformats.org/drawingml/2006/main"/>
+          <a:p xmlns:a="http://schemas.openxmlformats.org/drawingml/2006/main">
+            <a:pPr>
+              <a:defRPr sz="2250" b="1">
+                <a:solidFill>
+                  <a:srgbClr val="0F172A"/>
+                </a:solidFill>
+              </a:defRPr>
+            </a:pPr>
+            <a:r>
+              <a:rPr sz="2250" b="1">
+                <a:solidFill>
+                  <a:srgbClr val="0F172A"/>
+                </a:solidFill>
+              </a:rPr>
+              <a:t>主要指标对比</a:t>
+            </a:r>
+          </a:p>
+        </p:txBody>
+      </p:sp>
+      <p:sp>
+        <p:nvSpPr>
+          <p:cNvPr id="2" name="">
+            <a:extLst xmlns:a="http://schemas.openxmlformats.org/drawingml/2006/main">
+              <a:ext uri="{FF2B5EF4-FFF2-40B4-BE49-F238E27FC236}">
+                <a16:creationId xmlns:a16="http://schemas.microsoft.com/office/drawing/2014/main" id="{0D71C779-E847-4BD1-8C0F-C9C9362CE46F}"/>
+              </a:ext>
+            </a:extLst>
+          </p:cNvPr>
+          <p:cNvSpPr>
+            <a:spLocks xmlns:a="http://schemas.openxmlformats.org/drawingml/2006/main" noGrp="1"/>
+          </p:cNvSpPr>
+          <p:nvPr/>
+        </p:nvSpPr>
+        <p:spPr>
+          <a:xfrm xmlns:a="http://schemas.openxmlformats.org/drawingml/2006/main">
+            <a:off x="476250" y="742950"/>
+            <a:ext cx="10096500" cy="266700"/>
+          </a:xfrm>
+          <a:prstGeom xmlns:a="http://schemas.openxmlformats.org/drawingml/2006/main" prst="rect">
+            <a:avLst/>
+          </a:prstGeom>
+          <a:noFill xmlns:a="http://schemas.openxmlformats.org/drawingml/2006/main"/>
+          <a:ln xmlns:a="http://schemas.openxmlformats.org/drawingml/2006/main" w="0">
+            <a:noFill/>
+            <a:prstDash val="solid"/>
+          </a:ln>
+        </p:spPr>
+        <p:txBody>
+          <a:bodyPr xmlns:a="http://schemas.openxmlformats.org/drawingml/2006/main"/>
+          <a:lstStyle xmlns:a="http://schemas.openxmlformats.org/drawingml/2006/main"/>
+          <a:p xmlns:a="http://schemas.openxmlformats.org/drawingml/2006/main">
+            <a:pPr>
+              <a:defRPr sz="975">
+                <a:solidFill>
+                  <a:srgbClr val="475569"/>
+                </a:solidFill>
+              </a:defRPr>
+            </a:pPr>
+            <a:r>
+              <a:rPr sz="975">
+                <a:solidFill>
+                  <a:srgbClr val="475569"/>
+                </a:solidFill>
+              </a:rPr>
+              <a:t>重点看 FT 指标和实空间指标是否一致</a:t>
+            </a:r>
+          </a:p>
+        </p:txBody>
+      </p:sp>
+      <p:sp>
+        <p:nvSpPr>
+          <p:cNvPr id="3" name="">
+            <a:extLst xmlns:a="http://schemas.openxmlformats.org/drawingml/2006/main">
+              <a:ext uri="{FF2B5EF4-FFF2-40B4-BE49-F238E27FC236}">
+                <a16:creationId xmlns:a16="http://schemas.microsoft.com/office/drawing/2014/main" id="{8CF323E3-8B65-4C71-AF76-C3FE6A030EE3}"/>
+              </a:ext>
+            </a:extLst>
+          </p:cNvPr>
+          <p:cNvSpPr>
+            <a:spLocks xmlns:a="http://schemas.openxmlformats.org/drawingml/2006/main" noGrp="1"/>
+          </p:cNvSpPr>
+          <p:nvPr/>
+        </p:nvSpPr>
+        <p:spPr>
+          <a:xfrm xmlns:a="http://schemas.openxmlformats.org/drawingml/2006/main">
+            <a:off x="457200" y="1066800"/>
+            <a:ext cx="11277600" cy="9525"/>
+          </a:xfrm>
+          <a:prstGeom xmlns:a="http://schemas.openxmlformats.org/drawingml/2006/main" prst="rect">
+            <a:avLst/>
+          </a:prstGeom>
+          <a:solidFill xmlns:a="http://schemas.openxmlformats.org/drawingml/2006/main">
+            <a:srgbClr val="CBD5E1"/>
+          </a:solidFill>
+          <a:ln xmlns:a="http://schemas.openxmlformats.org/drawingml/2006/main" w="0">
+            <a:solidFill>
+              <a:srgbClr val="CBD5E1"/>
+            </a:solidFill>
+            <a:prstDash val="solid"/>
+          </a:ln>
+        </p:spPr>
+      </p:sp>
+      <p:graphicFrame>
+        <p:nvGraphicFramePr>
+          <p:cNvPr id="9" name=""/>
+          <p:cNvGraphicFramePr/>
+          <p:nvPr/>
+        </p:nvGraphicFramePr>
+        <p:xfrm>
+          <a:off xmlns:a="http://schemas.openxmlformats.org/drawingml/2006/main" x="1047750" y="1428750"/>
+          <a:ext xmlns:a="http://schemas.openxmlformats.org/drawingml/2006/main" cx="9525000" cy="3429000"/>
+        </p:xfrm>
+        <a:graphic xmlns:a="http://schemas.openxmlformats.org/drawingml/2006/main">
+          <a:graphicData uri="http://schemas.openxmlformats.org/drawingml/2006/table">
+            <a:tbl>
+              <a:tblPr firstRow="1" bandRow="1"/>
+              <a:tblGrid>
+                <a:gridCol w="2000250"/>
+                <a:gridCol w="2476500"/>
+                <a:gridCol w="2476500"/>
+                <a:gridCol w="2571750"/>
+              </a:tblGrid>
+              <a:tr h="489857">
                 <a:tc>
                   <a:txBody>
                     <a:bodyPr/>
@@ -2748,7 +3403,7 @@
                             <a:srgbClr val="FFFFFF"/>
                           </a:solidFill>
                         </a:rPr>
-                        <a:t>当前观察</a:t>
+                        <a:t>指标</a:t>
                       </a:r>
                     </a:p>
                   </a:txBody>
@@ -2758,160 +3413,484 @@
                     </a:solidFill>
                   </a:tcPr>
                 </a:tc>
+                <a:tc>
+                  <a:txBody>
+                    <a:bodyPr/>
+                    <a:lstStyle/>
+                    <a:p>
+                      <a:r>
+                        <a:rPr sz="900" b="1">
+                          <a:solidFill>
+                            <a:srgbClr val="FFFFFF"/>
+                          </a:solidFill>
+                        </a:rPr>
+                        <a:t>AutoPhaseNN</a:t>
+                      </a:r>
+                    </a:p>
+                  </a:txBody>
+                  <a:tcPr marL="91440" marR="91440" marT="45720" marB="45720">
+                    <a:solidFill>
+                      <a:srgbClr val="0F172A"/>
+                    </a:solidFill>
+                  </a:tcPr>
+                </a:tc>
+                <a:tc>
+                  <a:txBody>
+                    <a:bodyPr/>
+                    <a:lstStyle/>
+                    <a:p>
+                      <a:r>
+                        <a:rPr sz="900" b="1">
+                          <a:solidFill>
+                            <a:srgbClr val="FFFFFF"/>
+                          </a:solidFill>
+                        </a:rPr>
+                        <a:t>UMamba hard</a:t>
+                      </a:r>
+                    </a:p>
+                  </a:txBody>
+                  <a:tcPr marL="91440" marR="91440" marT="45720" marB="45720">
+                    <a:solidFill>
+                      <a:srgbClr val="0F172A"/>
+                    </a:solidFill>
+                  </a:tcPr>
+                </a:tc>
+                <a:tc>
+                  <a:txBody>
+                    <a:bodyPr/>
+                    <a:lstStyle/>
+                    <a:p>
+                      <a:r>
+                        <a:rPr sz="900" b="1">
+                          <a:solidFill>
+                            <a:srgbClr val="FFFFFF"/>
+                          </a:solidFill>
+                        </a:rPr>
+                        <a:t>UMamba soft/only-diff</a:t>
+                      </a:r>
+                    </a:p>
+                  </a:txBody>
+                  <a:tcPr marL="91440" marR="91440" marT="45720" marB="45720">
+                    <a:solidFill>
+                      <a:srgbClr val="0F172A"/>
+                    </a:solidFill>
+                  </a:tcPr>
+                </a:tc>
               </a:tr>
-              <a:tr h="500063">
-                <a:tc>
-                  <a:txBody>
-                    <a:bodyPr/>
-                    <a:lstStyle/>
-                    <a:p>
-                      <a:r>
-                        <a:rPr sz="900">
-                          <a:solidFill>
-                            <a:srgbClr val="0F172A"/>
-                          </a:solidFill>
-                        </a:rPr>
-                        <a:t>AutoPhaseNN 复现</a:t>
-                      </a:r>
-                    </a:p>
-                  </a:txBody>
-                  <a:tcPr marL="91440" marR="91440" marT="45720" marB="45720"/>
-                </a:tc>
-                <a:tc>
-                  <a:txBody>
-                    <a:bodyPr/>
-                    <a:lstStyle/>
-                    <a:p>
-                      <a:r>
-                        <a:rPr sz="900">
-                          <a:solidFill>
-                            <a:srgbClr val="0F172A"/>
-                          </a:solidFill>
-                        </a:rPr>
-                        <a:t>full set / L1 / hard support</a:t>
-                      </a:r>
-                    </a:p>
-                  </a:txBody>
-                  <a:tcPr marL="91440" marR="91440" marT="45720" marB="45720"/>
-                </a:tc>
-                <a:tc>
-                  <a:txBody>
-                    <a:bodyPr/>
-                    <a:lstStyle/>
-                    <a:p>
-                      <a:r>
-                        <a:rPr sz="900">
-                          <a:solidFill>
-                            <a:srgbClr val="0F172A"/>
-                          </a:solidFill>
-                        </a:rPr>
-                        <a:t>可视化中 amp、phase、support 基本在中心目标区域</a:t>
+              <a:tr h="489857">
+                <a:tc>
+                  <a:txBody>
+                    <a:bodyPr/>
+                    <a:lstStyle/>
+                    <a:p>
+                      <a:r>
+                        <a:rPr sz="900">
+                          <a:solidFill>
+                            <a:srgbClr val="0F172A"/>
+                          </a:solidFill>
+                        </a:rPr>
+                        <a:t>FT L1 ↓</a:t>
+                      </a:r>
+                    </a:p>
+                  </a:txBody>
+                  <a:tcPr marL="91440" marR="91440" marT="45720" marB="45720"/>
+                </a:tc>
+                <a:tc>
+                  <a:txBody>
+                    <a:bodyPr/>
+                    <a:lstStyle/>
+                    <a:p>
+                      <a:r>
+                        <a:rPr sz="900">
+                          <a:solidFill>
+                            <a:srgbClr val="0F172A"/>
+                          </a:solidFill>
+                        </a:rPr>
+                        <a:t>5.09</a:t>
+                      </a:r>
+                    </a:p>
+                  </a:txBody>
+                  <a:tcPr marL="91440" marR="91440" marT="45720" marB="45720"/>
+                </a:tc>
+                <a:tc>
+                  <a:txBody>
+                    <a:bodyPr/>
+                    <a:lstStyle/>
+                    <a:p>
+                      <a:r>
+                        <a:rPr sz="900">
+                          <a:solidFill>
+                            <a:srgbClr val="0F172A"/>
+                          </a:solidFill>
+                        </a:rPr>
+                        <a:t>6.10</a:t>
+                      </a:r>
+                    </a:p>
+                  </a:txBody>
+                  <a:tcPr marL="91440" marR="91440" marT="45720" marB="45720"/>
+                </a:tc>
+                <a:tc>
+                  <a:txBody>
+                    <a:bodyPr/>
+                    <a:lstStyle/>
+                    <a:p>
+                      <a:r>
+                        <a:rPr sz="900">
+                          <a:solidFill>
+                            <a:srgbClr val="0F172A"/>
+                          </a:solidFill>
+                        </a:rPr>
+                        <a:t>4.63</a:t>
                       </a:r>
                     </a:p>
                   </a:txBody>
                   <a:tcPr marL="91440" marR="91440" marT="45720" marB="45720"/>
                 </a:tc>
               </a:tr>
-              <a:tr h="500063">
-                <a:tc>
-                  <a:txBody>
-                    <a:bodyPr/>
-                    <a:lstStyle/>
-                    <a:p>
-                      <a:r>
-                        <a:rPr sz="900">
-                          <a:solidFill>
-                            <a:srgbClr val="0F172A"/>
-                          </a:solidFill>
-                        </a:rPr>
-                        <a:t>UMamba 原始硬阈值</a:t>
-                      </a:r>
-                    </a:p>
-                  </a:txBody>
-                  <a:tcPr marL="91440" marR="91440" marT="45720" marB="45720"/>
-                </a:tc>
-                <a:tc>
-                  <a:txBody>
-                    <a:bodyPr/>
-                    <a:lstStyle/>
-                    <a:p>
-                      <a:r>
-                        <a:rPr sz="900">
-                          <a:solidFill>
-                            <a:srgbClr val="0F172A"/>
-                          </a:solidFill>
-                        </a:rPr>
-                        <a:t>100 samples / 400 epoch / L1</a:t>
-                      </a:r>
-                    </a:p>
-                  </a:txBody>
-                  <a:tcPr marL="91440" marR="91440" marT="45720" marB="45720"/>
-                </a:tc>
-                <a:tc>
-                  <a:txBody>
-                    <a:bodyPr/>
-                    <a:lstStyle/>
-                    <a:p>
-                      <a:r>
-                        <a:rPr sz="900">
-                          <a:solidFill>
-                            <a:srgbClr val="0F172A"/>
-                          </a:solidFill>
-                        </a:rPr>
-                        <a:t>loss 可下降，但实空间 support/phase 指标很差</a:t>
+              <a:tr h="489857">
+                <a:tc>
+                  <a:txBody>
+                    <a:bodyPr/>
+                    <a:lstStyle/>
+                    <a:p>
+                      <a:r>
+                        <a:rPr sz="900">
+                          <a:solidFill>
+                            <a:srgbClr val="0F172A"/>
+                          </a:solidFill>
+                        </a:rPr>
+                        <a:t>Rel L1 ↓</a:t>
+                      </a:r>
+                    </a:p>
+                  </a:txBody>
+                  <a:tcPr marL="91440" marR="91440" marT="45720" marB="45720"/>
+                </a:tc>
+                <a:tc>
+                  <a:txBody>
+                    <a:bodyPr/>
+                    <a:lstStyle/>
+                    <a:p>
+                      <a:r>
+                        <a:rPr sz="900">
+                          <a:solidFill>
+                            <a:srgbClr val="0F172A"/>
+                          </a:solidFill>
+                        </a:rPr>
+                        <a:t>0.429</a:t>
+                      </a:r>
+                    </a:p>
+                  </a:txBody>
+                  <a:tcPr marL="91440" marR="91440" marT="45720" marB="45720"/>
+                </a:tc>
+                <a:tc>
+                  <a:txBody>
+                    <a:bodyPr/>
+                    <a:lstStyle/>
+                    <a:p>
+                      <a:r>
+                        <a:rPr sz="900">
+                          <a:solidFill>
+                            <a:srgbClr val="0F172A"/>
+                          </a:solidFill>
+                        </a:rPr>
+                        <a:t>0.523</a:t>
+                      </a:r>
+                    </a:p>
+                  </a:txBody>
+                  <a:tcPr marL="91440" marR="91440" marT="45720" marB="45720"/>
+                </a:tc>
+                <a:tc>
+                  <a:txBody>
+                    <a:bodyPr/>
+                    <a:lstStyle/>
+                    <a:p>
+                      <a:r>
+                        <a:rPr sz="900">
+                          <a:solidFill>
+                            <a:srgbClr val="0F172A"/>
+                          </a:solidFill>
+                        </a:rPr>
+                        <a:t>0.394</a:t>
                       </a:r>
                     </a:p>
                   </a:txBody>
                   <a:tcPr marL="91440" marR="91440" marT="45720" marB="45720"/>
                 </a:tc>
               </a:tr>
-              <a:tr h="500063">
-                <a:tc>
-                  <a:txBody>
-                    <a:bodyPr/>
-                    <a:lstStyle/>
-                    <a:p>
-                      <a:r>
-                        <a:rPr sz="900">
-                          <a:solidFill>
-                            <a:srgbClr val="0F172A"/>
-                          </a:solidFill>
-                        </a:rPr>
-                        <a:t>UMamba 软阈值</a:t>
-                      </a:r>
-                    </a:p>
-                  </a:txBody>
-                  <a:tcPr marL="91440" marR="91440" marT="45720" marB="45720"/>
-                </a:tc>
-                <a:tc>
-                  <a:txBody>
-                    <a:bodyPr/>
-                    <a:lstStyle/>
-                    <a:p>
-                      <a:r>
-                        <a:rPr sz="900">
-                          <a:solidFill>
-                            <a:srgbClr val="0F172A"/>
-                          </a:solidFill>
-                        </a:rPr>
-                        <a:t>soft support / only-diff 指标</a:t>
-                      </a:r>
-                    </a:p>
-                  </a:txBody>
-                  <a:tcPr marL="91440" marR="91440" marT="45720" marB="45720"/>
-                </a:tc>
-                <a:tc>
-                  <a:txBody>
-                    <a:bodyPr/>
-                    <a:lstStyle/>
-                    <a:p>
-                      <a:r>
-                        <a:rPr sz="900">
-                          <a:solidFill>
-                            <a:srgbClr val="0F172A"/>
-                          </a:solidFill>
-                        </a:rPr>
-                        <a:t>FT 指标可以较好，但实空间图仍需补充独立可视化</a:t>
+              <a:tr h="489857">
+                <a:tc>
+                  <a:txBody>
+                    <a:bodyPr/>
+                    <a:lstStyle/>
+                    <a:p>
+                      <a:r>
+                        <a:rPr sz="900">
+                          <a:solidFill>
+                            <a:srgbClr val="0F172A"/>
+                          </a:solidFill>
+                        </a:rPr>
+                        <a:t>Pearson ↑</a:t>
+                      </a:r>
+                    </a:p>
+                  </a:txBody>
+                  <a:tcPr marL="91440" marR="91440" marT="45720" marB="45720"/>
+                </a:tc>
+                <a:tc>
+                  <a:txBody>
+                    <a:bodyPr/>
+                    <a:lstStyle/>
+                    <a:p>
+                      <a:r>
+                        <a:rPr sz="900">
+                          <a:solidFill>
+                            <a:srgbClr val="0F172A"/>
+                          </a:solidFill>
+                        </a:rPr>
+                        <a:t>0.923</a:t>
+                      </a:r>
+                    </a:p>
+                  </a:txBody>
+                  <a:tcPr marL="91440" marR="91440" marT="45720" marB="45720"/>
+                </a:tc>
+                <a:tc>
+                  <a:txBody>
+                    <a:bodyPr/>
+                    <a:lstStyle/>
+                    <a:p>
+                      <a:r>
+                        <a:rPr sz="900">
+                          <a:solidFill>
+                            <a:srgbClr val="0F172A"/>
+                          </a:solidFill>
+                        </a:rPr>
+                        <a:t>0.822</a:t>
+                      </a:r>
+                    </a:p>
+                  </a:txBody>
+                  <a:tcPr marL="91440" marR="91440" marT="45720" marB="45720"/>
+                </a:tc>
+                <a:tc>
+                  <a:txBody>
+                    <a:bodyPr/>
+                    <a:lstStyle/>
+                    <a:p>
+                      <a:r>
+                        <a:rPr sz="900">
+                          <a:solidFill>
+                            <a:srgbClr val="0F172A"/>
+                          </a:solidFill>
+                        </a:rPr>
+                        <a:t>0.980</a:t>
+                      </a:r>
+                    </a:p>
+                  </a:txBody>
+                  <a:tcPr marL="91440" marR="91440" marT="45720" marB="45720"/>
+                </a:tc>
+              </a:tr>
+              <a:tr h="489857">
+                <a:tc>
+                  <a:txBody>
+                    <a:bodyPr/>
+                    <a:lstStyle/>
+                    <a:p>
+                      <a:r>
+                        <a:rPr sz="900">
+                          <a:solidFill>
+                            <a:srgbClr val="0F172A"/>
+                          </a:solidFill>
+                        </a:rPr>
+                        <a:t>Amp L1 ↓</a:t>
+                      </a:r>
+                    </a:p>
+                  </a:txBody>
+                  <a:tcPr marL="91440" marR="91440" marT="45720" marB="45720"/>
+                </a:tc>
+                <a:tc>
+                  <a:txBody>
+                    <a:bodyPr/>
+                    <a:lstStyle/>
+                    <a:p>
+                      <a:r>
+                        <a:rPr sz="900">
+                          <a:solidFill>
+                            <a:srgbClr val="0F172A"/>
+                          </a:solidFill>
+                        </a:rPr>
+                        <a:t>0.0199</a:t>
+                      </a:r>
+                    </a:p>
+                  </a:txBody>
+                  <a:tcPr marL="91440" marR="91440" marT="45720" marB="45720"/>
+                </a:tc>
+                <a:tc>
+                  <a:txBody>
+                    <a:bodyPr/>
+                    <a:lstStyle/>
+                    <a:p>
+                      <a:r>
+                        <a:rPr sz="900">
+                          <a:solidFill>
+                            <a:srgbClr val="0F172A"/>
+                          </a:solidFill>
+                        </a:rPr>
+                        <a:t>0.0255</a:t>
+                      </a:r>
+                    </a:p>
+                  </a:txBody>
+                  <a:tcPr marL="91440" marR="91440" marT="45720" marB="45720"/>
+                </a:tc>
+                <a:tc>
+                  <a:txBody>
+                    <a:bodyPr/>
+                    <a:lstStyle/>
+                    <a:p>
+                      <a:r>
+                        <a:rPr sz="900">
+                          <a:solidFill>
+                            <a:srgbClr val="0F172A"/>
+                          </a:solidFill>
+                        </a:rPr>
+                        <a:t>0.0484</a:t>
+                      </a:r>
+                    </a:p>
+                  </a:txBody>
+                  <a:tcPr marL="91440" marR="91440" marT="45720" marB="45720"/>
+                </a:tc>
+              </a:tr>
+              <a:tr h="489857">
+                <a:tc>
+                  <a:txBody>
+                    <a:bodyPr/>
+                    <a:lstStyle/>
+                    <a:p>
+                      <a:r>
+                        <a:rPr sz="900">
+                          <a:solidFill>
+                            <a:srgbClr val="0F172A"/>
+                          </a:solidFill>
+                        </a:rPr>
+                        <a:t>Support Dice ↑</a:t>
+                      </a:r>
+                    </a:p>
+                  </a:txBody>
+                  <a:tcPr marL="91440" marR="91440" marT="45720" marB="45720"/>
+                </a:tc>
+                <a:tc>
+                  <a:txBody>
+                    <a:bodyPr/>
+                    <a:lstStyle/>
+                    <a:p>
+                      <a:r>
+                        <a:rPr sz="900">
+                          <a:solidFill>
+                            <a:srgbClr val="0F172A"/>
+                          </a:solidFill>
+                        </a:rPr>
+                        <a:t>0.330</a:t>
+                      </a:r>
+                    </a:p>
+                  </a:txBody>
+                  <a:tcPr marL="91440" marR="91440" marT="45720" marB="45720"/>
+                </a:tc>
+                <a:tc>
+                  <a:txBody>
+                    <a:bodyPr/>
+                    <a:lstStyle/>
+                    <a:p>
+                      <a:r>
+                        <a:rPr sz="900">
+                          <a:solidFill>
+                            <a:srgbClr val="0F172A"/>
+                          </a:solidFill>
+                        </a:rPr>
+                        <a:t>0.012</a:t>
+                      </a:r>
+                    </a:p>
+                  </a:txBody>
+                  <a:tcPr marL="91440" marR="91440" marT="45720" marB="45720"/>
+                </a:tc>
+                <a:tc>
+                  <a:txBody>
+                    <a:bodyPr/>
+                    <a:lstStyle/>
+                    <a:p>
+                      <a:r>
+                        <a:rPr sz="900">
+                          <a:solidFill>
+                            <a:srgbClr val="0F172A"/>
+                          </a:solidFill>
+                        </a:rPr>
+                        <a:t>0.205</a:t>
+                      </a:r>
+                    </a:p>
+                  </a:txBody>
+                  <a:tcPr marL="91440" marR="91440" marT="45720" marB="45720"/>
+                </a:tc>
+              </a:tr>
+              <a:tr h="489857">
+                <a:tc>
+                  <a:txBody>
+                    <a:bodyPr/>
+                    <a:lstStyle/>
+                    <a:p>
+                      <a:r>
+                        <a:rPr sz="900">
+                          <a:solidFill>
+                            <a:srgbClr val="0F172A"/>
+                          </a:solidFill>
+                        </a:rPr>
+                        <a:t>Phase MAE ↓</a:t>
+                      </a:r>
+                    </a:p>
+                  </a:txBody>
+                  <a:tcPr marL="91440" marR="91440" marT="45720" marB="45720"/>
+                </a:tc>
+                <a:tc>
+                  <a:txBody>
+                    <a:bodyPr/>
+                    <a:lstStyle/>
+                    <a:p>
+                      <a:r>
+                        <a:rPr sz="900">
+                          <a:solidFill>
+                            <a:srgbClr val="0F172A"/>
+                          </a:solidFill>
+                        </a:rPr>
+                        <a:t>0.873</a:t>
+                      </a:r>
+                    </a:p>
+                  </a:txBody>
+                  <a:tcPr marL="91440" marR="91440" marT="45720" marB="45720"/>
+                </a:tc>
+                <a:tc>
+                  <a:txBody>
+                    <a:bodyPr/>
+                    <a:lstStyle/>
+                    <a:p>
+                      <a:r>
+                        <a:rPr sz="900">
+                          <a:solidFill>
+                            <a:srgbClr val="0F172A"/>
+                          </a:solidFill>
+                        </a:rPr>
+                        <a:t>2.402</a:t>
+                      </a:r>
+                    </a:p>
+                  </a:txBody>
+                  <a:tcPr marL="91440" marR="91440" marT="45720" marB="45720"/>
+                </a:tc>
+                <a:tc>
+                  <a:txBody>
+                    <a:bodyPr/>
+                    <a:lstStyle/>
+                    <a:p>
+                      <a:r>
+                        <a:rPr sz="900">
+                          <a:solidFill>
+                            <a:srgbClr val="0F172A"/>
+                          </a:solidFill>
+                        </a:rPr>
+                        <a:t>1.037</a:t>
                       </a:r>
                     </a:p>
                   </a:txBody>
@@ -2924,10 +3903,10 @@
       </p:graphicFrame>
       <p:sp>
         <p:nvSpPr>
-          <p:cNvPr id="17" name="">
+          <p:cNvPr id="5" name="">
             <a:extLst xmlns:a="http://schemas.openxmlformats.org/drawingml/2006/main">
               <a:ext uri="{FF2B5EF4-FFF2-40B4-BE49-F238E27FC236}">
-                <a16:creationId xmlns:a16="http://schemas.microsoft.com/office/drawing/2014/main" id="{38FAAFF3-39F7-43B1-AEAE-A6E4E666B2AF}"/>
+                <a16:creationId xmlns:a16="http://schemas.microsoft.com/office/drawing/2014/main" id="{165EBF84-84A3-4BBE-B4A3-65DFD495F922}"/>
               </a:ext>
             </a:extLst>
           </p:cNvPr>
@@ -2938,8 +3917,8 @@
         </p:nvSpPr>
         <p:spPr>
           <a:xfrm xmlns:a="http://schemas.openxmlformats.org/drawingml/2006/main">
-            <a:off x="857250" y="5619750"/>
-            <a:ext cx="10096500" cy="419100"/>
+            <a:off x="1238250" y="5334000"/>
+            <a:ext cx="9048750" cy="571500"/>
           </a:xfrm>
           <a:prstGeom xmlns:a="http://schemas.openxmlformats.org/drawingml/2006/main" prst="rect">
             <a:avLst/>
@@ -2954,20 +3933,20 @@
           <a:bodyPr xmlns:a="http://schemas.openxmlformats.org/drawingml/2006/main"/>
           <a:lstStyle xmlns:a="http://schemas.openxmlformats.org/drawingml/2006/main"/>
           <a:p xmlns:a="http://schemas.openxmlformats.org/drawingml/2006/main">
-            <a:pPr>
-              <a:defRPr sz="1125">
-                <a:solidFill>
-                  <a:srgbClr val="475569"/>
+            <a:pPr algn="ctr">
+              <a:defRPr sz="1575" b="1">
+                <a:solidFill>
+                  <a:srgbClr val="0F172A"/>
                 </a:solidFill>
               </a:defRPr>
             </a:pPr>
             <a:r>
-              <a:rPr sz="1125">
-                <a:solidFill>
-                  <a:srgbClr val="475569"/>
+              <a:rPr sz="1575" b="1">
+                <a:solidFill>
+                  <a:srgbClr val="0F172A"/>
                 </a:solidFill>
               </a:rPr>
-              <a:t>图像说明：本版 PPT 不裁剪图片，直接放完整结果图；当前仓库缺少一张非空的 UMamba hard/soft 独立可视化图，已在对应页留位。</a:t>
+              <a:t>简短结论：AutoPhaseNN 的图像恢复更符合实空间物理结构；UMamba 即使 FT/Pearson 指标较好，也可能恢复出不正确的 amp、phase、support。</a:t>
             </a:r>
           </a:p>
         </p:txBody>
@@ -2975,7 +3954,413 @@
     </p:spTree>
     <p:extLst>
       <p:ext uri="{BB962C8B-B14F-4D97-AF65-F5344CB8AC3E}">
-        <p14:creationId xmlns:p14="http://schemas.microsoft.com/office/powerpoint/2010/main" val="422995546"/>
+        <p14:creationId xmlns:p14="http://schemas.microsoft.com/office/powerpoint/2010/main" val="577084230"/>
+      </p:ext>
+    </p:extLst>
+  </p:cSld>
+</p:sld>
+</file>
+
+<file path=ppt/slides/slide11.xml><?xml version="1.0" encoding="utf-8"?>
+<p:sld xmlns:p="http://schemas.openxmlformats.org/presentationml/2006/main">
+  <p:cSld>
+    <p:bg>
+      <p:bgPr>
+        <a:solidFill xmlns:a="http://schemas.openxmlformats.org/drawingml/2006/main">
+          <a:srgbClr val="F8FAFC"/>
+        </a:solidFill>
+      </p:bgPr>
+    </p:bg>
+    <p:spTree>
+      <p:nvGrpSpPr>
+        <p:cNvPr id="1" name=""/>
+        <p:cNvGrpSpPr/>
+        <p:nvPr/>
+      </p:nvGrpSpPr>
+      <p:grpSpPr>
+        <a:xfrm xmlns:a="http://schemas.openxmlformats.org/drawingml/2006/main"/>
+      </p:grpSpPr>
+      <p:sp>
+        <p:nvSpPr>
+          <p:cNvPr id="1" name="">
+            <a:extLst xmlns:a="http://schemas.openxmlformats.org/drawingml/2006/main">
+              <a:ext uri="{FF2B5EF4-FFF2-40B4-BE49-F238E27FC236}">
+                <a16:creationId xmlns:a16="http://schemas.microsoft.com/office/drawing/2014/main" id="{BF31D921-19A4-47D6-9A1A-AC0046E0D3B2}"/>
+              </a:ext>
+            </a:extLst>
+          </p:cNvPr>
+          <p:cNvSpPr>
+            <a:spLocks xmlns:a="http://schemas.openxmlformats.org/drawingml/2006/main" noGrp="1"/>
+          </p:cNvSpPr>
+          <p:nvPr/>
+        </p:nvSpPr>
+        <p:spPr>
+          <a:xfrm xmlns:a="http://schemas.openxmlformats.org/drawingml/2006/main">
+            <a:off x="457200" y="304800"/>
+            <a:ext cx="8858250" cy="438150"/>
+          </a:xfrm>
+          <a:prstGeom xmlns:a="http://schemas.openxmlformats.org/drawingml/2006/main" prst="rect">
+            <a:avLst/>
+          </a:prstGeom>
+          <a:noFill xmlns:a="http://schemas.openxmlformats.org/drawingml/2006/main"/>
+          <a:ln xmlns:a="http://schemas.openxmlformats.org/drawingml/2006/main" w="0">
+            <a:noFill/>
+            <a:prstDash val="solid"/>
+          </a:ln>
+        </p:spPr>
+        <p:txBody>
+          <a:bodyPr xmlns:a="http://schemas.openxmlformats.org/drawingml/2006/main"/>
+          <a:lstStyle xmlns:a="http://schemas.openxmlformats.org/drawingml/2006/main"/>
+          <a:p xmlns:a="http://schemas.openxmlformats.org/drawingml/2006/main">
+            <a:pPr>
+              <a:defRPr sz="2250" b="1">
+                <a:solidFill>
+                  <a:srgbClr val="0F172A"/>
+                </a:solidFill>
+              </a:defRPr>
+            </a:pPr>
+            <a:r>
+              <a:rPr sz="2250" b="1">
+                <a:solidFill>
+                  <a:srgbClr val="0F172A"/>
+                </a:solidFill>
+              </a:rPr>
+              <a:t>还需要补的图</a:t>
+            </a:r>
+          </a:p>
+        </p:txBody>
+      </p:sp>
+      <p:sp>
+        <p:nvSpPr>
+          <p:cNvPr id="2" name="">
+            <a:extLst xmlns:a="http://schemas.openxmlformats.org/drawingml/2006/main">
+              <a:ext uri="{FF2B5EF4-FFF2-40B4-BE49-F238E27FC236}">
+                <a16:creationId xmlns:a16="http://schemas.microsoft.com/office/drawing/2014/main" id="{777F8860-A4E8-4DAB-AA02-530D4E0AED49}"/>
+              </a:ext>
+            </a:extLst>
+          </p:cNvPr>
+          <p:cNvSpPr>
+            <a:spLocks xmlns:a="http://schemas.openxmlformats.org/drawingml/2006/main" noGrp="1"/>
+          </p:cNvSpPr>
+          <p:nvPr/>
+        </p:nvSpPr>
+        <p:spPr>
+          <a:xfrm xmlns:a="http://schemas.openxmlformats.org/drawingml/2006/main">
+            <a:off x="476250" y="742950"/>
+            <a:ext cx="10096500" cy="266700"/>
+          </a:xfrm>
+          <a:prstGeom xmlns:a="http://schemas.openxmlformats.org/drawingml/2006/main" prst="rect">
+            <a:avLst/>
+          </a:prstGeom>
+          <a:noFill xmlns:a="http://schemas.openxmlformats.org/drawingml/2006/main"/>
+          <a:ln xmlns:a="http://schemas.openxmlformats.org/drawingml/2006/main" w="0">
+            <a:noFill/>
+            <a:prstDash val="solid"/>
+          </a:ln>
+        </p:spPr>
+        <p:txBody>
+          <a:bodyPr xmlns:a="http://schemas.openxmlformats.org/drawingml/2006/main"/>
+          <a:lstStyle xmlns:a="http://schemas.openxmlformats.org/drawingml/2006/main"/>
+          <a:p xmlns:a="http://schemas.openxmlformats.org/drawingml/2006/main">
+            <a:pPr>
+              <a:defRPr sz="975">
+                <a:solidFill>
+                  <a:srgbClr val="475569"/>
+                </a:solidFill>
+              </a:defRPr>
+            </a:pPr>
+            <a:r>
+              <a:rPr sz="975">
+                <a:solidFill>
+                  <a:srgbClr val="475569"/>
+                </a:solidFill>
+              </a:rPr>
+              <a:t>后续只要把图文件补到对应位置，就可以替换占位页</a:t>
+            </a:r>
+          </a:p>
+        </p:txBody>
+      </p:sp>
+      <p:sp>
+        <p:nvSpPr>
+          <p:cNvPr id="3" name="">
+            <a:extLst xmlns:a="http://schemas.openxmlformats.org/drawingml/2006/main">
+              <a:ext uri="{FF2B5EF4-FFF2-40B4-BE49-F238E27FC236}">
+                <a16:creationId xmlns:a16="http://schemas.microsoft.com/office/drawing/2014/main" id="{E3E13009-4C19-4ABA-B9F5-BC237A4F007D}"/>
+              </a:ext>
+            </a:extLst>
+          </p:cNvPr>
+          <p:cNvSpPr>
+            <a:spLocks xmlns:a="http://schemas.openxmlformats.org/drawingml/2006/main" noGrp="1"/>
+          </p:cNvSpPr>
+          <p:nvPr/>
+        </p:nvSpPr>
+        <p:spPr>
+          <a:xfrm xmlns:a="http://schemas.openxmlformats.org/drawingml/2006/main">
+            <a:off x="457200" y="1066800"/>
+            <a:ext cx="11277600" cy="9525"/>
+          </a:xfrm>
+          <a:prstGeom xmlns:a="http://schemas.openxmlformats.org/drawingml/2006/main" prst="rect">
+            <a:avLst/>
+          </a:prstGeom>
+          <a:solidFill xmlns:a="http://schemas.openxmlformats.org/drawingml/2006/main">
+            <a:srgbClr val="CBD5E1"/>
+          </a:solidFill>
+          <a:ln xmlns:a="http://schemas.openxmlformats.org/drawingml/2006/main" w="0">
+            <a:solidFill>
+              <a:srgbClr val="CBD5E1"/>
+            </a:solidFill>
+            <a:prstDash val="solid"/>
+          </a:ln>
+        </p:spPr>
+      </p:sp>
+      <p:graphicFrame>
+        <p:nvGraphicFramePr>
+          <p:cNvPr id="9" name=""/>
+          <p:cNvGraphicFramePr/>
+          <p:nvPr/>
+        </p:nvGraphicFramePr>
+        <p:xfrm>
+          <a:off xmlns:a="http://schemas.openxmlformats.org/drawingml/2006/main" x="1238250" y="1714500"/>
+          <a:ext xmlns:a="http://schemas.openxmlformats.org/drawingml/2006/main" cx="9525000" cy="2095500"/>
+        </p:xfrm>
+        <a:graphic xmlns:a="http://schemas.openxmlformats.org/drawingml/2006/main">
+          <a:graphicData uri="http://schemas.openxmlformats.org/drawingml/2006/table">
+            <a:tbl>
+              <a:tblPr firstRow="1" bandRow="1"/>
+              <a:tblGrid>
+                <a:gridCol w="3143250"/>
+                <a:gridCol w="2571750"/>
+                <a:gridCol w="3810000"/>
+              </a:tblGrid>
+              <a:tr h="698500">
+                <a:tc>
+                  <a:txBody>
+                    <a:bodyPr/>
+                    <a:lstStyle/>
+                    <a:p>
+                      <a:r>
+                        <a:rPr sz="900" b="1">
+                          <a:solidFill>
+                            <a:srgbClr val="FFFFFF"/>
+                          </a:solidFill>
+                        </a:rPr>
+                        <a:t>缺图</a:t>
+                      </a:r>
+                    </a:p>
+                  </a:txBody>
+                  <a:tcPr marL="91440" marR="91440" marT="45720" marB="45720">
+                    <a:solidFill>
+                      <a:srgbClr val="0F172A"/>
+                    </a:solidFill>
+                  </a:tcPr>
+                </a:tc>
+                <a:tc>
+                  <a:txBody>
+                    <a:bodyPr/>
+                    <a:lstStyle/>
+                    <a:p>
+                      <a:r>
+                        <a:rPr sz="900" b="1">
+                          <a:solidFill>
+                            <a:srgbClr val="FFFFFF"/>
+                          </a:solidFill>
+                        </a:rPr>
+                        <a:t>当前状态</a:t>
+                      </a:r>
+                    </a:p>
+                  </a:txBody>
+                  <a:tcPr marL="91440" marR="91440" marT="45720" marB="45720">
+                    <a:solidFill>
+                      <a:srgbClr val="0F172A"/>
+                    </a:solidFill>
+                  </a:tcPr>
+                </a:tc>
+                <a:tc>
+                  <a:txBody>
+                    <a:bodyPr/>
+                    <a:lstStyle/>
+                    <a:p>
+                      <a:r>
+                        <a:rPr sz="900" b="1">
+                          <a:solidFill>
+                            <a:srgbClr val="FFFFFF"/>
+                          </a:solidFill>
+                        </a:rPr>
+                        <a:t>建议输出文件</a:t>
+                      </a:r>
+                    </a:p>
+                  </a:txBody>
+                  <a:tcPr marL="91440" marR="91440" marT="45720" marB="45720">
+                    <a:solidFill>
+                      <a:srgbClr val="0F172A"/>
+                    </a:solidFill>
+                  </a:tcPr>
+                </a:tc>
+              </a:tr>
+              <a:tr h="698500">
+                <a:tc>
+                  <a:txBody>
+                    <a:bodyPr/>
+                    <a:lstStyle/>
+                    <a:p>
+                      <a:r>
+                        <a:rPr sz="900">
+                          <a:solidFill>
+                            <a:srgbClr val="0F172A"/>
+                          </a:solidFill>
+                        </a:rPr>
+                        <a:t>UMamba hard threshold 完整可视化</a:t>
+                      </a:r>
+                    </a:p>
+                  </a:txBody>
+                  <a:tcPr marL="91440" marR="91440" marT="45720" marB="45720"/>
+                </a:tc>
+                <a:tc>
+                  <a:txBody>
+                    <a:bodyPr/>
+                    <a:lstStyle/>
+                    <a:p>
+                      <a:r>
+                        <a:rPr sz="900">
+                          <a:solidFill>
+                            <a:srgbClr val="0F172A"/>
+                          </a:solidFill>
+                        </a:rPr>
+                        <a:t>现有文件 0 字节</a:t>
+                      </a:r>
+                    </a:p>
+                  </a:txBody>
+                  <a:tcPr marL="91440" marR="91440" marT="45720" marB="45720"/>
+                </a:tc>
+                <a:tc>
+                  <a:txBody>
+                    <a:bodyPr/>
+                    <a:lstStyle/>
+                    <a:p>
+                      <a:r>
+                        <a:rPr sz="900">
+                          <a:solidFill>
+                            <a:srgbClr val="0F172A"/>
+                          </a:solidFill>
+                        </a:rPr>
+                        <a:t>umamba_overfit100_l1_.../visualization_train_subset.png</a:t>
+                      </a:r>
+                    </a:p>
+                  </a:txBody>
+                  <a:tcPr marL="91440" marR="91440" marT="45720" marB="45720"/>
+                </a:tc>
+              </a:tr>
+              <a:tr h="698500">
+                <a:tc>
+                  <a:txBody>
+                    <a:bodyPr/>
+                    <a:lstStyle/>
+                    <a:p>
+                      <a:r>
+                        <a:rPr sz="900">
+                          <a:solidFill>
+                            <a:srgbClr val="0F172A"/>
+                          </a:solidFill>
+                        </a:rPr>
+                        <a:t>UMamba soft threshold 独立完整可视化</a:t>
+                      </a:r>
+                    </a:p>
+                  </a:txBody>
+                  <a:tcPr marL="91440" marR="91440" marT="45720" marB="45720"/>
+                </a:tc>
+                <a:tc>
+                  <a:txBody>
+                    <a:bodyPr/>
+                    <a:lstStyle/>
+                    <a:p>
+                      <a:r>
+                        <a:rPr sz="900">
+                          <a:solidFill>
+                            <a:srgbClr val="0F172A"/>
+                          </a:solidFill>
+                        </a:rPr>
+                        <a:t>仓库中未看到单独成品图</a:t>
+                      </a:r>
+                    </a:p>
+                  </a:txBody>
+                  <a:tcPr marL="91440" marR="91440" marT="45720" marB="45720"/>
+                </a:tc>
+                <a:tc>
+                  <a:txBody>
+                    <a:bodyPr/>
+                    <a:lstStyle/>
+                    <a:p>
+                      <a:r>
+                        <a:rPr sz="900">
+                          <a:solidFill>
+                            <a:srgbClr val="0F172A"/>
+                          </a:solidFill>
+                        </a:rPr>
+                        <a:t>umamba_soft_threshold_.../visualization.png</a:t>
+                      </a:r>
+                    </a:p>
+                  </a:txBody>
+                  <a:tcPr marL="91440" marR="91440" marT="45720" marB="45720"/>
+                </a:tc>
+              </a:tr>
+            </a:tbl>
+          </a:graphicData>
+        </a:graphic>
+      </p:graphicFrame>
+      <p:sp>
+        <p:nvSpPr>
+          <p:cNvPr id="5" name="">
+            <a:extLst xmlns:a="http://schemas.openxmlformats.org/drawingml/2006/main">
+              <a:ext uri="{FF2B5EF4-FFF2-40B4-BE49-F238E27FC236}">
+                <a16:creationId xmlns:a16="http://schemas.microsoft.com/office/drawing/2014/main" id="{268DEE3F-BA19-43BB-8D43-69D7A0A2D818}"/>
+              </a:ext>
+            </a:extLst>
+          </p:cNvPr>
+          <p:cNvSpPr>
+            <a:spLocks xmlns:a="http://schemas.openxmlformats.org/drawingml/2006/main" noGrp="1"/>
+          </p:cNvSpPr>
+          <p:nvPr/>
+        </p:nvSpPr>
+        <p:spPr>
+          <a:xfrm xmlns:a="http://schemas.openxmlformats.org/drawingml/2006/main">
+            <a:off x="1524000" y="4476750"/>
+            <a:ext cx="8572500" cy="514350"/>
+          </a:xfrm>
+          <a:prstGeom xmlns:a="http://schemas.openxmlformats.org/drawingml/2006/main" prst="rect">
+            <a:avLst/>
+          </a:prstGeom>
+          <a:noFill xmlns:a="http://schemas.openxmlformats.org/drawingml/2006/main"/>
+          <a:ln xmlns:a="http://schemas.openxmlformats.org/drawingml/2006/main" w="0">
+            <a:noFill/>
+            <a:prstDash val="solid"/>
+          </a:ln>
+        </p:spPr>
+        <p:txBody>
+          <a:bodyPr xmlns:a="http://schemas.openxmlformats.org/drawingml/2006/main"/>
+          <a:lstStyle xmlns:a="http://schemas.openxmlformats.org/drawingml/2006/main"/>
+          <a:p xmlns:a="http://schemas.openxmlformats.org/drawingml/2006/main">
+            <a:pPr algn="ctr">
+              <a:defRPr sz="1800" b="1">
+                <a:solidFill>
+                  <a:srgbClr val="0F766E"/>
+                </a:solidFill>
+              </a:defRPr>
+            </a:pPr>
+            <a:r>
+              <a:rPr sz="1800" b="1">
+                <a:solidFill>
+                  <a:srgbClr val="0F766E"/>
+                </a:solidFill>
+              </a:rPr>
+              <a:t>我已经保留了图片位置；下一次补图后只需要替换对应 slide 的图片，不需要重写汇报结构。</a:t>
+            </a:r>
+          </a:p>
+        </p:txBody>
+      </p:sp>
+    </p:spTree>
+    <p:extLst>
+      <p:ext uri="{BB962C8B-B14F-4D97-AF65-F5344CB8AC3E}">
+        <p14:creationId xmlns:p14="http://schemas.microsoft.com/office/powerpoint/2010/main" val="1340495714"/>
       </p:ext>
     </p:extLst>
   </p:cSld>
@@ -3006,7 +4391,7 @@
           <p:cNvPr id="1" name="">
             <a:extLst xmlns:a="http://schemas.openxmlformats.org/drawingml/2006/main">
               <a:ext uri="{FF2B5EF4-FFF2-40B4-BE49-F238E27FC236}">
-                <a16:creationId xmlns:a16="http://schemas.microsoft.com/office/drawing/2014/main" id="{2CA10F57-C31F-4108-9AB8-7B13C051C1EA}"/>
+                <a16:creationId xmlns:a16="http://schemas.microsoft.com/office/drawing/2014/main" id="{CBE27F15-4326-4D88-83EC-01D24C37D0A5}"/>
               </a:ext>
             </a:extLst>
           </p:cNvPr>
@@ -3046,7 +4431,7 @@
                   <a:srgbClr val="0F172A"/>
                 </a:solidFill>
               </a:rPr>
-              <a:t>训练损失下降曲线</a:t>
+              <a:t>AutoPhaseNN 的训练逻辑</a:t>
             </a:r>
           </a:p>
         </p:txBody>
@@ -3056,7 +4441,7 @@
           <p:cNvPr id="2" name="">
             <a:extLst xmlns:a="http://schemas.openxmlformats.org/drawingml/2006/main">
               <a:ext uri="{FF2B5EF4-FFF2-40B4-BE49-F238E27FC236}">
-                <a16:creationId xmlns:a16="http://schemas.microsoft.com/office/drawing/2014/main" id="{C582666A-D0B7-4526-9EDE-45029981A177}"/>
+                <a16:creationId xmlns:a16="http://schemas.microsoft.com/office/drawing/2014/main" id="{BA752A52-36CC-40AE-98CA-01B0314ABCB1}"/>
               </a:ext>
             </a:extLst>
           </p:cNvPr>
@@ -3068,7 +4453,7 @@
         <p:spPr>
           <a:xfrm xmlns:a="http://schemas.openxmlformats.org/drawingml/2006/main">
             <a:off x="476250" y="742950"/>
-            <a:ext cx="9334500" cy="266700"/>
+            <a:ext cx="10096500" cy="266700"/>
           </a:xfrm>
           <a:prstGeom xmlns:a="http://schemas.openxmlformats.org/drawingml/2006/main" prst="rect">
             <a:avLst/>
@@ -3096,7 +4481,7 @@
                   <a:srgbClr val="475569"/>
                 </a:solidFill>
               </a:rPr>
-              <a:t>同图展示 AutoPhaseNN、UMamba hard、UMamba soft/support run 的 loss 变化</a:t>
+              <a:t>当前复现主要使用衍射域 L1：让模型生成的 farfield 接近输入 diff</a:t>
             </a:r>
           </a:p>
         </p:txBody>
@@ -3106,7 +4491,7 @@
           <p:cNvPr id="3" name="">
             <a:extLst xmlns:a="http://schemas.openxmlformats.org/drawingml/2006/main">
               <a:ext uri="{FF2B5EF4-FFF2-40B4-BE49-F238E27FC236}">
-                <a16:creationId xmlns:a16="http://schemas.microsoft.com/office/drawing/2014/main" id="{DDA872EC-B3A1-4E35-8C08-2123551F0810}"/>
+                <a16:creationId xmlns:a16="http://schemas.microsoft.com/office/drawing/2014/main" id="{F4251685-E205-4251-8B72-85963104A0EB}"/>
               </a:ext>
             </a:extLst>
           </p:cNvPr>
@@ -3134,28 +4519,47 @@
           </a:ln>
         </p:spPr>
       </p:sp>
-      <p:graphicFrame>
-        <p:nvGraphicFramePr>
-          <p:cNvPr id="9" name="Chart"/>
-          <p:cNvGraphicFramePr/>
-          <p:nvPr/>
-        </p:nvGraphicFramePr>
-        <p:xfrm>
-          <a:off xmlns:a="http://schemas.openxmlformats.org/drawingml/2006/main" x="685800" y="1381125"/>
-          <a:ext xmlns:a="http://schemas.openxmlformats.org/drawingml/2006/main" cx="10763250" cy="4191000"/>
-        </p:xfrm>
-        <a:graphic xmlns:a="http://schemas.openxmlformats.org/drawingml/2006/main">
-          <a:graphicData uri="http://schemas.openxmlformats.org/drawingml/2006/chart">
-            <c:chart xmlns:r="http://schemas.openxmlformats.org/officeDocument/2006/relationships" xmlns:c="http://schemas.openxmlformats.org/drawingml/2006/chart" r:id="R23aecb3c50ed47e5"/>
-          </a:graphicData>
-        </a:graphic>
-      </p:graphicFrame>
+      <p:sp>
+        <p:nvSpPr>
+          <p:cNvPr id="4" name="">
+            <a:extLst xmlns:a="http://schemas.openxmlformats.org/drawingml/2006/main">
+              <a:ext uri="{FF2B5EF4-FFF2-40B4-BE49-F238E27FC236}">
+                <a16:creationId xmlns:a16="http://schemas.microsoft.com/office/drawing/2014/main" id="{2DA01A50-6C28-4858-91BA-59E57FD65E23}"/>
+              </a:ext>
+            </a:extLst>
+          </p:cNvPr>
+          <p:cNvSpPr>
+            <a:spLocks xmlns:a="http://schemas.openxmlformats.org/drawingml/2006/main" noGrp="1"/>
+          </p:cNvSpPr>
+          <p:nvPr/>
+        </p:nvSpPr>
+        <p:spPr>
+          <a:xfrm xmlns:a="http://schemas.openxmlformats.org/drawingml/2006/main">
+            <a:off x="1047750" y="1714500"/>
+            <a:ext cx="1143000" cy="533400"/>
+          </a:xfrm>
+          <a:prstGeom xmlns:a="http://schemas.openxmlformats.org/drawingml/2006/main" prst="roundRect">
+            <a:avLst>
+              <a:gd name="adj" fmla="val 14286"/>
+            </a:avLst>
+          </a:prstGeom>
+          <a:solidFill xmlns:a="http://schemas.openxmlformats.org/drawingml/2006/main">
+            <a:srgbClr val="DBEAFE"/>
+          </a:solidFill>
+          <a:ln xmlns:a="http://schemas.openxmlformats.org/drawingml/2006/main" w="9525">
+            <a:solidFill>
+              <a:srgbClr val="99F6E4"/>
+            </a:solidFill>
+            <a:prstDash val="solid"/>
+          </a:ln>
+        </p:spPr>
+      </p:sp>
       <p:sp>
         <p:nvSpPr>
           <p:cNvPr id="5" name="">
             <a:extLst xmlns:a="http://schemas.openxmlformats.org/drawingml/2006/main">
               <a:ext uri="{FF2B5EF4-FFF2-40B4-BE49-F238E27FC236}">
-                <a16:creationId xmlns:a16="http://schemas.microsoft.com/office/drawing/2014/main" id="{C4322CC9-59A0-4EC0-BF7C-0FF476586693}"/>
+                <a16:creationId xmlns:a16="http://schemas.microsoft.com/office/drawing/2014/main" id="{46A02A55-D42D-4FC9-B7DB-E0DDF41DDA54}"/>
               </a:ext>
             </a:extLst>
           </p:cNvPr>
@@ -3166,8 +4570,8 @@
         </p:nvSpPr>
         <p:spPr>
           <a:xfrm xmlns:a="http://schemas.openxmlformats.org/drawingml/2006/main">
-            <a:off x="857250" y="5810250"/>
-            <a:ext cx="9906000" cy="342900"/>
+            <a:off x="1143000" y="1857375"/>
+            <a:ext cx="952500" cy="228600"/>
           </a:xfrm>
           <a:prstGeom xmlns:a="http://schemas.openxmlformats.org/drawingml/2006/main" prst="rect">
             <a:avLst/>
@@ -3182,28 +4586,842 @@
           <a:bodyPr xmlns:a="http://schemas.openxmlformats.org/drawingml/2006/main"/>
           <a:lstStyle xmlns:a="http://schemas.openxmlformats.org/drawingml/2006/main"/>
           <a:p xmlns:a="http://schemas.openxmlformats.org/drawingml/2006/main">
-            <a:pPr>
-              <a:defRPr sz="1275">
+            <a:pPr algn="ctr">
+              <a:defRPr sz="1125" b="1">
                 <a:solidFill>
                   <a:srgbClr val="0F172A"/>
                 </a:solidFill>
               </a:defRPr>
             </a:pPr>
             <a:r>
-              <a:rPr sz="1275">
+              <a:rPr sz="1125" b="1">
                 <a:solidFill>
                   <a:srgbClr val="0F172A"/>
                 </a:solidFill>
               </a:rPr>
-              <a:t>末值：AutoPhaseNN val=3.70；UMamba hard val=6.13；UMamba soft/support val=7.01。</a:t>
+              <a:t>diff</a:t>
             </a:r>
           </a:p>
         </p:txBody>
       </p:sp>
+      <p:sp>
+        <p:nvSpPr>
+          <p:cNvPr id="6" name="">
+            <a:extLst xmlns:a="http://schemas.openxmlformats.org/drawingml/2006/main">
+              <a:ext uri="{FF2B5EF4-FFF2-40B4-BE49-F238E27FC236}">
+                <a16:creationId xmlns:a16="http://schemas.microsoft.com/office/drawing/2014/main" id="{FED18330-BD30-459F-99F9-BF1BE9E4BB28}"/>
+              </a:ext>
+            </a:extLst>
+          </p:cNvPr>
+          <p:cNvSpPr>
+            <a:spLocks xmlns:a="http://schemas.openxmlformats.org/drawingml/2006/main" noGrp="1"/>
+          </p:cNvSpPr>
+          <p:nvPr/>
+        </p:nvSpPr>
+        <p:spPr>
+          <a:xfrm xmlns:a="http://schemas.openxmlformats.org/drawingml/2006/main">
+            <a:off x="2762250" y="1714500"/>
+            <a:ext cx="1428750" cy="533400"/>
+          </a:xfrm>
+          <a:prstGeom xmlns:a="http://schemas.openxmlformats.org/drawingml/2006/main" prst="roundRect">
+            <a:avLst>
+              <a:gd name="adj" fmla="val 14286"/>
+            </a:avLst>
+          </a:prstGeom>
+          <a:solidFill xmlns:a="http://schemas.openxmlformats.org/drawingml/2006/main">
+            <a:srgbClr val="ECFDF5"/>
+          </a:solidFill>
+          <a:ln xmlns:a="http://schemas.openxmlformats.org/drawingml/2006/main" w="9525">
+            <a:solidFill>
+              <a:srgbClr val="99F6E4"/>
+            </a:solidFill>
+            <a:prstDash val="solid"/>
+          </a:ln>
+        </p:spPr>
+      </p:sp>
+      <p:sp>
+        <p:nvSpPr>
+          <p:cNvPr id="7" name="">
+            <a:extLst xmlns:a="http://schemas.openxmlformats.org/drawingml/2006/main">
+              <a:ext uri="{FF2B5EF4-FFF2-40B4-BE49-F238E27FC236}">
+                <a16:creationId xmlns:a16="http://schemas.microsoft.com/office/drawing/2014/main" id="{108BA90C-096B-49E1-A207-90E18055F215}"/>
+              </a:ext>
+            </a:extLst>
+          </p:cNvPr>
+          <p:cNvSpPr>
+            <a:spLocks xmlns:a="http://schemas.openxmlformats.org/drawingml/2006/main" noGrp="1"/>
+          </p:cNvSpPr>
+          <p:nvPr/>
+        </p:nvSpPr>
+        <p:spPr>
+          <a:xfrm xmlns:a="http://schemas.openxmlformats.org/drawingml/2006/main">
+            <a:off x="2857500" y="1857375"/>
+            <a:ext cx="1238250" cy="228600"/>
+          </a:xfrm>
+          <a:prstGeom xmlns:a="http://schemas.openxmlformats.org/drawingml/2006/main" prst="rect">
+            <a:avLst/>
+          </a:prstGeom>
+          <a:noFill xmlns:a="http://schemas.openxmlformats.org/drawingml/2006/main"/>
+          <a:ln xmlns:a="http://schemas.openxmlformats.org/drawingml/2006/main" w="0">
+            <a:noFill/>
+            <a:prstDash val="solid"/>
+          </a:ln>
+        </p:spPr>
+        <p:txBody>
+          <a:bodyPr xmlns:a="http://schemas.openxmlformats.org/drawingml/2006/main"/>
+          <a:lstStyle xmlns:a="http://schemas.openxmlformats.org/drawingml/2006/main"/>
+          <a:p xmlns:a="http://schemas.openxmlformats.org/drawingml/2006/main">
+            <a:pPr algn="ctr">
+              <a:defRPr sz="1125" b="1">
+                <a:solidFill>
+                  <a:srgbClr val="0F172A"/>
+                </a:solidFill>
+              </a:defRPr>
+            </a:pPr>
+            <a:r>
+              <a:rPr sz="1125" b="1">
+                <a:solidFill>
+                  <a:srgbClr val="0F172A"/>
+                </a:solidFill>
+              </a:rPr>
+              <a:t>model(diff)</a:t>
+            </a:r>
+          </a:p>
+        </p:txBody>
+      </p:sp>
+      <p:sp>
+        <p:nvSpPr>
+          <p:cNvPr id="8" name="">
+            <a:extLst xmlns:a="http://schemas.openxmlformats.org/drawingml/2006/main">
+              <a:ext uri="{FF2B5EF4-FFF2-40B4-BE49-F238E27FC236}">
+                <a16:creationId xmlns:a16="http://schemas.microsoft.com/office/drawing/2014/main" id="{9AE6CFCA-759F-4A05-BC9D-72A574CC9B03}"/>
+              </a:ext>
+            </a:extLst>
+          </p:cNvPr>
+          <p:cNvSpPr>
+            <a:spLocks xmlns:a="http://schemas.openxmlformats.org/drawingml/2006/main" noGrp="1"/>
+          </p:cNvSpPr>
+          <p:nvPr/>
+        </p:nvSpPr>
+        <p:spPr>
+          <a:xfrm xmlns:a="http://schemas.openxmlformats.org/drawingml/2006/main">
+            <a:off x="4762500" y="1714500"/>
+            <a:ext cx="1619250" cy="533400"/>
+          </a:xfrm>
+          <a:prstGeom xmlns:a="http://schemas.openxmlformats.org/drawingml/2006/main" prst="roundRect">
+            <a:avLst>
+              <a:gd name="adj" fmla="val 14286"/>
+            </a:avLst>
+          </a:prstGeom>
+          <a:solidFill xmlns:a="http://schemas.openxmlformats.org/drawingml/2006/main">
+            <a:srgbClr val="ECFDF5"/>
+          </a:solidFill>
+          <a:ln xmlns:a="http://schemas.openxmlformats.org/drawingml/2006/main" w="9525">
+            <a:solidFill>
+              <a:srgbClr val="99F6E4"/>
+            </a:solidFill>
+            <a:prstDash val="solid"/>
+          </a:ln>
+        </p:spPr>
+      </p:sp>
+      <p:sp>
+        <p:nvSpPr>
+          <p:cNvPr id="9" name="">
+            <a:extLst xmlns:a="http://schemas.openxmlformats.org/drawingml/2006/main">
+              <a:ext uri="{FF2B5EF4-FFF2-40B4-BE49-F238E27FC236}">
+                <a16:creationId xmlns:a16="http://schemas.microsoft.com/office/drawing/2014/main" id="{70A3442E-229A-46B3-AAFE-44FCBF527456}"/>
+              </a:ext>
+            </a:extLst>
+          </p:cNvPr>
+          <p:cNvSpPr>
+            <a:spLocks xmlns:a="http://schemas.openxmlformats.org/drawingml/2006/main" noGrp="1"/>
+          </p:cNvSpPr>
+          <p:nvPr/>
+        </p:nvSpPr>
+        <p:spPr>
+          <a:xfrm xmlns:a="http://schemas.openxmlformats.org/drawingml/2006/main">
+            <a:off x="4857750" y="1857375"/>
+            <a:ext cx="1428750" cy="228600"/>
+          </a:xfrm>
+          <a:prstGeom xmlns:a="http://schemas.openxmlformats.org/drawingml/2006/main" prst="rect">
+            <a:avLst/>
+          </a:prstGeom>
+          <a:noFill xmlns:a="http://schemas.openxmlformats.org/drawingml/2006/main"/>
+          <a:ln xmlns:a="http://schemas.openxmlformats.org/drawingml/2006/main" w="0">
+            <a:noFill/>
+            <a:prstDash val="solid"/>
+          </a:ln>
+        </p:spPr>
+        <p:txBody>
+          <a:bodyPr xmlns:a="http://schemas.openxmlformats.org/drawingml/2006/main"/>
+          <a:lstStyle xmlns:a="http://schemas.openxmlformats.org/drawingml/2006/main"/>
+          <a:p xmlns:a="http://schemas.openxmlformats.org/drawingml/2006/main">
+            <a:pPr algn="ctr">
+              <a:defRPr sz="1125" b="1">
+                <a:solidFill>
+                  <a:srgbClr val="0F172A"/>
+                </a:solidFill>
+              </a:defRPr>
+            </a:pPr>
+            <a:r>
+              <a:rPr sz="1125" b="1">
+                <a:solidFill>
+                  <a:srgbClr val="0F172A"/>
+                </a:solidFill>
+              </a:rPr>
+              <a:t>pred_amp</a:t>
+            </a:r>
+          </a:p>
+          <a:p xmlns:a="http://schemas.openxmlformats.org/drawingml/2006/main">
+            <a:pPr algn="ctr">
+              <a:defRPr sz="1125" b="1">
+                <a:solidFill>
+                  <a:srgbClr val="0F172A"/>
+                </a:solidFill>
+              </a:defRPr>
+            </a:pPr>
+            <a:r>
+              <a:rPr sz="1125" b="1">
+                <a:solidFill>
+                  <a:srgbClr val="0F172A"/>
+                </a:solidFill>
+              </a:rPr>
+              <a:t>pred_phase</a:t>
+            </a:r>
+          </a:p>
+        </p:txBody>
+      </p:sp>
+      <p:sp>
+        <p:nvSpPr>
+          <p:cNvPr id="10" name="">
+            <a:extLst xmlns:a="http://schemas.openxmlformats.org/drawingml/2006/main">
+              <a:ext uri="{FF2B5EF4-FFF2-40B4-BE49-F238E27FC236}">
+                <a16:creationId xmlns:a16="http://schemas.microsoft.com/office/drawing/2014/main" id="{6E82D114-71F8-43A4-811B-905A9759319D}"/>
+              </a:ext>
+            </a:extLst>
+          </p:cNvPr>
+          <p:cNvSpPr>
+            <a:spLocks xmlns:a="http://schemas.openxmlformats.org/drawingml/2006/main" noGrp="1"/>
+          </p:cNvSpPr>
+          <p:nvPr/>
+        </p:nvSpPr>
+        <p:spPr>
+          <a:xfrm xmlns:a="http://schemas.openxmlformats.org/drawingml/2006/main">
+            <a:off x="6953250" y="1714500"/>
+            <a:ext cx="1428750" cy="533400"/>
+          </a:xfrm>
+          <a:prstGeom xmlns:a="http://schemas.openxmlformats.org/drawingml/2006/main" prst="roundRect">
+            <a:avLst>
+              <a:gd name="adj" fmla="val 14286"/>
+            </a:avLst>
+          </a:prstGeom>
+          <a:solidFill xmlns:a="http://schemas.openxmlformats.org/drawingml/2006/main">
+            <a:srgbClr val="FFF7ED"/>
+          </a:solidFill>
+          <a:ln xmlns:a="http://schemas.openxmlformats.org/drawingml/2006/main" w="9525">
+            <a:solidFill>
+              <a:srgbClr val="99F6E4"/>
+            </a:solidFill>
+            <a:prstDash val="solid"/>
+          </a:ln>
+        </p:spPr>
+      </p:sp>
+      <p:sp>
+        <p:nvSpPr>
+          <p:cNvPr id="11" name="">
+            <a:extLst xmlns:a="http://schemas.openxmlformats.org/drawingml/2006/main">
+              <a:ext uri="{FF2B5EF4-FFF2-40B4-BE49-F238E27FC236}">
+                <a16:creationId xmlns:a16="http://schemas.microsoft.com/office/drawing/2014/main" id="{F72F5C5C-5101-47A2-AFED-5BABDAC1266D}"/>
+              </a:ext>
+            </a:extLst>
+          </p:cNvPr>
+          <p:cNvSpPr>
+            <a:spLocks xmlns:a="http://schemas.openxmlformats.org/drawingml/2006/main" noGrp="1"/>
+          </p:cNvSpPr>
+          <p:nvPr/>
+        </p:nvSpPr>
+        <p:spPr>
+          <a:xfrm xmlns:a="http://schemas.openxmlformats.org/drawingml/2006/main">
+            <a:off x="7048500" y="1857375"/>
+            <a:ext cx="1238250" cy="228600"/>
+          </a:xfrm>
+          <a:prstGeom xmlns:a="http://schemas.openxmlformats.org/drawingml/2006/main" prst="rect">
+            <a:avLst/>
+          </a:prstGeom>
+          <a:noFill xmlns:a="http://schemas.openxmlformats.org/drawingml/2006/main"/>
+          <a:ln xmlns:a="http://schemas.openxmlformats.org/drawingml/2006/main" w="0">
+            <a:noFill/>
+            <a:prstDash val="solid"/>
+          </a:ln>
+        </p:spPr>
+        <p:txBody>
+          <a:bodyPr xmlns:a="http://schemas.openxmlformats.org/drawingml/2006/main"/>
+          <a:lstStyle xmlns:a="http://schemas.openxmlformats.org/drawingml/2006/main"/>
+          <a:p xmlns:a="http://schemas.openxmlformats.org/drawingml/2006/main">
+            <a:pPr algn="ctr">
+              <a:defRPr sz="1125" b="1">
+                <a:solidFill>
+                  <a:srgbClr val="0F172A"/>
+                </a:solidFill>
+              </a:defRPr>
+            </a:pPr>
+            <a:r>
+              <a:rPr sz="1125" b="1">
+                <a:solidFill>
+                  <a:srgbClr val="0F172A"/>
+                </a:solidFill>
+              </a:rPr>
+              <a:t>FFT 后处理</a:t>
+            </a:r>
+          </a:p>
+        </p:txBody>
+      </p:sp>
+      <p:sp>
+        <p:nvSpPr>
+          <p:cNvPr id="12" name="">
+            <a:extLst xmlns:a="http://schemas.openxmlformats.org/drawingml/2006/main">
+              <a:ext uri="{FF2B5EF4-FFF2-40B4-BE49-F238E27FC236}">
+                <a16:creationId xmlns:a16="http://schemas.microsoft.com/office/drawing/2014/main" id="{300EEC25-E330-4785-9B65-D61A8F7334B9}"/>
+              </a:ext>
+            </a:extLst>
+          </p:cNvPr>
+          <p:cNvSpPr>
+            <a:spLocks xmlns:a="http://schemas.openxmlformats.org/drawingml/2006/main" noGrp="1"/>
+          </p:cNvSpPr>
+          <p:nvPr/>
+        </p:nvSpPr>
+        <p:spPr>
+          <a:xfrm xmlns:a="http://schemas.openxmlformats.org/drawingml/2006/main">
+            <a:off x="8953500" y="1714500"/>
+            <a:ext cx="1381125" cy="533400"/>
+          </a:xfrm>
+          <a:prstGeom xmlns:a="http://schemas.openxmlformats.org/drawingml/2006/main" prst="roundRect">
+            <a:avLst>
+              <a:gd name="adj" fmla="val 14286"/>
+            </a:avLst>
+          </a:prstGeom>
+          <a:solidFill xmlns:a="http://schemas.openxmlformats.org/drawingml/2006/main">
+            <a:srgbClr val="DBEAFE"/>
+          </a:solidFill>
+          <a:ln xmlns:a="http://schemas.openxmlformats.org/drawingml/2006/main" w="9525">
+            <a:solidFill>
+              <a:srgbClr val="99F6E4"/>
+            </a:solidFill>
+            <a:prstDash val="solid"/>
+          </a:ln>
+        </p:spPr>
+      </p:sp>
+      <p:sp>
+        <p:nvSpPr>
+          <p:cNvPr id="13" name="">
+            <a:extLst xmlns:a="http://schemas.openxmlformats.org/drawingml/2006/main">
+              <a:ext uri="{FF2B5EF4-FFF2-40B4-BE49-F238E27FC236}">
+                <a16:creationId xmlns:a16="http://schemas.microsoft.com/office/drawing/2014/main" id="{FF123880-875B-4008-8202-395A7CC1B0C9}"/>
+              </a:ext>
+            </a:extLst>
+          </p:cNvPr>
+          <p:cNvSpPr>
+            <a:spLocks xmlns:a="http://schemas.openxmlformats.org/drawingml/2006/main" noGrp="1"/>
+          </p:cNvSpPr>
+          <p:nvPr/>
+        </p:nvSpPr>
+        <p:spPr>
+          <a:xfrm xmlns:a="http://schemas.openxmlformats.org/drawingml/2006/main">
+            <a:off x="9048750" y="1857375"/>
+            <a:ext cx="1190625" cy="228600"/>
+          </a:xfrm>
+          <a:prstGeom xmlns:a="http://schemas.openxmlformats.org/drawingml/2006/main" prst="rect">
+            <a:avLst/>
+          </a:prstGeom>
+          <a:noFill xmlns:a="http://schemas.openxmlformats.org/drawingml/2006/main"/>
+          <a:ln xmlns:a="http://schemas.openxmlformats.org/drawingml/2006/main" w="0">
+            <a:noFill/>
+            <a:prstDash val="solid"/>
+          </a:ln>
+        </p:spPr>
+        <p:txBody>
+          <a:bodyPr xmlns:a="http://schemas.openxmlformats.org/drawingml/2006/main"/>
+          <a:lstStyle xmlns:a="http://schemas.openxmlformats.org/drawingml/2006/main"/>
+          <a:p xmlns:a="http://schemas.openxmlformats.org/drawingml/2006/main">
+            <a:pPr algn="ctr">
+              <a:defRPr sz="1125" b="1">
+                <a:solidFill>
+                  <a:srgbClr val="0F172A"/>
+                </a:solidFill>
+              </a:defRPr>
+            </a:pPr>
+            <a:r>
+              <a:rPr sz="1125" b="1">
+                <a:solidFill>
+                  <a:srgbClr val="0F172A"/>
+                </a:solidFill>
+              </a:rPr>
+              <a:t>pred_diff</a:t>
+            </a:r>
+          </a:p>
+        </p:txBody>
+      </p:sp>
+      <p:sp>
+        <p:nvSpPr>
+          <p:cNvPr id="14" name="">
+            <a:extLst xmlns:a="http://schemas.openxmlformats.org/drawingml/2006/main">
+              <a:ext uri="{FF2B5EF4-FFF2-40B4-BE49-F238E27FC236}">
+                <a16:creationId xmlns:a16="http://schemas.microsoft.com/office/drawing/2014/main" id="{6397AE61-1559-4CD5-B367-EBC580586769}"/>
+              </a:ext>
+            </a:extLst>
+          </p:cNvPr>
+          <p:cNvSpPr>
+            <a:spLocks xmlns:a="http://schemas.openxmlformats.org/drawingml/2006/main" noGrp="1"/>
+          </p:cNvSpPr>
+          <p:nvPr/>
+        </p:nvSpPr>
+        <p:spPr>
+          <a:xfrm xmlns:a="http://schemas.openxmlformats.org/drawingml/2006/main">
+            <a:off x="2238375" y="1981200"/>
+            <a:ext cx="476250" cy="0"/>
+          </a:xfrm>
+          <a:prstGeom xmlns:a="http://schemas.openxmlformats.org/drawingml/2006/main" prst="line">
+            <a:avLst/>
+          </a:prstGeom>
+          <a:ln xmlns:a="http://schemas.openxmlformats.org/drawingml/2006/main" w="19050">
+            <a:solidFill>
+              <a:srgbClr val="0F766E"/>
+            </a:solidFill>
+            <a:prstDash val="solid"/>
+          </a:ln>
+        </p:spPr>
+      </p:sp>
+      <p:sp>
+        <p:nvSpPr>
+          <p:cNvPr id="15" name="">
+            <a:extLst xmlns:a="http://schemas.openxmlformats.org/drawingml/2006/main">
+              <a:ext uri="{FF2B5EF4-FFF2-40B4-BE49-F238E27FC236}">
+                <a16:creationId xmlns:a16="http://schemas.microsoft.com/office/drawing/2014/main" id="{CDB22516-CD38-4C5C-8A5C-4A6407FE4CC8}"/>
+              </a:ext>
+            </a:extLst>
+          </p:cNvPr>
+          <p:cNvSpPr>
+            <a:spLocks xmlns:a="http://schemas.openxmlformats.org/drawingml/2006/main" noGrp="1"/>
+          </p:cNvSpPr>
+          <p:nvPr/>
+        </p:nvSpPr>
+        <p:spPr>
+          <a:xfrm xmlns:a="http://schemas.openxmlformats.org/drawingml/2006/main">
+            <a:off x="4238625" y="1981200"/>
+            <a:ext cx="476250" cy="0"/>
+          </a:xfrm>
+          <a:prstGeom xmlns:a="http://schemas.openxmlformats.org/drawingml/2006/main" prst="line">
+            <a:avLst/>
+          </a:prstGeom>
+          <a:ln xmlns:a="http://schemas.openxmlformats.org/drawingml/2006/main" w="19050">
+            <a:solidFill>
+              <a:srgbClr val="0F766E"/>
+            </a:solidFill>
+            <a:prstDash val="solid"/>
+          </a:ln>
+        </p:spPr>
+      </p:sp>
+      <p:sp>
+        <p:nvSpPr>
+          <p:cNvPr id="16" name="">
+            <a:extLst xmlns:a="http://schemas.openxmlformats.org/drawingml/2006/main">
+              <a:ext uri="{FF2B5EF4-FFF2-40B4-BE49-F238E27FC236}">
+                <a16:creationId xmlns:a16="http://schemas.microsoft.com/office/drawing/2014/main" id="{B7B106D0-EB1D-4637-B2BA-7E00CD84F4AC}"/>
+              </a:ext>
+            </a:extLst>
+          </p:cNvPr>
+          <p:cNvSpPr>
+            <a:spLocks xmlns:a="http://schemas.openxmlformats.org/drawingml/2006/main" noGrp="1"/>
+          </p:cNvSpPr>
+          <p:nvPr/>
+        </p:nvSpPr>
+        <p:spPr>
+          <a:xfrm xmlns:a="http://schemas.openxmlformats.org/drawingml/2006/main">
+            <a:off x="6429375" y="1981200"/>
+            <a:ext cx="476250" cy="0"/>
+          </a:xfrm>
+          <a:prstGeom xmlns:a="http://schemas.openxmlformats.org/drawingml/2006/main" prst="line">
+            <a:avLst/>
+          </a:prstGeom>
+          <a:ln xmlns:a="http://schemas.openxmlformats.org/drawingml/2006/main" w="19050">
+            <a:solidFill>
+              <a:srgbClr val="0F766E"/>
+            </a:solidFill>
+            <a:prstDash val="solid"/>
+          </a:ln>
+        </p:spPr>
+      </p:sp>
+      <p:sp>
+        <p:nvSpPr>
+          <p:cNvPr id="17" name="">
+            <a:extLst xmlns:a="http://schemas.openxmlformats.org/drawingml/2006/main">
+              <a:ext uri="{FF2B5EF4-FFF2-40B4-BE49-F238E27FC236}">
+                <a16:creationId xmlns:a16="http://schemas.microsoft.com/office/drawing/2014/main" id="{46FE5963-22AD-4375-A70D-5166511C6787}"/>
+              </a:ext>
+            </a:extLst>
+          </p:cNvPr>
+          <p:cNvSpPr>
+            <a:spLocks xmlns:a="http://schemas.openxmlformats.org/drawingml/2006/main" noGrp="1"/>
+          </p:cNvSpPr>
+          <p:nvPr/>
+        </p:nvSpPr>
+        <p:spPr>
+          <a:xfrm xmlns:a="http://schemas.openxmlformats.org/drawingml/2006/main">
+            <a:off x="8429625" y="1981200"/>
+            <a:ext cx="476250" cy="0"/>
+          </a:xfrm>
+          <a:prstGeom xmlns:a="http://schemas.openxmlformats.org/drawingml/2006/main" prst="line">
+            <a:avLst/>
+          </a:prstGeom>
+          <a:ln xmlns:a="http://schemas.openxmlformats.org/drawingml/2006/main" w="19050">
+            <a:solidFill>
+              <a:srgbClr val="0F766E"/>
+            </a:solidFill>
+            <a:prstDash val="solid"/>
+          </a:ln>
+        </p:spPr>
+      </p:sp>
+      <p:sp>
+        <p:nvSpPr>
+          <p:cNvPr id="18" name="">
+            <a:extLst xmlns:a="http://schemas.openxmlformats.org/drawingml/2006/main">
+              <a:ext uri="{FF2B5EF4-FFF2-40B4-BE49-F238E27FC236}">
+                <a16:creationId xmlns:a16="http://schemas.microsoft.com/office/drawing/2014/main" id="{E510FAC2-B377-4B50-83F3-462AF75554D0}"/>
+              </a:ext>
+            </a:extLst>
+          </p:cNvPr>
+          <p:cNvSpPr>
+            <a:spLocks xmlns:a="http://schemas.openxmlformats.org/drawingml/2006/main" noGrp="1"/>
+          </p:cNvSpPr>
+          <p:nvPr/>
+        </p:nvSpPr>
+        <p:spPr>
+          <a:xfrm xmlns:a="http://schemas.openxmlformats.org/drawingml/2006/main">
+            <a:off x="1000125" y="2857500"/>
+            <a:ext cx="4762500" cy="1809750"/>
+          </a:xfrm>
+          <a:prstGeom xmlns:a="http://schemas.openxmlformats.org/drawingml/2006/main" prst="roundRect">
+            <a:avLst>
+              <a:gd name="adj" fmla="val 6316"/>
+            </a:avLst>
+          </a:prstGeom>
+          <a:solidFill xmlns:a="http://schemas.openxmlformats.org/drawingml/2006/main">
+            <a:srgbClr val="FFFFFF"/>
+          </a:solidFill>
+          <a:ln xmlns:a="http://schemas.openxmlformats.org/drawingml/2006/main" w="9525">
+            <a:solidFill>
+              <a:srgbClr val="E2E8F0"/>
+            </a:solidFill>
+            <a:prstDash val="solid"/>
+          </a:ln>
+        </p:spPr>
+      </p:sp>
+      <p:sp>
+        <p:nvSpPr>
+          <p:cNvPr id="19" name="">
+            <a:extLst xmlns:a="http://schemas.openxmlformats.org/drawingml/2006/main">
+              <a:ext uri="{FF2B5EF4-FFF2-40B4-BE49-F238E27FC236}">
+                <a16:creationId xmlns:a16="http://schemas.microsoft.com/office/drawing/2014/main" id="{D5594A40-DE5E-4315-9327-546425DDD206}"/>
+              </a:ext>
+            </a:extLst>
+          </p:cNvPr>
+          <p:cNvSpPr>
+            <a:spLocks xmlns:a="http://schemas.openxmlformats.org/drawingml/2006/main" noGrp="1"/>
+          </p:cNvSpPr>
+          <p:nvPr/>
+        </p:nvSpPr>
+        <p:spPr>
+          <a:xfrm xmlns:a="http://schemas.openxmlformats.org/drawingml/2006/main">
+            <a:off x="1238250" y="3105150"/>
+            <a:ext cx="2095500" cy="285750"/>
+          </a:xfrm>
+          <a:prstGeom xmlns:a="http://schemas.openxmlformats.org/drawingml/2006/main" prst="rect">
+            <a:avLst/>
+          </a:prstGeom>
+          <a:noFill xmlns:a="http://schemas.openxmlformats.org/drawingml/2006/main"/>
+          <a:ln xmlns:a="http://schemas.openxmlformats.org/drawingml/2006/main" w="0">
+            <a:noFill/>
+            <a:prstDash val="solid"/>
+          </a:ln>
+        </p:spPr>
+        <p:txBody>
+          <a:bodyPr xmlns:a="http://schemas.openxmlformats.org/drawingml/2006/main"/>
+          <a:lstStyle xmlns:a="http://schemas.openxmlformats.org/drawingml/2006/main"/>
+          <a:p xmlns:a="http://schemas.openxmlformats.org/drawingml/2006/main">
+            <a:pPr>
+              <a:defRPr sz="1650" b="1">
+                <a:solidFill>
+                  <a:srgbClr val="0F766E"/>
+                </a:solidFill>
+              </a:defRPr>
+            </a:pPr>
+            <a:r>
+              <a:rPr sz="1650" b="1">
+                <a:solidFill>
+                  <a:srgbClr val="0F766E"/>
+                </a:solidFill>
+              </a:rPr>
+              <a:t>训练主损失</a:t>
+            </a:r>
+          </a:p>
+        </p:txBody>
+      </p:sp>
+      <p:sp>
+        <p:nvSpPr>
+          <p:cNvPr id="20" name="">
+            <a:extLst xmlns:a="http://schemas.openxmlformats.org/drawingml/2006/main">
+              <a:ext uri="{FF2B5EF4-FFF2-40B4-BE49-F238E27FC236}">
+                <a16:creationId xmlns:a16="http://schemas.microsoft.com/office/drawing/2014/main" id="{CBAB47B4-40F9-4245-9B02-23FAD77F70EE}"/>
+              </a:ext>
+            </a:extLst>
+          </p:cNvPr>
+          <p:cNvSpPr>
+            <a:spLocks xmlns:a="http://schemas.openxmlformats.org/drawingml/2006/main" noGrp="1"/>
+          </p:cNvSpPr>
+          <p:nvPr/>
+        </p:nvSpPr>
+        <p:spPr>
+          <a:xfrm xmlns:a="http://schemas.openxmlformats.org/drawingml/2006/main">
+            <a:off x="1238250" y="3600450"/>
+            <a:ext cx="4000500" cy="762000"/>
+          </a:xfrm>
+          <a:prstGeom xmlns:a="http://schemas.openxmlformats.org/drawingml/2006/main" prst="rect">
+            <a:avLst/>
+          </a:prstGeom>
+          <a:noFill xmlns:a="http://schemas.openxmlformats.org/drawingml/2006/main"/>
+          <a:ln xmlns:a="http://schemas.openxmlformats.org/drawingml/2006/main" w="0">
+            <a:noFill/>
+            <a:prstDash val="solid"/>
+          </a:ln>
+        </p:spPr>
+        <p:txBody>
+          <a:bodyPr xmlns:a="http://schemas.openxmlformats.org/drawingml/2006/main"/>
+          <a:lstStyle xmlns:a="http://schemas.openxmlformats.org/drawingml/2006/main"/>
+          <a:p xmlns:a="http://schemas.openxmlformats.org/drawingml/2006/main">
+            <a:pPr>
+              <a:defRPr sz="1650">
+                <a:solidFill>
+                  <a:srgbClr val="0F172A"/>
+                </a:solidFill>
+              </a:defRPr>
+            </a:pPr>
+            <a:r>
+              <a:rPr sz="1650">
+                <a:solidFill>
+                  <a:srgbClr val="0F172A"/>
+                </a:solidFill>
+              </a:rPr>
+              <a:t>Loss = L1(diff, pred_diff)</a:t>
+            </a:r>
+          </a:p>
+          <a:p xmlns:a="http://schemas.openxmlformats.org/drawingml/2006/main">
+            <a:pPr>
+              <a:defRPr sz="1650">
+                <a:solidFill>
+                  <a:srgbClr val="0F172A"/>
+                </a:solidFill>
+              </a:defRPr>
+            </a:pPr>
+            <a:r>
+              <a:rPr sz="1650">
+                <a:solidFill>
+                  <a:srgbClr val="0F172A"/>
+                </a:solidFill>
+              </a:rPr>
+              <a:t>也就是只要求预测衍射图和输入衍射图一致。</a:t>
+            </a:r>
+          </a:p>
+        </p:txBody>
+      </p:sp>
+      <p:sp>
+        <p:nvSpPr>
+          <p:cNvPr id="21" name="">
+            <a:extLst xmlns:a="http://schemas.openxmlformats.org/drawingml/2006/main">
+              <a:ext uri="{FF2B5EF4-FFF2-40B4-BE49-F238E27FC236}">
+                <a16:creationId xmlns:a16="http://schemas.microsoft.com/office/drawing/2014/main" id="{F03713FB-2F09-49BA-A507-14CE5D983B8D}"/>
+              </a:ext>
+            </a:extLst>
+          </p:cNvPr>
+          <p:cNvSpPr>
+            <a:spLocks xmlns:a="http://schemas.openxmlformats.org/drawingml/2006/main" noGrp="1"/>
+          </p:cNvSpPr>
+          <p:nvPr/>
+        </p:nvSpPr>
+        <p:spPr>
+          <a:xfrm xmlns:a="http://schemas.openxmlformats.org/drawingml/2006/main">
+            <a:off x="6381750" y="2857500"/>
+            <a:ext cx="4762500" cy="1809750"/>
+          </a:xfrm>
+          <a:prstGeom xmlns:a="http://schemas.openxmlformats.org/drawingml/2006/main" prst="roundRect">
+            <a:avLst>
+              <a:gd name="adj" fmla="val 6316"/>
+            </a:avLst>
+          </a:prstGeom>
+          <a:solidFill xmlns:a="http://schemas.openxmlformats.org/drawingml/2006/main">
+            <a:srgbClr val="FFFFFF"/>
+          </a:solidFill>
+          <a:ln xmlns:a="http://schemas.openxmlformats.org/drawingml/2006/main" w="9525">
+            <a:solidFill>
+              <a:srgbClr val="E2E8F0"/>
+            </a:solidFill>
+            <a:prstDash val="solid"/>
+          </a:ln>
+        </p:spPr>
+      </p:sp>
+      <p:sp>
+        <p:nvSpPr>
+          <p:cNvPr id="22" name="">
+            <a:extLst xmlns:a="http://schemas.openxmlformats.org/drawingml/2006/main">
+              <a:ext uri="{FF2B5EF4-FFF2-40B4-BE49-F238E27FC236}">
+                <a16:creationId xmlns:a16="http://schemas.microsoft.com/office/drawing/2014/main" id="{8339F1B6-AA31-43C0-9AD8-16BD5A9BCFE1}"/>
+              </a:ext>
+            </a:extLst>
+          </p:cNvPr>
+          <p:cNvSpPr>
+            <a:spLocks xmlns:a="http://schemas.openxmlformats.org/drawingml/2006/main" noGrp="1"/>
+          </p:cNvSpPr>
+          <p:nvPr/>
+        </p:nvSpPr>
+        <p:spPr>
+          <a:xfrm xmlns:a="http://schemas.openxmlformats.org/drawingml/2006/main">
+            <a:off x="6619875" y="3105150"/>
+            <a:ext cx="2095500" cy="285750"/>
+          </a:xfrm>
+          <a:prstGeom xmlns:a="http://schemas.openxmlformats.org/drawingml/2006/main" prst="rect">
+            <a:avLst/>
+          </a:prstGeom>
+          <a:noFill xmlns:a="http://schemas.openxmlformats.org/drawingml/2006/main"/>
+          <a:ln xmlns:a="http://schemas.openxmlformats.org/drawingml/2006/main" w="0">
+            <a:noFill/>
+            <a:prstDash val="solid"/>
+          </a:ln>
+        </p:spPr>
+        <p:txBody>
+          <a:bodyPr xmlns:a="http://schemas.openxmlformats.org/drawingml/2006/main"/>
+          <a:lstStyle xmlns:a="http://schemas.openxmlformats.org/drawingml/2006/main"/>
+          <a:p xmlns:a="http://schemas.openxmlformats.org/drawingml/2006/main">
+            <a:pPr>
+              <a:defRPr sz="1650" b="1">
+                <a:solidFill>
+                  <a:srgbClr val="D97706"/>
+                </a:solidFill>
+              </a:defRPr>
+            </a:pPr>
+            <a:r>
+              <a:rPr sz="1650" b="1">
+                <a:solidFill>
+                  <a:srgbClr val="D97706"/>
+                </a:solidFill>
+              </a:rPr>
+              <a:t>监控 / 可选项</a:t>
+            </a:r>
+          </a:p>
+        </p:txBody>
+      </p:sp>
+      <p:sp>
+        <p:nvSpPr>
+          <p:cNvPr id="23" name="">
+            <a:extLst xmlns:a="http://schemas.openxmlformats.org/drawingml/2006/main">
+              <a:ext uri="{FF2B5EF4-FFF2-40B4-BE49-F238E27FC236}">
+                <a16:creationId xmlns:a16="http://schemas.microsoft.com/office/drawing/2014/main" id="{58BC4C71-3293-45CF-848E-79E305720613}"/>
+              </a:ext>
+            </a:extLst>
+          </p:cNvPr>
+          <p:cNvSpPr>
+            <a:spLocks xmlns:a="http://schemas.openxmlformats.org/drawingml/2006/main" noGrp="1"/>
+          </p:cNvSpPr>
+          <p:nvPr/>
+        </p:nvSpPr>
+        <p:spPr>
+          <a:xfrm xmlns:a="http://schemas.openxmlformats.org/drawingml/2006/main">
+            <a:off x="6619875" y="3581400"/>
+            <a:ext cx="4000500" cy="838200"/>
+          </a:xfrm>
+          <a:prstGeom xmlns:a="http://schemas.openxmlformats.org/drawingml/2006/main" prst="rect">
+            <a:avLst/>
+          </a:prstGeom>
+          <a:noFill xmlns:a="http://schemas.openxmlformats.org/drawingml/2006/main"/>
+          <a:ln xmlns:a="http://schemas.openxmlformats.org/drawingml/2006/main" w="0">
+            <a:noFill/>
+            <a:prstDash val="solid"/>
+          </a:ln>
+        </p:spPr>
+        <p:txBody>
+          <a:bodyPr xmlns:a="http://schemas.openxmlformats.org/drawingml/2006/main"/>
+          <a:lstStyle xmlns:a="http://schemas.openxmlformats.org/drawingml/2006/main"/>
+          <a:p xmlns:a="http://schemas.openxmlformats.org/drawingml/2006/main">
+            <a:pPr>
+              <a:defRPr sz="1425">
+                <a:solidFill>
+                  <a:srgbClr val="0F172A"/>
+                </a:solidFill>
+              </a:defRPr>
+            </a:pPr>
+            <a:r>
+              <a:rPr sz="1425">
+                <a:solidFill>
+                  <a:srgbClr val="0F172A"/>
+                </a:solidFill>
+              </a:rPr>
+              <a:t>代码中会同时计算 amp、phase、support 等项，主要用于诊断；只有打开对应权重/范围时才进入总 loss。</a:t>
+            </a:r>
+          </a:p>
+        </p:txBody>
+      </p:sp>
+      <p:sp>
+        <p:nvSpPr>
+          <p:cNvPr id="24" name="">
+            <a:extLst xmlns:a="http://schemas.openxmlformats.org/drawingml/2006/main">
+              <a:ext uri="{FF2B5EF4-FFF2-40B4-BE49-F238E27FC236}">
+                <a16:creationId xmlns:a16="http://schemas.microsoft.com/office/drawing/2014/main" id="{88025ACF-3E58-45D1-96A2-B585573B500E}"/>
+              </a:ext>
+            </a:extLst>
+          </p:cNvPr>
+          <p:cNvSpPr>
+            <a:spLocks xmlns:a="http://schemas.openxmlformats.org/drawingml/2006/main" noGrp="1"/>
+          </p:cNvSpPr>
+          <p:nvPr/>
+        </p:nvSpPr>
+        <p:spPr>
+          <a:xfrm xmlns:a="http://schemas.openxmlformats.org/drawingml/2006/main">
+            <a:off x="1524000" y="5286375"/>
+            <a:ext cx="8953500" cy="400050"/>
+          </a:xfrm>
+          <a:prstGeom xmlns:a="http://schemas.openxmlformats.org/drawingml/2006/main" prst="rect">
+            <a:avLst/>
+          </a:prstGeom>
+          <a:noFill xmlns:a="http://schemas.openxmlformats.org/drawingml/2006/main"/>
+          <a:ln xmlns:a="http://schemas.openxmlformats.org/drawingml/2006/main" w="0">
+            <a:noFill/>
+            <a:prstDash val="solid"/>
+          </a:ln>
+        </p:spPr>
+        <p:txBody>
+          <a:bodyPr xmlns:a="http://schemas.openxmlformats.org/drawingml/2006/main"/>
+          <a:lstStyle xmlns:a="http://schemas.openxmlformats.org/drawingml/2006/main"/>
+          <a:p xmlns:a="http://schemas.openxmlformats.org/drawingml/2006/main">
+            <a:pPr algn="ctr">
+              <a:defRPr sz="1800" b="1">
+                <a:solidFill>
+                  <a:srgbClr val="B91C1C"/>
+                </a:solidFill>
+              </a:defRPr>
+            </a:pPr>
+            <a:r>
+              <a:rPr sz="1800" b="1">
+                <a:solidFill>
+                  <a:srgbClr val="B91C1C"/>
+                </a:solidFill>
+              </a:rPr>
+              <a:t>因此如果只看 diff L1，模型可能学到衍射域接近但实空间不正确的解。</a:t>
+            </a:r>
+          </a:p>
+        </p:txBody>
+      </p:sp>
     </p:spTree>
     <p:extLst>
       <p:ext uri="{BB962C8B-B14F-4D97-AF65-F5344CB8AC3E}">
-        <p14:creationId xmlns:p14="http://schemas.microsoft.com/office/powerpoint/2010/main" val="180827255"/>
+        <p14:creationId xmlns:p14="http://schemas.microsoft.com/office/powerpoint/2010/main" val="82221610"/>
       </p:ext>
     </p:extLst>
   </p:cSld>
@@ -3234,7 +5452,7 @@
           <p:cNvPr id="1" name="">
             <a:extLst xmlns:a="http://schemas.openxmlformats.org/drawingml/2006/main">
               <a:ext uri="{FF2B5EF4-FFF2-40B4-BE49-F238E27FC236}">
-                <a16:creationId xmlns:a16="http://schemas.microsoft.com/office/drawing/2014/main" id="{AF98050B-D8AE-432F-9471-4A30300CBAD2}"/>
+                <a16:creationId xmlns:a16="http://schemas.microsoft.com/office/drawing/2014/main" id="{FF9EBE07-5AD2-4872-B327-E4CFA0516EA9}"/>
               </a:ext>
             </a:extLst>
           </p:cNvPr>
@@ -3274,7 +5492,7 @@
                   <a:srgbClr val="0F172A"/>
                 </a:solidFill>
               </a:rPr>
-              <a:t>AutoPhaseNN 复现图：完整可视化结果</a:t>
+              <a:t>AutoPhaseNN 最后的物理后处理</a:t>
             </a:r>
           </a:p>
         </p:txBody>
@@ -3284,7 +5502,7 @@
           <p:cNvPr id="2" name="">
             <a:extLst xmlns:a="http://schemas.openxmlformats.org/drawingml/2006/main">
               <a:ext uri="{FF2B5EF4-FFF2-40B4-BE49-F238E27FC236}">
-                <a16:creationId xmlns:a16="http://schemas.microsoft.com/office/drawing/2014/main" id="{7602495F-F80B-4D3F-B724-FF05F885492D}"/>
+                <a16:creationId xmlns:a16="http://schemas.microsoft.com/office/drawing/2014/main" id="{F64C384C-7342-4ACC-8934-2F3B511F58B1}"/>
               </a:ext>
             </a:extLst>
           </p:cNvPr>
@@ -3296,7 +5514,7 @@
         <p:spPr>
           <a:xfrm xmlns:a="http://schemas.openxmlformats.org/drawingml/2006/main">
             <a:off x="476250" y="742950"/>
-            <a:ext cx="9334500" cy="266700"/>
+            <a:ext cx="10096500" cy="266700"/>
           </a:xfrm>
           <a:prstGeom xmlns:a="http://schemas.openxmlformats.org/drawingml/2006/main" prst="rect">
             <a:avLst/>
@@ -3324,7 +5542,7 @@
                   <a:srgbClr val="475569"/>
                 </a:solidFill>
               </a:rPr>
-              <a:t>文件：autophasenn_training_pipeline/output/visualization.png</a:t>
+              <a:t>这是本任务最关键的部分：网络输出不是最终答案，必须经过 support + FFT 变成 pred_diff</a:t>
             </a:r>
           </a:p>
         </p:txBody>
@@ -3334,7 +5552,7 @@
           <p:cNvPr id="3" name="">
             <a:extLst xmlns:a="http://schemas.openxmlformats.org/drawingml/2006/main">
               <a:ext uri="{FF2B5EF4-FFF2-40B4-BE49-F238E27FC236}">
-                <a16:creationId xmlns:a16="http://schemas.microsoft.com/office/drawing/2014/main" id="{497B5559-BFB8-4C71-B6B3-E3C843060355}"/>
+                <a16:creationId xmlns:a16="http://schemas.microsoft.com/office/drawing/2014/main" id="{148E7F71-0EF7-4BFA-85B9-61BFF56FA818}"/>
               </a:ext>
             </a:extLst>
           </p:cNvPr>
@@ -3362,49 +5580,26 @@
           </a:ln>
         </p:spPr>
       </p:sp>
-      <p:pic>
-        <p:nvPicPr>
-          <p:cNvPr id="10" name=""/>
-          <p:cNvPicPr>
-            <a:picLocks xmlns:a="http://schemas.openxmlformats.org/drawingml/2006/main" noChangeAspect="1"/>
-          </p:cNvPicPr>
-          <p:nvPr/>
-        </p:nvPicPr>
-        <p:blipFill>
-          <a:blip xmlns:r="http://schemas.openxmlformats.org/officeDocument/2006/relationships" xmlns:a="http://schemas.openxmlformats.org/drawingml/2006/main" r:embed="Re13c3342cfbd4d5f"/>
-          <a:stretch xmlns:a="http://schemas.openxmlformats.org/drawingml/2006/main"/>
-        </p:blipFill>
-        <p:spPr>
-          <a:xfrm xmlns:a="http://schemas.openxmlformats.org/drawingml/2006/main">
-            <a:off x="609600" y="1790700"/>
-            <a:ext cx="7620000" cy="4191000"/>
-          </a:xfrm>
-          <a:prstGeom xmlns:a="http://schemas.openxmlformats.org/drawingml/2006/main" prst="roundRect">
-            <a:avLst>
-              <a:gd name="adj" fmla="val 1429"/>
-            </a:avLst>
-          </a:prstGeom>
-        </p:spPr>
-      </p:pic>
       <p:graphicFrame>
         <p:nvGraphicFramePr>
-          <p:cNvPr id="11" name=""/>
+          <p:cNvPr id="9" name=""/>
           <p:cNvGraphicFramePr/>
           <p:nvPr/>
         </p:nvGraphicFramePr>
         <p:xfrm>
-          <a:off xmlns:a="http://schemas.openxmlformats.org/drawingml/2006/main" x="8572500" y="1428750"/>
-          <a:ext xmlns:a="http://schemas.openxmlformats.org/drawingml/2006/main" cx="2714625" cy="2857500"/>
+          <a:off xmlns:a="http://schemas.openxmlformats.org/drawingml/2006/main" x="666750" y="1428750"/>
+          <a:ext xmlns:a="http://schemas.openxmlformats.org/drawingml/2006/main" cx="10858500" cy="3429000"/>
         </p:xfrm>
         <a:graphic xmlns:a="http://schemas.openxmlformats.org/drawingml/2006/main">
           <a:graphicData uri="http://schemas.openxmlformats.org/drawingml/2006/table">
             <a:tbl>
               <a:tblPr firstRow="1" bandRow="1"/>
               <a:tblGrid>
-                <a:gridCol w="1428750"/>
-                <a:gridCol w="1285875"/>
+                <a:gridCol w="1619250"/>
+                <a:gridCol w="4762500"/>
+                <a:gridCol w="4476750"/>
               </a:tblGrid>
-              <a:tr h="408214">
+              <a:tr h="571500">
                 <a:tc>
                   <a:txBody>
                     <a:bodyPr/>
@@ -3416,7 +5611,7 @@
                             <a:srgbClr val="FFFFFF"/>
                           </a:solidFill>
                         </a:rPr>
-                        <a:t>指标</a:t>
+                        <a:t>步骤</a:t>
                       </a:r>
                     </a:p>
                   </a:txBody>
@@ -3437,7 +5632,7 @@
                             <a:srgbClr val="FFFFFF"/>
                           </a:solidFill>
                         </a:rPr>
-                        <a:t>数值</a:t>
+                        <a:t>公式 / 操作</a:t>
                       </a:r>
                     </a:p>
                   </a:txBody>
@@ -3447,217 +5642,287 @@
                     </a:solidFill>
                   </a:tcPr>
                 </a:tc>
+                <a:tc>
+                  <a:txBody>
+                    <a:bodyPr/>
+                    <a:lstStyle/>
+                    <a:p>
+                      <a:r>
+                        <a:rPr sz="900" b="1">
+                          <a:solidFill>
+                            <a:srgbClr val="FFFFFF"/>
+                          </a:solidFill>
+                        </a:rPr>
+                        <a:t>含义</a:t>
+                      </a:r>
+                    </a:p>
+                  </a:txBody>
+                  <a:tcPr marL="91440" marR="91440" marT="45720" marB="45720">
+                    <a:solidFill>
+                      <a:srgbClr val="0F172A"/>
+                    </a:solidFill>
+                  </a:tcPr>
+                </a:tc>
               </a:tr>
-              <a:tr h="408214">
-                <a:tc>
-                  <a:txBody>
-                    <a:bodyPr/>
-                    <a:lstStyle/>
-                    <a:p>
-                      <a:r>
-                        <a:rPr sz="900">
-                          <a:solidFill>
-                            <a:srgbClr val="0F172A"/>
-                          </a:solidFill>
-                        </a:rPr>
-                        <a:t>Full val L1</a:t>
-                      </a:r>
-                    </a:p>
-                  </a:txBody>
-                  <a:tcPr marL="91440" marR="91440" marT="45720" marB="45720"/>
-                </a:tc>
-                <a:tc>
-                  <a:txBody>
-                    <a:bodyPr/>
-                    <a:lstStyle/>
-                    <a:p>
-                      <a:r>
-                        <a:rPr sz="900">
-                          <a:solidFill>
-                            <a:srgbClr val="0F172A"/>
-                          </a:solidFill>
-                        </a:rPr>
-                        <a:t>3.70</a:t>
+              <a:tr h="571500">
+                <a:tc>
+                  <a:txBody>
+                    <a:bodyPr/>
+                    <a:lstStyle/>
+                    <a:p>
+                      <a:r>
+                        <a:rPr sz="900">
+                          <a:solidFill>
+                            <a:srgbClr val="0F172A"/>
+                          </a:solidFill>
+                        </a:rPr>
+                        <a:t>1. 输出约束</a:t>
+                      </a:r>
+                    </a:p>
+                  </a:txBody>
+                  <a:tcPr marL="91440" marR="91440" marT="45720" marB="45720"/>
+                </a:tc>
+                <a:tc>
+                  <a:txBody>
+                    <a:bodyPr/>
+                    <a:lstStyle/>
+                    <a:p>
+                      <a:r>
+                        <a:rPr sz="900">
+                          <a:solidFill>
+                            <a:srgbClr val="0F172A"/>
+                          </a:solidFill>
+                        </a:rPr>
+                        <a:t>amp = sigmoid(decoder1), phi = π · tanh(decoder2)</a:t>
+                      </a:r>
+                    </a:p>
+                  </a:txBody>
+                  <a:tcPr marL="91440" marR="91440" marT="45720" marB="45720"/>
+                </a:tc>
+                <a:tc>
+                  <a:txBody>
+                    <a:bodyPr/>
+                    <a:lstStyle/>
+                    <a:p>
+                      <a:r>
+                        <a:rPr sz="900">
+                          <a:solidFill>
+                            <a:srgbClr val="0F172A"/>
+                          </a:solidFill>
+                        </a:rPr>
+                        <a:t>amp 在 0-1；phase 在 [-π, π]</a:t>
                       </a:r>
                     </a:p>
                   </a:txBody>
                   <a:tcPr marL="91440" marR="91440" marT="45720" marB="45720"/>
                 </a:tc>
               </a:tr>
-              <a:tr h="408214">
-                <a:tc>
-                  <a:txBody>
-                    <a:bodyPr/>
-                    <a:lstStyle/>
-                    <a:p>
-                      <a:r>
-                        <a:rPr sz="900">
-                          <a:solidFill>
-                            <a:srgbClr val="0F172A"/>
-                          </a:solidFill>
-                        </a:rPr>
-                        <a:t>Subset FT L1</a:t>
-                      </a:r>
-                    </a:p>
-                  </a:txBody>
-                  <a:tcPr marL="91440" marR="91440" marT="45720" marB="45720"/>
-                </a:tc>
-                <a:tc>
-                  <a:txBody>
-                    <a:bodyPr/>
-                    <a:lstStyle/>
-                    <a:p>
-                      <a:r>
-                        <a:rPr sz="900">
-                          <a:solidFill>
-                            <a:srgbClr val="0F172A"/>
-                          </a:solidFill>
-                        </a:rPr>
-                        <a:t>5.09</a:t>
+              <a:tr h="571500">
+                <a:tc>
+                  <a:txBody>
+                    <a:bodyPr/>
+                    <a:lstStyle/>
+                    <a:p>
+                      <a:r>
+                        <a:rPr sz="900">
+                          <a:solidFill>
+                            <a:srgbClr val="0F172A"/>
+                          </a:solidFill>
+                        </a:rPr>
+                        <a:t>2. support</a:t>
+                      </a:r>
+                    </a:p>
+                  </a:txBody>
+                  <a:tcPr marL="91440" marR="91440" marT="45720" marB="45720"/>
+                </a:tc>
+                <a:tc>
+                  <a:txBody>
+                    <a:bodyPr/>
+                    <a:lstStyle/>
+                    <a:p>
+                      <a:r>
+                        <a:rPr sz="900">
+                          <a:solidFill>
+                            <a:srgbClr val="0F172A"/>
+                          </a:solidFill>
+                        </a:rPr>
+                        <a:t>support = 1[amp ≥ T], T=0.1</a:t>
+                      </a:r>
+                    </a:p>
+                  </a:txBody>
+                  <a:tcPr marL="91440" marR="91440" marT="45720" marB="45720"/>
+                </a:tc>
+                <a:tc>
+                  <a:txBody>
+                    <a:bodyPr/>
+                    <a:lstStyle/>
+                    <a:p>
+                      <a:r>
+                        <a:rPr sz="900">
+                          <a:solidFill>
+                            <a:srgbClr val="0F172A"/>
+                          </a:solidFill>
+                        </a:rPr>
+                        <a:t>硬阈值，得到 0/1 物体支撑区域</a:t>
                       </a:r>
                     </a:p>
                   </a:txBody>
                   <a:tcPr marL="91440" marR="91440" marT="45720" marB="45720"/>
                 </a:tc>
               </a:tr>
-              <a:tr h="408214">
-                <a:tc>
-                  <a:txBody>
-                    <a:bodyPr/>
-                    <a:lstStyle/>
-                    <a:p>
-                      <a:r>
-                        <a:rPr sz="900">
-                          <a:solidFill>
-                            <a:srgbClr val="0F172A"/>
-                          </a:solidFill>
-                        </a:rPr>
-                        <a:t>Pearson</a:t>
-                      </a:r>
-                    </a:p>
-                  </a:txBody>
-                  <a:tcPr marL="91440" marR="91440" marT="45720" marB="45720"/>
-                </a:tc>
-                <a:tc>
-                  <a:txBody>
-                    <a:bodyPr/>
-                    <a:lstStyle/>
-                    <a:p>
-                      <a:r>
-                        <a:rPr sz="900">
-                          <a:solidFill>
-                            <a:srgbClr val="0F172A"/>
-                          </a:solidFill>
-                        </a:rPr>
-                        <a:t>0.923</a:t>
+              <a:tr h="571500">
+                <a:tc>
+                  <a:txBody>
+                    <a:bodyPr/>
+                    <a:lstStyle/>
+                    <a:p>
+                      <a:r>
+                        <a:rPr sz="900">
+                          <a:solidFill>
+                            <a:srgbClr val="0F172A"/>
+                          </a:solidFill>
+                        </a:rPr>
+                        <a:t>3. complex object</a:t>
+                      </a:r>
+                    </a:p>
+                  </a:txBody>
+                  <a:tcPr marL="91440" marR="91440" marT="45720" marB="45720"/>
+                </a:tc>
+                <a:tc>
+                  <a:txBody>
+                    <a:bodyPr/>
+                    <a:lstStyle/>
+                    <a:p>
+                      <a:r>
+                        <a:rPr sz="900">
+                          <a:solidFill>
+                            <a:srgbClr val="0F172A"/>
+                          </a:solidFill>
+                        </a:rPr>
+                        <a:t>obj = amp · (cos(phi) + i sin(phi))</a:t>
+                      </a:r>
+                    </a:p>
+                  </a:txBody>
+                  <a:tcPr marL="91440" marR="91440" marT="45720" marB="45720"/>
+                </a:tc>
+                <a:tc>
+                  <a:txBody>
+                    <a:bodyPr/>
+                    <a:lstStyle/>
+                    <a:p>
+                      <a:r>
+                        <a:rPr sz="900">
+                          <a:solidFill>
+                            <a:srgbClr val="0F172A"/>
+                          </a:solidFill>
+                        </a:rPr>
+                        <a:t>由 amp 和 phase 合成复数物体</a:t>
                       </a:r>
                     </a:p>
                   </a:txBody>
                   <a:tcPr marL="91440" marR="91440" marT="45720" marB="45720"/>
                 </a:tc>
               </a:tr>
-              <a:tr h="408214">
-                <a:tc>
-                  <a:txBody>
-                    <a:bodyPr/>
-                    <a:lstStyle/>
-                    <a:p>
-                      <a:r>
-                        <a:rPr sz="900">
-                          <a:solidFill>
-                            <a:srgbClr val="0F172A"/>
-                          </a:solidFill>
-                        </a:rPr>
-                        <a:t>Amp L1</a:t>
-                      </a:r>
-                    </a:p>
-                  </a:txBody>
-                  <a:tcPr marL="91440" marR="91440" marT="45720" marB="45720"/>
-                </a:tc>
-                <a:tc>
-                  <a:txBody>
-                    <a:bodyPr/>
-                    <a:lstStyle/>
-                    <a:p>
-                      <a:r>
-                        <a:rPr sz="900">
-                          <a:solidFill>
-                            <a:srgbClr val="0F172A"/>
-                          </a:solidFill>
-                        </a:rPr>
-                        <a:t>0.0199</a:t>
+              <a:tr h="571500">
+                <a:tc>
+                  <a:txBody>
+                    <a:bodyPr/>
+                    <a:lstStyle/>
+                    <a:p>
+                      <a:r>
+                        <a:rPr sz="900">
+                          <a:solidFill>
+                            <a:srgbClr val="0F172A"/>
+                          </a:solidFill>
+                        </a:rPr>
+                        <a:t>4. mask</a:t>
+                      </a:r>
+                    </a:p>
+                  </a:txBody>
+                  <a:tcPr marL="91440" marR="91440" marT="45720" marB="45720"/>
+                </a:tc>
+                <a:tc>
+                  <a:txBody>
+                    <a:bodyPr/>
+                    <a:lstStyle/>
+                    <a:p>
+                      <a:r>
+                        <a:rPr sz="900">
+                          <a:solidFill>
+                            <a:srgbClr val="0F172A"/>
+                          </a:solidFill>
+                        </a:rPr>
+                        <a:t>masked_obj = obj · support</a:t>
+                      </a:r>
+                    </a:p>
+                  </a:txBody>
+                  <a:tcPr marL="91440" marR="91440" marT="45720" marB="45720"/>
+                </a:tc>
+                <a:tc>
+                  <a:txBody>
+                    <a:bodyPr/>
+                    <a:lstStyle/>
+                    <a:p>
+                      <a:r>
+                        <a:rPr sz="900">
+                          <a:solidFill>
+                            <a:srgbClr val="0F172A"/>
+                          </a:solidFill>
+                        </a:rPr>
+                        <a:t>support 外强制为 0</a:t>
                       </a:r>
                     </a:p>
                   </a:txBody>
                   <a:tcPr marL="91440" marR="91440" marT="45720" marB="45720"/>
                 </a:tc>
               </a:tr>
-              <a:tr h="408214">
-                <a:tc>
-                  <a:txBody>
-                    <a:bodyPr/>
-                    <a:lstStyle/>
-                    <a:p>
-                      <a:r>
-                        <a:rPr sz="900">
-                          <a:solidFill>
-                            <a:srgbClr val="0F172A"/>
-                          </a:solidFill>
-                        </a:rPr>
-                        <a:t>Support Dice</a:t>
-                      </a:r>
-                    </a:p>
-                  </a:txBody>
-                  <a:tcPr marL="91440" marR="91440" marT="45720" marB="45720"/>
-                </a:tc>
-                <a:tc>
-                  <a:txBody>
-                    <a:bodyPr/>
-                    <a:lstStyle/>
-                    <a:p>
-                      <a:r>
-                        <a:rPr sz="900">
-                          <a:solidFill>
-                            <a:srgbClr val="0F172A"/>
-                          </a:solidFill>
-                        </a:rPr>
-                        <a:t>0.330</a:t>
-                      </a:r>
-                    </a:p>
-                  </a:txBody>
-                  <a:tcPr marL="91440" marR="91440" marT="45720" marB="45720"/>
-                </a:tc>
-              </a:tr>
-              <a:tr h="408214">
-                <a:tc>
-                  <a:txBody>
-                    <a:bodyPr/>
-                    <a:lstStyle/>
-                    <a:p>
-                      <a:r>
-                        <a:rPr sz="900">
-                          <a:solidFill>
-                            <a:srgbClr val="0F172A"/>
-                          </a:solidFill>
-                        </a:rPr>
-                        <a:t>Phase MAE</a:t>
-                      </a:r>
-                    </a:p>
-                  </a:txBody>
-                  <a:tcPr marL="91440" marR="91440" marT="45720" marB="45720"/>
-                </a:tc>
-                <a:tc>
-                  <a:txBody>
-                    <a:bodyPr/>
-                    <a:lstStyle/>
-                    <a:p>
-                      <a:r>
-                        <a:rPr sz="900">
-                          <a:solidFill>
-                            <a:srgbClr val="0F172A"/>
-                          </a:solidFill>
-                        </a:rPr>
-                        <a:t>0.873</a:t>
+              <a:tr h="571500">
+                <a:tc>
+                  <a:txBody>
+                    <a:bodyPr/>
+                    <a:lstStyle/>
+                    <a:p>
+                      <a:r>
+                        <a:rPr sz="900">
+                          <a:solidFill>
+                            <a:srgbClr val="0F172A"/>
+                          </a:solidFill>
+                        </a:rPr>
+                        <a:t>5. farfield</a:t>
+                      </a:r>
+                    </a:p>
+                  </a:txBody>
+                  <a:tcPr marL="91440" marR="91440" marT="45720" marB="45720"/>
+                </a:tc>
+                <a:tc>
+                  <a:txBody>
+                    <a:bodyPr/>
+                    <a:lstStyle/>
+                    <a:p>
+                      <a:r>
+                        <a:rPr sz="900">
+                          <a:solidFill>
+                            <a:srgbClr val="0F172A"/>
+                          </a:solidFill>
+                        </a:rPr>
+                        <a:t>abs(fftshift(fftn(ifftshift(masked_obj))))</a:t>
+                      </a:r>
+                    </a:p>
+                  </a:txBody>
+                  <a:tcPr marL="91440" marR="91440" marT="45720" marB="45720"/>
+                </a:tc>
+                <a:tc>
+                  <a:txBody>
+                    <a:bodyPr/>
+                    <a:lstStyle/>
+                    <a:p>
+                      <a:r>
+                        <a:rPr sz="900">
+                          <a:solidFill>
+                            <a:srgbClr val="0F172A"/>
+                          </a:solidFill>
+                        </a:rPr>
+                        <a:t>得到预测衍射强度 pred_diff</a:t>
                       </a:r>
                     </a:p>
                   </a:txBody>
@@ -3670,10 +5935,10 @@
       </p:graphicFrame>
       <p:sp>
         <p:nvSpPr>
-          <p:cNvPr id="6" name="">
+          <p:cNvPr id="5" name="">
             <a:extLst xmlns:a="http://schemas.openxmlformats.org/drawingml/2006/main">
               <a:ext uri="{FF2B5EF4-FFF2-40B4-BE49-F238E27FC236}">
-                <a16:creationId xmlns:a16="http://schemas.microsoft.com/office/drawing/2014/main" id="{1120BB2B-BBAD-433C-8549-6382FF25D025}"/>
+                <a16:creationId xmlns:a16="http://schemas.microsoft.com/office/drawing/2014/main" id="{F1DCD84A-591E-480F-BFC8-1F6EE30854F3}"/>
               </a:ext>
             </a:extLst>
           </p:cNvPr>
@@ -3684,8 +5949,8 @@
         </p:nvSpPr>
         <p:spPr>
           <a:xfrm xmlns:a="http://schemas.openxmlformats.org/drawingml/2006/main">
-            <a:off x="8572500" y="4648200"/>
-            <a:ext cx="2714625" cy="552450"/>
+            <a:off x="1238250" y="5334000"/>
+            <a:ext cx="9525000" cy="419100"/>
           </a:xfrm>
           <a:prstGeom xmlns:a="http://schemas.openxmlformats.org/drawingml/2006/main" prst="rect">
             <a:avLst/>
@@ -3700,20 +5965,20 @@
           <a:bodyPr xmlns:a="http://schemas.openxmlformats.org/drawingml/2006/main"/>
           <a:lstStyle xmlns:a="http://schemas.openxmlformats.org/drawingml/2006/main"/>
           <a:p xmlns:a="http://schemas.openxmlformats.org/drawingml/2006/main">
-            <a:pPr>
-              <a:defRPr sz="1350" b="1">
+            <a:pPr algn="ctr">
+              <a:defRPr sz="1800" b="1">
                 <a:solidFill>
                   <a:srgbClr val="0F766E"/>
                 </a:solidFill>
               </a:defRPr>
             </a:pPr>
             <a:r>
-              <a:rPr sz="1350" b="1">
+              <a:rPr sz="1800" b="1">
                 <a:solidFill>
                   <a:srgbClr val="0F766E"/>
                 </a:solidFill>
               </a:rPr>
-              <a:t>结论：这组图可以作为 AutoPhaseNN 复现成功的主要证据。</a:t>
+              <a:t>这里的硬 support 和空间结构先验，是 AutoPhaseNN 能恢复合理实空间结果的重要原因之一。</a:t>
             </a:r>
           </a:p>
         </p:txBody>
@@ -3721,7 +5986,7 @@
     </p:spTree>
     <p:extLst>
       <p:ext uri="{BB962C8B-B14F-4D97-AF65-F5344CB8AC3E}">
-        <p14:creationId xmlns:p14="http://schemas.microsoft.com/office/powerpoint/2010/main" val="679831670"/>
+        <p14:creationId xmlns:p14="http://schemas.microsoft.com/office/powerpoint/2010/main" val="771065258"/>
       </p:ext>
     </p:extLst>
   </p:cSld>
@@ -3752,7 +6017,7 @@
           <p:cNvPr id="1" name="">
             <a:extLst xmlns:a="http://schemas.openxmlformats.org/drawingml/2006/main">
               <a:ext uri="{FF2B5EF4-FFF2-40B4-BE49-F238E27FC236}">
-                <a16:creationId xmlns:a16="http://schemas.microsoft.com/office/drawing/2014/main" id="{6F625009-01C5-451A-97E5-F280C41BB4BE}"/>
+                <a16:creationId xmlns:a16="http://schemas.microsoft.com/office/drawing/2014/main" id="{B9C26986-1981-4190-BA38-BBFB40814800}"/>
               </a:ext>
             </a:extLst>
           </p:cNvPr>
@@ -3792,7 +6057,7 @@
                   <a:srgbClr val="0F172A"/>
                 </a:solidFill>
               </a:rPr>
-              <a:t>UMamba 原始硬阈值结果图</a:t>
+              <a:t>UMamba 替换了哪里</a:t>
             </a:r>
           </a:p>
         </p:txBody>
@@ -3802,7 +6067,7 @@
           <p:cNvPr id="2" name="">
             <a:extLst xmlns:a="http://schemas.openxmlformats.org/drawingml/2006/main">
               <a:ext uri="{FF2B5EF4-FFF2-40B4-BE49-F238E27FC236}">
-                <a16:creationId xmlns:a16="http://schemas.microsoft.com/office/drawing/2014/main" id="{6A613E0D-3B6E-4917-B9B5-BFB9D58B4F66}"/>
+                <a16:creationId xmlns:a16="http://schemas.microsoft.com/office/drawing/2014/main" id="{8A520CC2-BEBA-4D66-A290-487FD9DF8E1F}"/>
               </a:ext>
             </a:extLst>
           </p:cNvPr>
@@ -3814,7 +6079,7 @@
         <p:spPr>
           <a:xfrm xmlns:a="http://schemas.openxmlformats.org/drawingml/2006/main">
             <a:off x="476250" y="742950"/>
-            <a:ext cx="9334500" cy="266700"/>
+            <a:ext cx="10096500" cy="266700"/>
           </a:xfrm>
           <a:prstGeom xmlns:a="http://schemas.openxmlformats.org/drawingml/2006/main" prst="rect">
             <a:avLst/>
@@ -3842,7 +6107,7 @@
                   <a:srgbClr val="475569"/>
                 </a:solidFill>
               </a:rPr>
-              <a:t>当前仓库中对应 visualization_train_subset.png 为 0 字节，先保留图片位置</a:t>
+              <a:t>实验目标是尽量保持数据、loss、后处理一致，只把网络主体换成 UMamba</a:t>
             </a:r>
           </a:p>
         </p:txBody>
@@ -3852,7 +6117,7 @@
           <p:cNvPr id="3" name="">
             <a:extLst xmlns:a="http://schemas.openxmlformats.org/drawingml/2006/main">
               <a:ext uri="{FF2B5EF4-FFF2-40B4-BE49-F238E27FC236}">
-                <a16:creationId xmlns:a16="http://schemas.microsoft.com/office/drawing/2014/main" id="{1834493E-1683-4D1C-A0C3-4929475DAD62}"/>
+                <a16:creationId xmlns:a16="http://schemas.microsoft.com/office/drawing/2014/main" id="{CA14AEA6-ADC6-4EB7-A927-33369100A58D}"/>
               </a:ext>
             </a:extLst>
           </p:cNvPr>
@@ -3880,160 +6145,26 @@
           </a:ln>
         </p:spPr>
       </p:sp>
-      <p:sp>
-        <p:nvSpPr>
-          <p:cNvPr id="4" name="">
-            <a:extLst xmlns:a="http://schemas.openxmlformats.org/drawingml/2006/main">
-              <a:ext uri="{FF2B5EF4-FFF2-40B4-BE49-F238E27FC236}">
-                <a16:creationId xmlns:a16="http://schemas.microsoft.com/office/drawing/2014/main" id="{C791C17C-A2B7-4D0C-AE7F-5742949DA6B4}"/>
-              </a:ext>
-            </a:extLst>
-          </p:cNvPr>
-          <p:cNvSpPr>
-            <a:spLocks xmlns:a="http://schemas.openxmlformats.org/drawingml/2006/main" noGrp="1"/>
-          </p:cNvSpPr>
-          <p:nvPr/>
-        </p:nvSpPr>
-        <p:spPr>
-          <a:xfrm xmlns:a="http://schemas.openxmlformats.org/drawingml/2006/main">
-            <a:off x="685800" y="1381125"/>
-            <a:ext cx="7239000" cy="4381500"/>
-          </a:xfrm>
-          <a:prstGeom xmlns:a="http://schemas.openxmlformats.org/drawingml/2006/main" prst="roundRect">
-            <a:avLst>
-              <a:gd name="adj" fmla="val 2609"/>
-            </a:avLst>
-          </a:prstGeom>
-          <a:solidFill xmlns:a="http://schemas.openxmlformats.org/drawingml/2006/main">
-            <a:srgbClr val="FFF7ED"/>
-          </a:solidFill>
-          <a:ln xmlns:a="http://schemas.openxmlformats.org/drawingml/2006/main" w="19050">
-            <a:solidFill>
-              <a:srgbClr val="D97706"/>
-            </a:solidFill>
-            <a:prstDash val="dash"/>
-          </a:ln>
-        </p:spPr>
-      </p:sp>
-      <p:sp>
-        <p:nvSpPr>
-          <p:cNvPr id="5" name="">
-            <a:extLst xmlns:a="http://schemas.openxmlformats.org/drawingml/2006/main">
-              <a:ext uri="{FF2B5EF4-FFF2-40B4-BE49-F238E27FC236}">
-                <a16:creationId xmlns:a16="http://schemas.microsoft.com/office/drawing/2014/main" id="{4DDD8973-8183-48D3-883B-A36D301167A3}"/>
-              </a:ext>
-            </a:extLst>
-          </p:cNvPr>
-          <p:cNvSpPr>
-            <a:spLocks xmlns:a="http://schemas.openxmlformats.org/drawingml/2006/main" noGrp="1"/>
-          </p:cNvSpPr>
-          <p:nvPr/>
-        </p:nvSpPr>
-        <p:spPr>
-          <a:xfrm xmlns:a="http://schemas.openxmlformats.org/drawingml/2006/main">
-            <a:off x="914400" y="1724025"/>
-            <a:ext cx="6781800" cy="361950"/>
-          </a:xfrm>
-          <a:prstGeom xmlns:a="http://schemas.openxmlformats.org/drawingml/2006/main" prst="rect">
-            <a:avLst/>
-          </a:prstGeom>
-          <a:noFill xmlns:a="http://schemas.openxmlformats.org/drawingml/2006/main"/>
-          <a:ln xmlns:a="http://schemas.openxmlformats.org/drawingml/2006/main" w="0">
-            <a:noFill/>
-            <a:prstDash val="solid"/>
-          </a:ln>
-        </p:spPr>
-        <p:txBody>
-          <a:bodyPr xmlns:a="http://schemas.openxmlformats.org/drawingml/2006/main"/>
-          <a:lstStyle xmlns:a="http://schemas.openxmlformats.org/drawingml/2006/main"/>
-          <a:p xmlns:a="http://schemas.openxmlformats.org/drawingml/2006/main">
-            <a:pPr algn="ctr">
-              <a:defRPr sz="1800" b="1">
-                <a:solidFill>
-                  <a:srgbClr val="D97706"/>
-                </a:solidFill>
-              </a:defRPr>
-            </a:pPr>
-            <a:r>
-              <a:rPr sz="1800" b="1">
-                <a:solidFill>
-                  <a:srgbClr val="D97706"/>
-                </a:solidFill>
-              </a:rPr>
-              <a:t>待补图：UMamba hard threshold</a:t>
-            </a:r>
-          </a:p>
-        </p:txBody>
-      </p:sp>
-      <p:sp>
-        <p:nvSpPr>
-          <p:cNvPr id="6" name="">
-            <a:extLst xmlns:a="http://schemas.openxmlformats.org/drawingml/2006/main">
-              <a:ext uri="{FF2B5EF4-FFF2-40B4-BE49-F238E27FC236}">
-                <a16:creationId xmlns:a16="http://schemas.microsoft.com/office/drawing/2014/main" id="{E2D3F058-0FA1-4BDD-838E-F17E8EC49DB7}"/>
-              </a:ext>
-            </a:extLst>
-          </p:cNvPr>
-          <p:cNvSpPr>
-            <a:spLocks xmlns:a="http://schemas.openxmlformats.org/drawingml/2006/main" noGrp="1"/>
-          </p:cNvSpPr>
-          <p:nvPr/>
-        </p:nvSpPr>
-        <p:spPr>
-          <a:xfrm xmlns:a="http://schemas.openxmlformats.org/drawingml/2006/main">
-            <a:off x="1047750" y="2238375"/>
-            <a:ext cx="6515100" cy="876300"/>
-          </a:xfrm>
-          <a:prstGeom xmlns:a="http://schemas.openxmlformats.org/drawingml/2006/main" prst="rect">
-            <a:avLst/>
-          </a:prstGeom>
-          <a:noFill xmlns:a="http://schemas.openxmlformats.org/drawingml/2006/main"/>
-          <a:ln xmlns:a="http://schemas.openxmlformats.org/drawingml/2006/main" w="0">
-            <a:noFill/>
-            <a:prstDash val="solid"/>
-          </a:ln>
-        </p:spPr>
-        <p:txBody>
-          <a:bodyPr xmlns:a="http://schemas.openxmlformats.org/drawingml/2006/main"/>
-          <a:lstStyle xmlns:a="http://schemas.openxmlformats.org/drawingml/2006/main"/>
-          <a:p xmlns:a="http://schemas.openxmlformats.org/drawingml/2006/main">
-            <a:pPr algn="ctr">
-              <a:defRPr sz="1200">
-                <a:solidFill>
-                  <a:srgbClr val="475569"/>
-                </a:solidFill>
-              </a:defRPr>
-            </a:pPr>
-            <a:r>
-              <a:rPr sz="1200">
-                <a:solidFill>
-                  <a:srgbClr val="475569"/>
-                </a:solidFill>
-              </a:rPr>
-              <a:t>缺失文件：umamba_overfit100_l1_20260604_134304/visualization_train_subset.png 当前为 0 字节。</a:t>
-            </a:r>
-          </a:p>
-        </p:txBody>
-      </p:sp>
       <p:graphicFrame>
         <p:nvGraphicFramePr>
-          <p:cNvPr id="15" name=""/>
+          <p:cNvPr id="9" name=""/>
           <p:cNvGraphicFramePr/>
           <p:nvPr/>
         </p:nvGraphicFramePr>
         <p:xfrm>
-          <a:off xmlns:a="http://schemas.openxmlformats.org/drawingml/2006/main" x="8572500" y="1428750"/>
-          <a:ext xmlns:a="http://schemas.openxmlformats.org/drawingml/2006/main" cx="2714625" cy="2857500"/>
+          <a:off xmlns:a="http://schemas.openxmlformats.org/drawingml/2006/main" x="762000" y="1381125"/>
+          <a:ext xmlns:a="http://schemas.openxmlformats.org/drawingml/2006/main" cx="10668000" cy="3733800"/>
         </p:xfrm>
         <a:graphic xmlns:a="http://schemas.openxmlformats.org/drawingml/2006/main">
           <a:graphicData uri="http://schemas.openxmlformats.org/drawingml/2006/table">
             <a:tbl>
               <a:tblPr firstRow="1" bandRow="1"/>
               <a:tblGrid>
-                <a:gridCol w="1428750"/>
-                <a:gridCol w="1285875"/>
+                <a:gridCol w="1809750"/>
+                <a:gridCol w="4095750"/>
+                <a:gridCol w="4762500"/>
               </a:tblGrid>
-              <a:tr h="408214">
+              <a:tr h="533400">
                 <a:tc>
                   <a:txBody>
                     <a:bodyPr/>
@@ -4045,7 +6176,7 @@
                             <a:srgbClr val="FFFFFF"/>
                           </a:solidFill>
                         </a:rPr>
-                        <a:t>指标</a:t>
+                        <a:t>项目</a:t>
                       </a:r>
                     </a:p>
                   </a:txBody>
@@ -4066,7 +6197,7 @@
                             <a:srgbClr val="FFFFFF"/>
                           </a:solidFill>
                         </a:rPr>
-                        <a:t>数值</a:t>
+                        <a:t>AutoPhaseNN</a:t>
                       </a:r>
                     </a:p>
                   </a:txBody>
@@ -4076,217 +6207,340 @@
                     </a:solidFill>
                   </a:tcPr>
                 </a:tc>
+                <a:tc>
+                  <a:txBody>
+                    <a:bodyPr/>
+                    <a:lstStyle/>
+                    <a:p>
+                      <a:r>
+                        <a:rPr sz="900" b="1">
+                          <a:solidFill>
+                            <a:srgbClr val="FFFFFF"/>
+                          </a:solidFill>
+                        </a:rPr>
+                        <a:t>UMamba 替换版</a:t>
+                      </a:r>
+                    </a:p>
+                  </a:txBody>
+                  <a:tcPr marL="91440" marR="91440" marT="45720" marB="45720">
+                    <a:solidFill>
+                      <a:srgbClr val="0F172A"/>
+                    </a:solidFill>
+                  </a:tcPr>
+                </a:tc>
               </a:tr>
-              <a:tr h="408214">
-                <a:tc>
-                  <a:txBody>
-                    <a:bodyPr/>
-                    <a:lstStyle/>
-                    <a:p>
-                      <a:r>
-                        <a:rPr sz="900">
-                          <a:solidFill>
-                            <a:srgbClr val="0F172A"/>
-                          </a:solidFill>
-                        </a:rPr>
-                        <a:t>Val L1</a:t>
-                      </a:r>
-                    </a:p>
-                  </a:txBody>
-                  <a:tcPr marL="91440" marR="91440" marT="45720" marB="45720"/>
-                </a:tc>
-                <a:tc>
-                  <a:txBody>
-                    <a:bodyPr/>
-                    <a:lstStyle/>
-                    <a:p>
-                      <a:r>
-                        <a:rPr sz="900">
-                          <a:solidFill>
-                            <a:srgbClr val="0F172A"/>
-                          </a:solidFill>
-                        </a:rPr>
-                        <a:t>6.13</a:t>
+              <a:tr h="533400">
+                <a:tc>
+                  <a:txBody>
+                    <a:bodyPr/>
+                    <a:lstStyle/>
+                    <a:p>
+                      <a:r>
+                        <a:rPr sz="900">
+                          <a:solidFill>
+                            <a:srgbClr val="0F172A"/>
+                          </a:solidFill>
+                        </a:rPr>
+                        <a:t>输入</a:t>
+                      </a:r>
+                    </a:p>
+                  </a:txBody>
+                  <a:tcPr marL="91440" marR="91440" marT="45720" marB="45720"/>
+                </a:tc>
+                <a:tc>
+                  <a:txBody>
+                    <a:bodyPr/>
+                    <a:lstStyle/>
+                    <a:p>
+                      <a:r>
+                        <a:rPr sz="900">
+                          <a:solidFill>
+                            <a:srgbClr val="0F172A"/>
+                          </a:solidFill>
+                        </a:rPr>
+                        <a:t>diff 3D volume</a:t>
+                      </a:r>
+                    </a:p>
+                  </a:txBody>
+                  <a:tcPr marL="91440" marR="91440" marT="45720" marB="45720"/>
+                </a:tc>
+                <a:tc>
+                  <a:txBody>
+                    <a:bodyPr/>
+                    <a:lstStyle/>
+                    <a:p>
+                      <a:r>
+                        <a:rPr sz="900">
+                          <a:solidFill>
+                            <a:srgbClr val="0F172A"/>
+                          </a:solidFill>
+                        </a:rPr>
+                        <a:t>diff 3D volume</a:t>
                       </a:r>
                     </a:p>
                   </a:txBody>
                   <a:tcPr marL="91440" marR="91440" marT="45720" marB="45720"/>
                 </a:tc>
               </a:tr>
-              <a:tr h="408214">
-                <a:tc>
-                  <a:txBody>
-                    <a:bodyPr/>
-                    <a:lstStyle/>
-                    <a:p>
-                      <a:r>
-                        <a:rPr sz="900">
-                          <a:solidFill>
-                            <a:srgbClr val="0F172A"/>
-                          </a:solidFill>
-                        </a:rPr>
-                        <a:t>Subset FT L1</a:t>
-                      </a:r>
-                    </a:p>
-                  </a:txBody>
-                  <a:tcPr marL="91440" marR="91440" marT="45720" marB="45720"/>
-                </a:tc>
-                <a:tc>
-                  <a:txBody>
-                    <a:bodyPr/>
-                    <a:lstStyle/>
-                    <a:p>
-                      <a:r>
-                        <a:rPr sz="900">
-                          <a:solidFill>
-                            <a:srgbClr val="0F172A"/>
-                          </a:solidFill>
-                        </a:rPr>
-                        <a:t>6.10</a:t>
+              <a:tr h="533400">
+                <a:tc>
+                  <a:txBody>
+                    <a:bodyPr/>
+                    <a:lstStyle/>
+                    <a:p>
+                      <a:r>
+                        <a:rPr sz="900">
+                          <a:solidFill>
+                            <a:srgbClr val="0F172A"/>
+                          </a:solidFill>
+                        </a:rPr>
+                        <a:t>网络主体</a:t>
+                      </a:r>
+                    </a:p>
+                  </a:txBody>
+                  <a:tcPr marL="91440" marR="91440" marT="45720" marB="45720"/>
+                </a:tc>
+                <a:tc>
+                  <a:txBody>
+                    <a:bodyPr/>
+                    <a:lstStyle/>
+                    <a:p>
+                      <a:r>
+                        <a:rPr sz="900">
+                          <a:solidFill>
+                            <a:srgbClr val="0F172A"/>
+                          </a:solidFill>
+                        </a:rPr>
+                        <a:t>3D CNN encoder + 两个 decoder</a:t>
+                      </a:r>
+                    </a:p>
+                  </a:txBody>
+                  <a:tcPr marL="91440" marR="91440" marT="45720" marB="45720"/>
+                </a:tc>
+                <a:tc>
+                  <a:txBody>
+                    <a:bodyPr/>
+                    <a:lstStyle/>
+                    <a:p>
+                      <a:r>
+                        <a:rPr sz="900">
+                          <a:solidFill>
+                            <a:srgbClr val="0F172A"/>
+                          </a:solidFill>
+                        </a:rPr>
+                        <a:t>UMamba encoder + UNet-style decoder1/decoder2</a:t>
                       </a:r>
                     </a:p>
                   </a:txBody>
                   <a:tcPr marL="91440" marR="91440" marT="45720" marB="45720"/>
                 </a:tc>
               </a:tr>
-              <a:tr h="408214">
-                <a:tc>
-                  <a:txBody>
-                    <a:bodyPr/>
-                    <a:lstStyle/>
-                    <a:p>
-                      <a:r>
-                        <a:rPr sz="900">
-                          <a:solidFill>
-                            <a:srgbClr val="0F172A"/>
-                          </a:solidFill>
-                        </a:rPr>
-                        <a:t>Pearson</a:t>
-                      </a:r>
-                    </a:p>
-                  </a:txBody>
-                  <a:tcPr marL="91440" marR="91440" marT="45720" marB="45720"/>
-                </a:tc>
-                <a:tc>
-                  <a:txBody>
-                    <a:bodyPr/>
-                    <a:lstStyle/>
-                    <a:p>
-                      <a:r>
-                        <a:rPr sz="900">
-                          <a:solidFill>
-                            <a:srgbClr val="0F172A"/>
-                          </a:solidFill>
-                        </a:rPr>
-                        <a:t>0.822</a:t>
+              <a:tr h="533400">
+                <a:tc>
+                  <a:txBody>
+                    <a:bodyPr/>
+                    <a:lstStyle/>
+                    <a:p>
+                      <a:r>
+                        <a:rPr sz="900">
+                          <a:solidFill>
+                            <a:srgbClr val="0F172A"/>
+                          </a:solidFill>
+                        </a:rPr>
+                        <a:t>amp 输出</a:t>
+                      </a:r>
+                    </a:p>
+                  </a:txBody>
+                  <a:tcPr marL="91440" marR="91440" marT="45720" marB="45720"/>
+                </a:tc>
+                <a:tc>
+                  <a:txBody>
+                    <a:bodyPr/>
+                    <a:lstStyle/>
+                    <a:p>
+                      <a:r>
+                        <a:rPr sz="900">
+                          <a:solidFill>
+                            <a:srgbClr val="0F172A"/>
+                          </a:solidFill>
+                        </a:rPr>
+                        <a:t>Sigmoid(decoder1)</a:t>
+                      </a:r>
+                    </a:p>
+                  </a:txBody>
+                  <a:tcPr marL="91440" marR="91440" marT="45720" marB="45720"/>
+                </a:tc>
+                <a:tc>
+                  <a:txBody>
+                    <a:bodyPr/>
+                    <a:lstStyle/>
+                    <a:p>
+                      <a:r>
+                        <a:rPr sz="900">
+                          <a:solidFill>
+                            <a:srgbClr val="0F172A"/>
+                          </a:solidFill>
+                        </a:rPr>
+                        <a:t>Sigmoid(decoder1)</a:t>
                       </a:r>
                     </a:p>
                   </a:txBody>
                   <a:tcPr marL="91440" marR="91440" marT="45720" marB="45720"/>
                 </a:tc>
               </a:tr>
-              <a:tr h="408214">
-                <a:tc>
-                  <a:txBody>
-                    <a:bodyPr/>
-                    <a:lstStyle/>
-                    <a:p>
-                      <a:r>
-                        <a:rPr sz="900">
-                          <a:solidFill>
-                            <a:srgbClr val="0F172A"/>
-                          </a:solidFill>
-                        </a:rPr>
-                        <a:t>Amp L1</a:t>
-                      </a:r>
-                    </a:p>
-                  </a:txBody>
-                  <a:tcPr marL="91440" marR="91440" marT="45720" marB="45720"/>
-                </a:tc>
-                <a:tc>
-                  <a:txBody>
-                    <a:bodyPr/>
-                    <a:lstStyle/>
-                    <a:p>
-                      <a:r>
-                        <a:rPr sz="900">
-                          <a:solidFill>
-                            <a:srgbClr val="0F172A"/>
-                          </a:solidFill>
-                        </a:rPr>
-                        <a:t>0.0255</a:t>
+              <a:tr h="533400">
+                <a:tc>
+                  <a:txBody>
+                    <a:bodyPr/>
+                    <a:lstStyle/>
+                    <a:p>
+                      <a:r>
+                        <a:rPr sz="900">
+                          <a:solidFill>
+                            <a:srgbClr val="0F172A"/>
+                          </a:solidFill>
+                        </a:rPr>
+                        <a:t>phase 输出</a:t>
+                      </a:r>
+                    </a:p>
+                  </a:txBody>
+                  <a:tcPr marL="91440" marR="91440" marT="45720" marB="45720"/>
+                </a:tc>
+                <a:tc>
+                  <a:txBody>
+                    <a:bodyPr/>
+                    <a:lstStyle/>
+                    <a:p>
+                      <a:r>
+                        <a:rPr sz="900">
+                          <a:solidFill>
+                            <a:srgbClr val="0F172A"/>
+                          </a:solidFill>
+                        </a:rPr>
+                        <a:t>π · Tanh(decoder2)</a:t>
+                      </a:r>
+                    </a:p>
+                  </a:txBody>
+                  <a:tcPr marL="91440" marR="91440" marT="45720" marB="45720"/>
+                </a:tc>
+                <a:tc>
+                  <a:txBody>
+                    <a:bodyPr/>
+                    <a:lstStyle/>
+                    <a:p>
+                      <a:r>
+                        <a:rPr sz="900">
+                          <a:solidFill>
+                            <a:srgbClr val="0F172A"/>
+                          </a:solidFill>
+                        </a:rPr>
+                        <a:t>π · Tanh(decoder2) 或 atan 变体</a:t>
                       </a:r>
                     </a:p>
                   </a:txBody>
                   <a:tcPr marL="91440" marR="91440" marT="45720" marB="45720"/>
                 </a:tc>
               </a:tr>
-              <a:tr h="408214">
-                <a:tc>
-                  <a:txBody>
-                    <a:bodyPr/>
-                    <a:lstStyle/>
-                    <a:p>
-                      <a:r>
-                        <a:rPr sz="900">
-                          <a:solidFill>
-                            <a:srgbClr val="0F172A"/>
-                          </a:solidFill>
-                        </a:rPr>
-                        <a:t>Support Dice</a:t>
-                      </a:r>
-                    </a:p>
-                  </a:txBody>
-                  <a:tcPr marL="91440" marR="91440" marT="45720" marB="45720"/>
-                </a:tc>
-                <a:tc>
-                  <a:txBody>
-                    <a:bodyPr/>
-                    <a:lstStyle/>
-                    <a:p>
-                      <a:r>
-                        <a:rPr sz="900">
-                          <a:solidFill>
-                            <a:srgbClr val="0F172A"/>
-                          </a:solidFill>
-                        </a:rPr>
-                        <a:t>0.012</a:t>
+              <a:tr h="533400">
+                <a:tc>
+                  <a:txBody>
+                    <a:bodyPr/>
+                    <a:lstStyle/>
+                    <a:p>
+                      <a:r>
+                        <a:rPr sz="900">
+                          <a:solidFill>
+                            <a:srgbClr val="0F172A"/>
+                          </a:solidFill>
+                        </a:rPr>
+                        <a:t>后处理</a:t>
+                      </a:r>
+                    </a:p>
+                  </a:txBody>
+                  <a:tcPr marL="91440" marR="91440" marT="45720" marB="45720"/>
+                </a:tc>
+                <a:tc>
+                  <a:txBody>
+                    <a:bodyPr/>
+                    <a:lstStyle/>
+                    <a:p>
+                      <a:r>
+                        <a:rPr sz="900">
+                          <a:solidFill>
+                            <a:srgbClr val="0F172A"/>
+                          </a:solidFill>
+                        </a:rPr>
+                        <a:t>hard support + complex object + FFT</a:t>
+                      </a:r>
+                    </a:p>
+                  </a:txBody>
+                  <a:tcPr marL="91440" marR="91440" marT="45720" marB="45720"/>
+                </a:tc>
+                <a:tc>
+                  <a:txBody>
+                    <a:bodyPr/>
+                    <a:lstStyle/>
+                    <a:p>
+                      <a:r>
+                        <a:rPr sz="900">
+                          <a:solidFill>
+                            <a:srgbClr val="0F172A"/>
+                          </a:solidFill>
+                        </a:rPr>
+                        <a:t>尽量保持同一套后处理</a:t>
                       </a:r>
                     </a:p>
                   </a:txBody>
                   <a:tcPr marL="91440" marR="91440" marT="45720" marB="45720"/>
                 </a:tc>
               </a:tr>
-              <a:tr h="408214">
-                <a:tc>
-                  <a:txBody>
-                    <a:bodyPr/>
-                    <a:lstStyle/>
-                    <a:p>
-                      <a:r>
-                        <a:rPr sz="900">
-                          <a:solidFill>
-                            <a:srgbClr val="0F172A"/>
-                          </a:solidFill>
-                        </a:rPr>
-                        <a:t>Phase MAE</a:t>
-                      </a:r>
-                    </a:p>
-                  </a:txBody>
-                  <a:tcPr marL="91440" marR="91440" marT="45720" marB="45720"/>
-                </a:tc>
-                <a:tc>
-                  <a:txBody>
-                    <a:bodyPr/>
-                    <a:lstStyle/>
-                    <a:p>
-                      <a:r>
-                        <a:rPr sz="900">
-                          <a:solidFill>
-                            <a:srgbClr val="0F172A"/>
-                          </a:solidFill>
-                        </a:rPr>
-                        <a:t>2.402</a:t>
+              <a:tr h="533400">
+                <a:tc>
+                  <a:txBody>
+                    <a:bodyPr/>
+                    <a:lstStyle/>
+                    <a:p>
+                      <a:r>
+                        <a:rPr sz="900">
+                          <a:solidFill>
+                            <a:srgbClr val="0F172A"/>
+                          </a:solidFill>
+                        </a:rPr>
+                        <a:t>本轮关注</a:t>
+                      </a:r>
+                    </a:p>
+                  </a:txBody>
+                  <a:tcPr marL="91440" marR="91440" marT="45720" marB="45720"/>
+                </a:tc>
+                <a:tc>
+                  <a:txBody>
+                    <a:bodyPr/>
+                    <a:lstStyle/>
+                    <a:p>
+                      <a:r>
+                        <a:rPr sz="900">
+                          <a:solidFill>
+                            <a:srgbClr val="0F172A"/>
+                          </a:solidFill>
+                        </a:rPr>
+                        <a:t>复现基线</a:t>
+                      </a:r>
+                    </a:p>
+                  </a:txBody>
+                  <a:tcPr marL="91440" marR="91440" marT="45720" marB="45720"/>
+                </a:tc>
+                <a:tc>
+                  <a:txBody>
+                    <a:bodyPr/>
+                    <a:lstStyle/>
+                    <a:p>
+                      <a:r>
+                        <a:rPr sz="900">
+                          <a:solidFill>
+                            <a:srgbClr val="0F172A"/>
+                          </a:solidFill>
+                        </a:rPr>
+                        <a:t>看换模型后是否仍能恢复实空间 amp/phase/support</a:t>
                       </a:r>
                     </a:p>
                   </a:txBody>
@@ -4299,10 +6553,10 @@
       </p:graphicFrame>
       <p:sp>
         <p:nvSpPr>
-          <p:cNvPr id="8" name="">
+          <p:cNvPr id="5" name="">
             <a:extLst xmlns:a="http://schemas.openxmlformats.org/drawingml/2006/main">
               <a:ext uri="{FF2B5EF4-FFF2-40B4-BE49-F238E27FC236}">
-                <a16:creationId xmlns:a16="http://schemas.microsoft.com/office/drawing/2014/main" id="{AFD5EF9D-E3AA-4566-966E-3138E48A08BE}"/>
+                <a16:creationId xmlns:a16="http://schemas.microsoft.com/office/drawing/2014/main" id="{29CFAA41-F5CB-4406-AFC4-AD947E5F7D16}"/>
               </a:ext>
             </a:extLst>
           </p:cNvPr>
@@ -4313,8 +6567,8 @@
         </p:nvSpPr>
         <p:spPr>
           <a:xfrm xmlns:a="http://schemas.openxmlformats.org/drawingml/2006/main">
-            <a:off x="8572500" y="4648200"/>
-            <a:ext cx="2714625" cy="609600"/>
+            <a:off x="1143000" y="5562600"/>
+            <a:ext cx="9906000" cy="381000"/>
           </a:xfrm>
           <a:prstGeom xmlns:a="http://schemas.openxmlformats.org/drawingml/2006/main" prst="rect">
             <a:avLst/>
@@ -4329,20 +6583,20 @@
           <a:bodyPr xmlns:a="http://schemas.openxmlformats.org/drawingml/2006/main"/>
           <a:lstStyle xmlns:a="http://schemas.openxmlformats.org/drawingml/2006/main"/>
           <a:p xmlns:a="http://schemas.openxmlformats.org/drawingml/2006/main">
-            <a:pPr>
-              <a:defRPr sz="1350" b="1">
-                <a:solidFill>
-                  <a:srgbClr val="D97706"/>
+            <a:pPr algn="ctr">
+              <a:defRPr sz="1650" b="1">
+                <a:solidFill>
+                  <a:srgbClr val="0F172A"/>
                 </a:solidFill>
               </a:defRPr>
             </a:pPr>
             <a:r>
-              <a:rPr sz="1350" b="1">
-                <a:solidFill>
-                  <a:srgbClr val="D97706"/>
+              <a:rPr sz="1650" b="1">
+                <a:solidFill>
+                  <a:srgbClr val="0F172A"/>
                 </a:solidFill>
               </a:rPr>
-              <a:t>结论：损失下降，但 support/phase 指标远弱于 AutoPhaseNN。</a:t>
+              <a:t>所以对比重点不是“能不能降低 diff loss”，而是替换 UMamba 后，amp / phase / support 是否仍符合物理空间结构。</a:t>
             </a:r>
           </a:p>
         </p:txBody>
@@ -4350,7 +6604,7 @@
     </p:spTree>
     <p:extLst>
       <p:ext uri="{BB962C8B-B14F-4D97-AF65-F5344CB8AC3E}">
-        <p14:creationId xmlns:p14="http://schemas.microsoft.com/office/powerpoint/2010/main" val="848778017"/>
+        <p14:creationId xmlns:p14="http://schemas.microsoft.com/office/powerpoint/2010/main" val="194245444"/>
       </p:ext>
     </p:extLst>
   </p:cSld>
@@ -4381,7 +6635,7 @@
           <p:cNvPr id="1" name="">
             <a:extLst xmlns:a="http://schemas.openxmlformats.org/drawingml/2006/main">
               <a:ext uri="{FF2B5EF4-FFF2-40B4-BE49-F238E27FC236}">
-                <a16:creationId xmlns:a16="http://schemas.microsoft.com/office/drawing/2014/main" id="{65B98AE7-C721-4B9D-B67B-BBF9BD7EF111}"/>
+                <a16:creationId xmlns:a16="http://schemas.microsoft.com/office/drawing/2014/main" id="{D22DA298-B3C9-4C5D-A5F7-D7B60AE2EB94}"/>
               </a:ext>
             </a:extLst>
           </p:cNvPr>
@@ -4421,7 +6675,7 @@
                   <a:srgbClr val="0F172A"/>
                 </a:solidFill>
               </a:rPr>
-              <a:t>UMamba 可用完整图：实空间结构不理想</a:t>
+              <a:t>AutoPhaseNN 复现与 UMamba 替换实验结果</a:t>
             </a:r>
           </a:p>
         </p:txBody>
@@ -4431,7 +6685,7 @@
           <p:cNvPr id="2" name="">
             <a:extLst xmlns:a="http://schemas.openxmlformats.org/drawingml/2006/main">
               <a:ext uri="{FF2B5EF4-FFF2-40B4-BE49-F238E27FC236}">
-                <a16:creationId xmlns:a16="http://schemas.microsoft.com/office/drawing/2014/main" id="{0BB03969-2ECA-4C1B-939A-FA2705027301}"/>
+                <a16:creationId xmlns:a16="http://schemas.microsoft.com/office/drawing/2014/main" id="{D94C9797-9FD5-4408-9AD2-68AEE670455C}"/>
               </a:ext>
             </a:extLst>
           </p:cNvPr>
@@ -4443,7 +6697,7 @@
         <p:spPr>
           <a:xfrm xmlns:a="http://schemas.openxmlformats.org/drawingml/2006/main">
             <a:off x="476250" y="742950"/>
-            <a:ext cx="9334500" cy="266700"/>
+            <a:ext cx="10096500" cy="266700"/>
           </a:xfrm>
           <a:prstGeom xmlns:a="http://schemas.openxmlformats.org/drawingml/2006/main" prst="rect">
             <a:avLst/>
@@ -4471,7 +6725,7 @@
                   <a:srgbClr val="475569"/>
                 </a:solidFill>
               </a:rPr>
-              <a:t>文件：umamba_training_pipeline/output/visualization.png</a:t>
+              <a:t>简洁版：只展示关键曲线、完整可视化图和主要指标</a:t>
             </a:r>
           </a:p>
         </p:txBody>
@@ -4481,7 +6735,7 @@
           <p:cNvPr id="3" name="">
             <a:extLst xmlns:a="http://schemas.openxmlformats.org/drawingml/2006/main">
               <a:ext uri="{FF2B5EF4-FFF2-40B4-BE49-F238E27FC236}">
-                <a16:creationId xmlns:a16="http://schemas.microsoft.com/office/drawing/2014/main" id="{C31B4E52-5E87-40A9-B5EA-752E6E4B6C07}"/>
+                <a16:creationId xmlns:a16="http://schemas.microsoft.com/office/drawing/2014/main" id="{77608318-9B4D-43EF-BE7E-0A42C4E6BB88}"/>
               </a:ext>
             </a:extLst>
           </p:cNvPr>
@@ -4509,49 +6763,566 @@
           </a:ln>
         </p:spPr>
       </p:sp>
-      <p:pic>
-        <p:nvPicPr>
-          <p:cNvPr id="10" name=""/>
-          <p:cNvPicPr>
-            <a:picLocks xmlns:a="http://schemas.openxmlformats.org/drawingml/2006/main" noChangeAspect="1"/>
-          </p:cNvPicPr>
-          <p:nvPr/>
-        </p:nvPicPr>
-        <p:blipFill>
-          <a:blip xmlns:r="http://schemas.openxmlformats.org/officeDocument/2006/relationships" xmlns:a="http://schemas.openxmlformats.org/drawingml/2006/main" r:embed="Rb70e00db33d14851"/>
-          <a:stretch xmlns:a="http://schemas.openxmlformats.org/drawingml/2006/main"/>
-        </p:blipFill>
+      <p:sp>
+        <p:nvSpPr>
+          <p:cNvPr id="4" name="">
+            <a:extLst xmlns:a="http://schemas.openxmlformats.org/drawingml/2006/main">
+              <a:ext uri="{FF2B5EF4-FFF2-40B4-BE49-F238E27FC236}">
+                <a16:creationId xmlns:a16="http://schemas.microsoft.com/office/drawing/2014/main" id="{300DA5CB-5BF7-4949-9E4B-C1ADDBCD6BFF}"/>
+              </a:ext>
+            </a:extLst>
+          </p:cNvPr>
+          <p:cNvSpPr>
+            <a:spLocks xmlns:a="http://schemas.openxmlformats.org/drawingml/2006/main" noGrp="1"/>
+          </p:cNvSpPr>
+          <p:nvPr/>
+        </p:nvSpPr>
         <p:spPr>
           <a:xfrm xmlns:a="http://schemas.openxmlformats.org/drawingml/2006/main">
-            <a:off x="1995055" y="1219200"/>
-            <a:ext cx="4849091" cy="5334000"/>
+            <a:off x="838200" y="1619250"/>
+            <a:ext cx="2238375" cy="876300"/>
           </a:xfrm>
           <a:prstGeom xmlns:a="http://schemas.openxmlformats.org/drawingml/2006/main" prst="roundRect">
             <a:avLst>
-              <a:gd name="adj" fmla="val 1429"/>
+              <a:gd name="adj" fmla="val 13043"/>
             </a:avLst>
           </a:prstGeom>
-        </p:spPr>
-      </p:pic>
+          <a:solidFill xmlns:a="http://schemas.openxmlformats.org/drawingml/2006/main">
+            <a:srgbClr val="FFFFFF"/>
+          </a:solidFill>
+          <a:ln xmlns:a="http://schemas.openxmlformats.org/drawingml/2006/main" w="9525">
+            <a:solidFill>
+              <a:srgbClr val="E2E8F0"/>
+            </a:solidFill>
+            <a:prstDash val="solid"/>
+          </a:ln>
+        </p:spPr>
+      </p:sp>
+      <p:sp>
+        <p:nvSpPr>
+          <p:cNvPr id="5" name="">
+            <a:extLst xmlns:a="http://schemas.openxmlformats.org/drawingml/2006/main">
+              <a:ext uri="{FF2B5EF4-FFF2-40B4-BE49-F238E27FC236}">
+                <a16:creationId xmlns:a16="http://schemas.microsoft.com/office/drawing/2014/main" id="{51942CF3-F036-4DB8-81ED-0EA77C2785AB}"/>
+              </a:ext>
+            </a:extLst>
+          </p:cNvPr>
+          <p:cNvSpPr>
+            <a:spLocks xmlns:a="http://schemas.openxmlformats.org/drawingml/2006/main" noGrp="1"/>
+          </p:cNvSpPr>
+          <p:nvPr/>
+        </p:nvSpPr>
+        <p:spPr>
+          <a:xfrm xmlns:a="http://schemas.openxmlformats.org/drawingml/2006/main">
+            <a:off x="990600" y="1733550"/>
+            <a:ext cx="1905000" cy="228600"/>
+          </a:xfrm>
+          <a:prstGeom xmlns:a="http://schemas.openxmlformats.org/drawingml/2006/main" prst="rect">
+            <a:avLst/>
+          </a:prstGeom>
+          <a:noFill xmlns:a="http://schemas.openxmlformats.org/drawingml/2006/main"/>
+          <a:ln xmlns:a="http://schemas.openxmlformats.org/drawingml/2006/main" w="0">
+            <a:noFill/>
+            <a:prstDash val="solid"/>
+          </a:ln>
+        </p:spPr>
+        <p:txBody>
+          <a:bodyPr xmlns:a="http://schemas.openxmlformats.org/drawingml/2006/main"/>
+          <a:lstStyle xmlns:a="http://schemas.openxmlformats.org/drawingml/2006/main"/>
+          <a:p xmlns:a="http://schemas.openxmlformats.org/drawingml/2006/main">
+            <a:pPr>
+              <a:defRPr sz="900" b="1">
+                <a:solidFill>
+                  <a:srgbClr val="475569"/>
+                </a:solidFill>
+              </a:defRPr>
+            </a:pPr>
+            <a:r>
+              <a:rPr sz="900" b="1">
+                <a:solidFill>
+                  <a:srgbClr val="475569"/>
+                </a:solidFill>
+              </a:rPr>
+              <a:t>AutoPhaseNN full val L1</a:t>
+            </a:r>
+          </a:p>
+        </p:txBody>
+      </p:sp>
+      <p:sp>
+        <p:nvSpPr>
+          <p:cNvPr id="6" name="">
+            <a:extLst xmlns:a="http://schemas.openxmlformats.org/drawingml/2006/main">
+              <a:ext uri="{FF2B5EF4-FFF2-40B4-BE49-F238E27FC236}">
+                <a16:creationId xmlns:a16="http://schemas.microsoft.com/office/drawing/2014/main" id="{E45E5E1A-8BA9-43E5-BE57-29E273CEC615}"/>
+              </a:ext>
+            </a:extLst>
+          </p:cNvPr>
+          <p:cNvSpPr>
+            <a:spLocks xmlns:a="http://schemas.openxmlformats.org/drawingml/2006/main" noGrp="1"/>
+          </p:cNvSpPr>
+          <p:nvPr/>
+        </p:nvSpPr>
+        <p:spPr>
+          <a:xfrm xmlns:a="http://schemas.openxmlformats.org/drawingml/2006/main">
+            <a:off x="990600" y="2019300"/>
+            <a:ext cx="1905000" cy="323850"/>
+          </a:xfrm>
+          <a:prstGeom xmlns:a="http://schemas.openxmlformats.org/drawingml/2006/main" prst="rect">
+            <a:avLst/>
+          </a:prstGeom>
+          <a:noFill xmlns:a="http://schemas.openxmlformats.org/drawingml/2006/main"/>
+          <a:ln xmlns:a="http://schemas.openxmlformats.org/drawingml/2006/main" w="0">
+            <a:noFill/>
+            <a:prstDash val="solid"/>
+          </a:ln>
+        </p:spPr>
+        <p:txBody>
+          <a:bodyPr xmlns:a="http://schemas.openxmlformats.org/drawingml/2006/main"/>
+          <a:lstStyle xmlns:a="http://schemas.openxmlformats.org/drawingml/2006/main"/>
+          <a:p xmlns:a="http://schemas.openxmlformats.org/drawingml/2006/main">
+            <a:pPr>
+              <a:defRPr sz="1800" b="1">
+                <a:solidFill>
+                  <a:srgbClr val="0F766E"/>
+                </a:solidFill>
+              </a:defRPr>
+            </a:pPr>
+            <a:r>
+              <a:rPr sz="1800" b="1">
+                <a:solidFill>
+                  <a:srgbClr val="0F766E"/>
+                </a:solidFill>
+              </a:rPr>
+              <a:t>3.70</a:t>
+            </a:r>
+          </a:p>
+        </p:txBody>
+      </p:sp>
+      <p:sp>
+        <p:nvSpPr>
+          <p:cNvPr id="7" name="">
+            <a:extLst xmlns:a="http://schemas.openxmlformats.org/drawingml/2006/main">
+              <a:ext uri="{FF2B5EF4-FFF2-40B4-BE49-F238E27FC236}">
+                <a16:creationId xmlns:a16="http://schemas.microsoft.com/office/drawing/2014/main" id="{D230E40A-F727-4104-91B4-516167AE5EF9}"/>
+              </a:ext>
+            </a:extLst>
+          </p:cNvPr>
+          <p:cNvSpPr>
+            <a:spLocks xmlns:a="http://schemas.openxmlformats.org/drawingml/2006/main" noGrp="1"/>
+          </p:cNvSpPr>
+          <p:nvPr/>
+        </p:nvSpPr>
+        <p:spPr>
+          <a:xfrm xmlns:a="http://schemas.openxmlformats.org/drawingml/2006/main">
+            <a:off x="3429000" y="1619250"/>
+            <a:ext cx="2238375" cy="876300"/>
+          </a:xfrm>
+          <a:prstGeom xmlns:a="http://schemas.openxmlformats.org/drawingml/2006/main" prst="roundRect">
+            <a:avLst>
+              <a:gd name="adj" fmla="val 13043"/>
+            </a:avLst>
+          </a:prstGeom>
+          <a:solidFill xmlns:a="http://schemas.openxmlformats.org/drawingml/2006/main">
+            <a:srgbClr val="FFFFFF"/>
+          </a:solidFill>
+          <a:ln xmlns:a="http://schemas.openxmlformats.org/drawingml/2006/main" w="9525">
+            <a:solidFill>
+              <a:srgbClr val="E2E8F0"/>
+            </a:solidFill>
+            <a:prstDash val="solid"/>
+          </a:ln>
+        </p:spPr>
+      </p:sp>
+      <p:sp>
+        <p:nvSpPr>
+          <p:cNvPr id="8" name="">
+            <a:extLst xmlns:a="http://schemas.openxmlformats.org/drawingml/2006/main">
+              <a:ext uri="{FF2B5EF4-FFF2-40B4-BE49-F238E27FC236}">
+                <a16:creationId xmlns:a16="http://schemas.microsoft.com/office/drawing/2014/main" id="{4EAD2D4F-7247-4612-B128-A32AD76E545C}"/>
+              </a:ext>
+            </a:extLst>
+          </p:cNvPr>
+          <p:cNvSpPr>
+            <a:spLocks xmlns:a="http://schemas.openxmlformats.org/drawingml/2006/main" noGrp="1"/>
+          </p:cNvSpPr>
+          <p:nvPr/>
+        </p:nvSpPr>
+        <p:spPr>
+          <a:xfrm xmlns:a="http://schemas.openxmlformats.org/drawingml/2006/main">
+            <a:off x="3581400" y="1733550"/>
+            <a:ext cx="1905000" cy="228600"/>
+          </a:xfrm>
+          <a:prstGeom xmlns:a="http://schemas.openxmlformats.org/drawingml/2006/main" prst="rect">
+            <a:avLst/>
+          </a:prstGeom>
+          <a:noFill xmlns:a="http://schemas.openxmlformats.org/drawingml/2006/main"/>
+          <a:ln xmlns:a="http://schemas.openxmlformats.org/drawingml/2006/main" w="0">
+            <a:noFill/>
+            <a:prstDash val="solid"/>
+          </a:ln>
+        </p:spPr>
+        <p:txBody>
+          <a:bodyPr xmlns:a="http://schemas.openxmlformats.org/drawingml/2006/main"/>
+          <a:lstStyle xmlns:a="http://schemas.openxmlformats.org/drawingml/2006/main"/>
+          <a:p xmlns:a="http://schemas.openxmlformats.org/drawingml/2006/main">
+            <a:pPr>
+              <a:defRPr sz="900" b="1">
+                <a:solidFill>
+                  <a:srgbClr val="475569"/>
+                </a:solidFill>
+              </a:defRPr>
+            </a:pPr>
+            <a:r>
+              <a:rPr sz="900" b="1">
+                <a:solidFill>
+                  <a:srgbClr val="475569"/>
+                </a:solidFill>
+              </a:rPr>
+              <a:t>UMamba hard val L1</a:t>
+            </a:r>
+          </a:p>
+        </p:txBody>
+      </p:sp>
+      <p:sp>
+        <p:nvSpPr>
+          <p:cNvPr id="9" name="">
+            <a:extLst xmlns:a="http://schemas.openxmlformats.org/drawingml/2006/main">
+              <a:ext uri="{FF2B5EF4-FFF2-40B4-BE49-F238E27FC236}">
+                <a16:creationId xmlns:a16="http://schemas.microsoft.com/office/drawing/2014/main" id="{7C3A7BA1-48E5-476F-BB14-67918B5BA74B}"/>
+              </a:ext>
+            </a:extLst>
+          </p:cNvPr>
+          <p:cNvSpPr>
+            <a:spLocks xmlns:a="http://schemas.openxmlformats.org/drawingml/2006/main" noGrp="1"/>
+          </p:cNvSpPr>
+          <p:nvPr/>
+        </p:nvSpPr>
+        <p:spPr>
+          <a:xfrm xmlns:a="http://schemas.openxmlformats.org/drawingml/2006/main">
+            <a:off x="3581400" y="2019300"/>
+            <a:ext cx="1905000" cy="323850"/>
+          </a:xfrm>
+          <a:prstGeom xmlns:a="http://schemas.openxmlformats.org/drawingml/2006/main" prst="rect">
+            <a:avLst/>
+          </a:prstGeom>
+          <a:noFill xmlns:a="http://schemas.openxmlformats.org/drawingml/2006/main"/>
+          <a:ln xmlns:a="http://schemas.openxmlformats.org/drawingml/2006/main" w="0">
+            <a:noFill/>
+            <a:prstDash val="solid"/>
+          </a:ln>
+        </p:spPr>
+        <p:txBody>
+          <a:bodyPr xmlns:a="http://schemas.openxmlformats.org/drawingml/2006/main"/>
+          <a:lstStyle xmlns:a="http://schemas.openxmlformats.org/drawingml/2006/main"/>
+          <a:p xmlns:a="http://schemas.openxmlformats.org/drawingml/2006/main">
+            <a:pPr>
+              <a:defRPr sz="1800" b="1">
+                <a:solidFill>
+                  <a:srgbClr val="D97706"/>
+                </a:solidFill>
+              </a:defRPr>
+            </a:pPr>
+            <a:r>
+              <a:rPr sz="1800" b="1">
+                <a:solidFill>
+                  <a:srgbClr val="D97706"/>
+                </a:solidFill>
+              </a:rPr>
+              <a:t>6.13</a:t>
+            </a:r>
+          </a:p>
+        </p:txBody>
+      </p:sp>
+      <p:sp>
+        <p:nvSpPr>
+          <p:cNvPr id="10" name="">
+            <a:extLst xmlns:a="http://schemas.openxmlformats.org/drawingml/2006/main">
+              <a:ext uri="{FF2B5EF4-FFF2-40B4-BE49-F238E27FC236}">
+                <a16:creationId xmlns:a16="http://schemas.microsoft.com/office/drawing/2014/main" id="{82905453-E6D6-45DE-A58E-2E2BBA99BC03}"/>
+              </a:ext>
+            </a:extLst>
+          </p:cNvPr>
+          <p:cNvSpPr>
+            <a:spLocks xmlns:a="http://schemas.openxmlformats.org/drawingml/2006/main" noGrp="1"/>
+          </p:cNvSpPr>
+          <p:nvPr/>
+        </p:nvSpPr>
+        <p:spPr>
+          <a:xfrm xmlns:a="http://schemas.openxmlformats.org/drawingml/2006/main">
+            <a:off x="6019800" y="1619250"/>
+            <a:ext cx="2238375" cy="876300"/>
+          </a:xfrm>
+          <a:prstGeom xmlns:a="http://schemas.openxmlformats.org/drawingml/2006/main" prst="roundRect">
+            <a:avLst>
+              <a:gd name="adj" fmla="val 13043"/>
+            </a:avLst>
+          </a:prstGeom>
+          <a:solidFill xmlns:a="http://schemas.openxmlformats.org/drawingml/2006/main">
+            <a:srgbClr val="FFFFFF"/>
+          </a:solidFill>
+          <a:ln xmlns:a="http://schemas.openxmlformats.org/drawingml/2006/main" w="9525">
+            <a:solidFill>
+              <a:srgbClr val="E2E8F0"/>
+            </a:solidFill>
+            <a:prstDash val="solid"/>
+          </a:ln>
+        </p:spPr>
+      </p:sp>
+      <p:sp>
+        <p:nvSpPr>
+          <p:cNvPr id="11" name="">
+            <a:extLst xmlns:a="http://schemas.openxmlformats.org/drawingml/2006/main">
+              <a:ext uri="{FF2B5EF4-FFF2-40B4-BE49-F238E27FC236}">
+                <a16:creationId xmlns:a16="http://schemas.microsoft.com/office/drawing/2014/main" id="{24EFC371-23C5-4E56-B7F5-58537928C0E3}"/>
+              </a:ext>
+            </a:extLst>
+          </p:cNvPr>
+          <p:cNvSpPr>
+            <a:spLocks xmlns:a="http://schemas.openxmlformats.org/drawingml/2006/main" noGrp="1"/>
+          </p:cNvSpPr>
+          <p:nvPr/>
+        </p:nvSpPr>
+        <p:spPr>
+          <a:xfrm xmlns:a="http://schemas.openxmlformats.org/drawingml/2006/main">
+            <a:off x="6172200" y="1733550"/>
+            <a:ext cx="1905000" cy="228600"/>
+          </a:xfrm>
+          <a:prstGeom xmlns:a="http://schemas.openxmlformats.org/drawingml/2006/main" prst="rect">
+            <a:avLst/>
+          </a:prstGeom>
+          <a:noFill xmlns:a="http://schemas.openxmlformats.org/drawingml/2006/main"/>
+          <a:ln xmlns:a="http://schemas.openxmlformats.org/drawingml/2006/main" w="0">
+            <a:noFill/>
+            <a:prstDash val="solid"/>
+          </a:ln>
+        </p:spPr>
+        <p:txBody>
+          <a:bodyPr xmlns:a="http://schemas.openxmlformats.org/drawingml/2006/main"/>
+          <a:lstStyle xmlns:a="http://schemas.openxmlformats.org/drawingml/2006/main"/>
+          <a:p xmlns:a="http://schemas.openxmlformats.org/drawingml/2006/main">
+            <a:pPr>
+              <a:defRPr sz="900" b="1">
+                <a:solidFill>
+                  <a:srgbClr val="475569"/>
+                </a:solidFill>
+              </a:defRPr>
+            </a:pPr>
+            <a:r>
+              <a:rPr sz="900" b="1">
+                <a:solidFill>
+                  <a:srgbClr val="475569"/>
+                </a:solidFill>
+              </a:rPr>
+              <a:t>UMamba soft val L1</a:t>
+            </a:r>
+          </a:p>
+        </p:txBody>
+      </p:sp>
+      <p:sp>
+        <p:nvSpPr>
+          <p:cNvPr id="12" name="">
+            <a:extLst xmlns:a="http://schemas.openxmlformats.org/drawingml/2006/main">
+              <a:ext uri="{FF2B5EF4-FFF2-40B4-BE49-F238E27FC236}">
+                <a16:creationId xmlns:a16="http://schemas.microsoft.com/office/drawing/2014/main" id="{D59F3164-2F94-44D9-B38F-7B921C087D35}"/>
+              </a:ext>
+            </a:extLst>
+          </p:cNvPr>
+          <p:cNvSpPr>
+            <a:spLocks xmlns:a="http://schemas.openxmlformats.org/drawingml/2006/main" noGrp="1"/>
+          </p:cNvSpPr>
+          <p:nvPr/>
+        </p:nvSpPr>
+        <p:spPr>
+          <a:xfrm xmlns:a="http://schemas.openxmlformats.org/drawingml/2006/main">
+            <a:off x="6172200" y="2019300"/>
+            <a:ext cx="1905000" cy="323850"/>
+          </a:xfrm>
+          <a:prstGeom xmlns:a="http://schemas.openxmlformats.org/drawingml/2006/main" prst="rect">
+            <a:avLst/>
+          </a:prstGeom>
+          <a:noFill xmlns:a="http://schemas.openxmlformats.org/drawingml/2006/main"/>
+          <a:ln xmlns:a="http://schemas.openxmlformats.org/drawingml/2006/main" w="0">
+            <a:noFill/>
+            <a:prstDash val="solid"/>
+          </a:ln>
+        </p:spPr>
+        <p:txBody>
+          <a:bodyPr xmlns:a="http://schemas.openxmlformats.org/drawingml/2006/main"/>
+          <a:lstStyle xmlns:a="http://schemas.openxmlformats.org/drawingml/2006/main"/>
+          <a:p xmlns:a="http://schemas.openxmlformats.org/drawingml/2006/main">
+            <a:pPr>
+              <a:defRPr sz="1800" b="1">
+                <a:solidFill>
+                  <a:srgbClr val="B91C1C"/>
+                </a:solidFill>
+              </a:defRPr>
+            </a:pPr>
+            <a:r>
+              <a:rPr sz="1800" b="1">
+                <a:solidFill>
+                  <a:srgbClr val="B91C1C"/>
+                </a:solidFill>
+              </a:rPr>
+              <a:t>7.01</a:t>
+            </a:r>
+          </a:p>
+        </p:txBody>
+      </p:sp>
+      <p:sp>
+        <p:nvSpPr>
+          <p:cNvPr id="13" name="">
+            <a:extLst xmlns:a="http://schemas.openxmlformats.org/drawingml/2006/main">
+              <a:ext uri="{FF2B5EF4-FFF2-40B4-BE49-F238E27FC236}">
+                <a16:creationId xmlns:a16="http://schemas.microsoft.com/office/drawing/2014/main" id="{7DB5F33F-A0FF-447A-8496-B83CD4A8C8C4}"/>
+              </a:ext>
+            </a:extLst>
+          </p:cNvPr>
+          <p:cNvSpPr>
+            <a:spLocks xmlns:a="http://schemas.openxmlformats.org/drawingml/2006/main" noGrp="1"/>
+          </p:cNvSpPr>
+          <p:nvPr/>
+        </p:nvSpPr>
+        <p:spPr>
+          <a:xfrm xmlns:a="http://schemas.openxmlformats.org/drawingml/2006/main">
+            <a:off x="8610600" y="1619250"/>
+            <a:ext cx="2238375" cy="876300"/>
+          </a:xfrm>
+          <a:prstGeom xmlns:a="http://schemas.openxmlformats.org/drawingml/2006/main" prst="roundRect">
+            <a:avLst>
+              <a:gd name="adj" fmla="val 13043"/>
+            </a:avLst>
+          </a:prstGeom>
+          <a:solidFill xmlns:a="http://schemas.openxmlformats.org/drawingml/2006/main">
+            <a:srgbClr val="FFFFFF"/>
+          </a:solidFill>
+          <a:ln xmlns:a="http://schemas.openxmlformats.org/drawingml/2006/main" w="9525">
+            <a:solidFill>
+              <a:srgbClr val="E2E8F0"/>
+            </a:solidFill>
+            <a:prstDash val="solid"/>
+          </a:ln>
+        </p:spPr>
+      </p:sp>
+      <p:sp>
+        <p:nvSpPr>
+          <p:cNvPr id="14" name="">
+            <a:extLst xmlns:a="http://schemas.openxmlformats.org/drawingml/2006/main">
+              <a:ext uri="{FF2B5EF4-FFF2-40B4-BE49-F238E27FC236}">
+                <a16:creationId xmlns:a16="http://schemas.microsoft.com/office/drawing/2014/main" id="{06FF59EF-8017-43F2-BF3E-4C5B36EB6C49}"/>
+              </a:ext>
+            </a:extLst>
+          </p:cNvPr>
+          <p:cNvSpPr>
+            <a:spLocks xmlns:a="http://schemas.openxmlformats.org/drawingml/2006/main" noGrp="1"/>
+          </p:cNvSpPr>
+          <p:nvPr/>
+        </p:nvSpPr>
+        <p:spPr>
+          <a:xfrm xmlns:a="http://schemas.openxmlformats.org/drawingml/2006/main">
+            <a:off x="8763000" y="1733550"/>
+            <a:ext cx="1905000" cy="228600"/>
+          </a:xfrm>
+          <a:prstGeom xmlns:a="http://schemas.openxmlformats.org/drawingml/2006/main" prst="rect">
+            <a:avLst/>
+          </a:prstGeom>
+          <a:noFill xmlns:a="http://schemas.openxmlformats.org/drawingml/2006/main"/>
+          <a:ln xmlns:a="http://schemas.openxmlformats.org/drawingml/2006/main" w="0">
+            <a:noFill/>
+            <a:prstDash val="solid"/>
+          </a:ln>
+        </p:spPr>
+        <p:txBody>
+          <a:bodyPr xmlns:a="http://schemas.openxmlformats.org/drawingml/2006/main"/>
+          <a:lstStyle xmlns:a="http://schemas.openxmlformats.org/drawingml/2006/main"/>
+          <a:p xmlns:a="http://schemas.openxmlformats.org/drawingml/2006/main">
+            <a:pPr>
+              <a:defRPr sz="900" b="1">
+                <a:solidFill>
+                  <a:srgbClr val="475569"/>
+                </a:solidFill>
+              </a:defRPr>
+            </a:pPr>
+            <a:r>
+              <a:rPr sz="900" b="1">
+                <a:solidFill>
+                  <a:srgbClr val="475569"/>
+                </a:solidFill>
+              </a:rPr>
+              <a:t>Soft FT Pearson</a:t>
+            </a:r>
+          </a:p>
+        </p:txBody>
+      </p:sp>
+      <p:sp>
+        <p:nvSpPr>
+          <p:cNvPr id="15" name="">
+            <a:extLst xmlns:a="http://schemas.openxmlformats.org/drawingml/2006/main">
+              <a:ext uri="{FF2B5EF4-FFF2-40B4-BE49-F238E27FC236}">
+                <a16:creationId xmlns:a16="http://schemas.microsoft.com/office/drawing/2014/main" id="{0FC182D9-0348-474C-970F-A80EDB07A1A8}"/>
+              </a:ext>
+            </a:extLst>
+          </p:cNvPr>
+          <p:cNvSpPr>
+            <a:spLocks xmlns:a="http://schemas.openxmlformats.org/drawingml/2006/main" noGrp="1"/>
+          </p:cNvSpPr>
+          <p:nvPr/>
+        </p:nvSpPr>
+        <p:spPr>
+          <a:xfrm xmlns:a="http://schemas.openxmlformats.org/drawingml/2006/main">
+            <a:off x="8763000" y="2019300"/>
+            <a:ext cx="1905000" cy="323850"/>
+          </a:xfrm>
+          <a:prstGeom xmlns:a="http://schemas.openxmlformats.org/drawingml/2006/main" prst="rect">
+            <a:avLst/>
+          </a:prstGeom>
+          <a:noFill xmlns:a="http://schemas.openxmlformats.org/drawingml/2006/main"/>
+          <a:ln xmlns:a="http://schemas.openxmlformats.org/drawingml/2006/main" w="0">
+            <a:noFill/>
+            <a:prstDash val="solid"/>
+          </a:ln>
+        </p:spPr>
+        <p:txBody>
+          <a:bodyPr xmlns:a="http://schemas.openxmlformats.org/drawingml/2006/main"/>
+          <a:lstStyle xmlns:a="http://schemas.openxmlformats.org/drawingml/2006/main"/>
+          <a:p xmlns:a="http://schemas.openxmlformats.org/drawingml/2006/main">
+            <a:pPr>
+              <a:defRPr sz="1800" b="1">
+                <a:solidFill>
+                  <a:srgbClr val="2563EB"/>
+                </a:solidFill>
+              </a:defRPr>
+            </a:pPr>
+            <a:r>
+              <a:rPr sz="1800" b="1">
+                <a:solidFill>
+                  <a:srgbClr val="2563EB"/>
+                </a:solidFill>
+              </a:rPr>
+              <a:t>0.980</a:t>
+            </a:r>
+          </a:p>
+        </p:txBody>
+      </p:sp>
       <p:graphicFrame>
         <p:nvGraphicFramePr>
-          <p:cNvPr id="11" name=""/>
+          <p:cNvPr id="33" name=""/>
           <p:cNvGraphicFramePr/>
           <p:nvPr/>
         </p:nvGraphicFramePr>
         <p:xfrm>
-          <a:off xmlns:a="http://schemas.openxmlformats.org/drawingml/2006/main" x="8572500" y="1428750"/>
-          <a:ext xmlns:a="http://schemas.openxmlformats.org/drawingml/2006/main" cx="2714625" cy="2857500"/>
+          <a:off xmlns:a="http://schemas.openxmlformats.org/drawingml/2006/main" x="838200" y="3143250"/>
+          <a:ext xmlns:a="http://schemas.openxmlformats.org/drawingml/2006/main" cx="10287000" cy="2000250"/>
         </p:xfrm>
         <a:graphic xmlns:a="http://schemas.openxmlformats.org/drawingml/2006/main">
           <a:graphicData uri="http://schemas.openxmlformats.org/drawingml/2006/table">
             <a:tbl>
               <a:tblPr firstRow="1" bandRow="1"/>
               <a:tblGrid>
-                <a:gridCol w="1428750"/>
-                <a:gridCol w="1285875"/>
+                <a:gridCol w="2000250"/>
+                <a:gridCol w="2952750"/>
+                <a:gridCol w="5334000"/>
               </a:tblGrid>
-              <a:tr h="408214">
+              <a:tr h="500063">
                 <a:tc>
                   <a:txBody>
                     <a:bodyPr/>
@@ -4563,7 +7334,7 @@
                             <a:srgbClr val="FFFFFF"/>
                           </a:solidFill>
                         </a:rPr>
-                        <a:t>指标</a:t>
+                        <a:t>实验</a:t>
                       </a:r>
                     </a:p>
                   </a:txBody>
@@ -4584,7 +7355,7 @@
                             <a:srgbClr val="FFFFFF"/>
                           </a:solidFill>
                         </a:rPr>
-                        <a:t>soft/only-diff</a:t>
+                        <a:t>训练设置</a:t>
                       </a:r>
                     </a:p>
                   </a:txBody>
@@ -4594,217 +7365,181 @@
                     </a:solidFill>
                   </a:tcPr>
                 </a:tc>
+                <a:tc>
+                  <a:txBody>
+                    <a:bodyPr/>
+                    <a:lstStyle/>
+                    <a:p>
+                      <a:r>
+                        <a:rPr sz="900" b="1">
+                          <a:solidFill>
+                            <a:srgbClr val="FFFFFF"/>
+                          </a:solidFill>
+                        </a:rPr>
+                        <a:t>当前观察</a:t>
+                      </a:r>
+                    </a:p>
+                  </a:txBody>
+                  <a:tcPr marL="91440" marR="91440" marT="45720" marB="45720">
+                    <a:solidFill>
+                      <a:srgbClr val="0F172A"/>
+                    </a:solidFill>
+                  </a:tcPr>
+                </a:tc>
               </a:tr>
-              <a:tr h="408214">
-                <a:tc>
-                  <a:txBody>
-                    <a:bodyPr/>
-                    <a:lstStyle/>
-                    <a:p>
-                      <a:r>
-                        <a:rPr sz="900">
-                          <a:solidFill>
-                            <a:srgbClr val="0F172A"/>
-                          </a:solidFill>
-                        </a:rPr>
-                        <a:t>FT L1</a:t>
-                      </a:r>
-                    </a:p>
-                  </a:txBody>
-                  <a:tcPr marL="91440" marR="91440" marT="45720" marB="45720"/>
-                </a:tc>
-                <a:tc>
-                  <a:txBody>
-                    <a:bodyPr/>
-                    <a:lstStyle/>
-                    <a:p>
-                      <a:r>
-                        <a:rPr sz="900">
-                          <a:solidFill>
-                            <a:srgbClr val="0F172A"/>
-                          </a:solidFill>
-                        </a:rPr>
-                        <a:t>4.63</a:t>
+              <a:tr h="500063">
+                <a:tc>
+                  <a:txBody>
+                    <a:bodyPr/>
+                    <a:lstStyle/>
+                    <a:p>
+                      <a:r>
+                        <a:rPr sz="900">
+                          <a:solidFill>
+                            <a:srgbClr val="0F172A"/>
+                          </a:solidFill>
+                        </a:rPr>
+                        <a:t>AutoPhaseNN 复现</a:t>
+                      </a:r>
+                    </a:p>
+                  </a:txBody>
+                  <a:tcPr marL="91440" marR="91440" marT="45720" marB="45720"/>
+                </a:tc>
+                <a:tc>
+                  <a:txBody>
+                    <a:bodyPr/>
+                    <a:lstStyle/>
+                    <a:p>
+                      <a:r>
+                        <a:rPr sz="900">
+                          <a:solidFill>
+                            <a:srgbClr val="0F172A"/>
+                          </a:solidFill>
+                        </a:rPr>
+                        <a:t>full set / L1 / hard support</a:t>
+                      </a:r>
+                    </a:p>
+                  </a:txBody>
+                  <a:tcPr marL="91440" marR="91440" marT="45720" marB="45720"/>
+                </a:tc>
+                <a:tc>
+                  <a:txBody>
+                    <a:bodyPr/>
+                    <a:lstStyle/>
+                    <a:p>
+                      <a:r>
+                        <a:rPr sz="900">
+                          <a:solidFill>
+                            <a:srgbClr val="0F172A"/>
+                          </a:solidFill>
+                        </a:rPr>
+                        <a:t>可视化中 amp、phase、support 基本在中心目标区域</a:t>
                       </a:r>
                     </a:p>
                   </a:txBody>
                   <a:tcPr marL="91440" marR="91440" marT="45720" marB="45720"/>
                 </a:tc>
               </a:tr>
-              <a:tr h="408214">
-                <a:tc>
-                  <a:txBody>
-                    <a:bodyPr/>
-                    <a:lstStyle/>
-                    <a:p>
-                      <a:r>
-                        <a:rPr sz="900">
-                          <a:solidFill>
-                            <a:srgbClr val="0F172A"/>
-                          </a:solidFill>
-                        </a:rPr>
-                        <a:t>Rel L1</a:t>
-                      </a:r>
-                    </a:p>
-                  </a:txBody>
-                  <a:tcPr marL="91440" marR="91440" marT="45720" marB="45720"/>
-                </a:tc>
-                <a:tc>
-                  <a:txBody>
-                    <a:bodyPr/>
-                    <a:lstStyle/>
-                    <a:p>
-                      <a:r>
-                        <a:rPr sz="900">
-                          <a:solidFill>
-                            <a:srgbClr val="0F172A"/>
-                          </a:solidFill>
-                        </a:rPr>
-                        <a:t>0.394</a:t>
+              <a:tr h="500063">
+                <a:tc>
+                  <a:txBody>
+                    <a:bodyPr/>
+                    <a:lstStyle/>
+                    <a:p>
+                      <a:r>
+                        <a:rPr sz="900">
+                          <a:solidFill>
+                            <a:srgbClr val="0F172A"/>
+                          </a:solidFill>
+                        </a:rPr>
+                        <a:t>UMamba 原始硬阈值</a:t>
+                      </a:r>
+                    </a:p>
+                  </a:txBody>
+                  <a:tcPr marL="91440" marR="91440" marT="45720" marB="45720"/>
+                </a:tc>
+                <a:tc>
+                  <a:txBody>
+                    <a:bodyPr/>
+                    <a:lstStyle/>
+                    <a:p>
+                      <a:r>
+                        <a:rPr sz="900">
+                          <a:solidFill>
+                            <a:srgbClr val="0F172A"/>
+                          </a:solidFill>
+                        </a:rPr>
+                        <a:t>100 samples / 400 epoch / L1</a:t>
+                      </a:r>
+                    </a:p>
+                  </a:txBody>
+                  <a:tcPr marL="91440" marR="91440" marT="45720" marB="45720"/>
+                </a:tc>
+                <a:tc>
+                  <a:txBody>
+                    <a:bodyPr/>
+                    <a:lstStyle/>
+                    <a:p>
+                      <a:r>
+                        <a:rPr sz="900">
+                          <a:solidFill>
+                            <a:srgbClr val="0F172A"/>
+                          </a:solidFill>
+                        </a:rPr>
+                        <a:t>loss 可下降，但实空间 support/phase 指标很差</a:t>
                       </a:r>
                     </a:p>
                   </a:txBody>
                   <a:tcPr marL="91440" marR="91440" marT="45720" marB="45720"/>
                 </a:tc>
               </a:tr>
-              <a:tr h="408214">
-                <a:tc>
-                  <a:txBody>
-                    <a:bodyPr/>
-                    <a:lstStyle/>
-                    <a:p>
-                      <a:r>
-                        <a:rPr sz="900">
-                          <a:solidFill>
-                            <a:srgbClr val="0F172A"/>
-                          </a:solidFill>
-                        </a:rPr>
-                        <a:t>Pearson</a:t>
-                      </a:r>
-                    </a:p>
-                  </a:txBody>
-                  <a:tcPr marL="91440" marR="91440" marT="45720" marB="45720"/>
-                </a:tc>
-                <a:tc>
-                  <a:txBody>
-                    <a:bodyPr/>
-                    <a:lstStyle/>
-                    <a:p>
-                      <a:r>
-                        <a:rPr sz="900">
-                          <a:solidFill>
-                            <a:srgbClr val="0F172A"/>
-                          </a:solidFill>
-                        </a:rPr>
-                        <a:t>0.980</a:t>
-                      </a:r>
-                    </a:p>
-                  </a:txBody>
-                  <a:tcPr marL="91440" marR="91440" marT="45720" marB="45720"/>
-                </a:tc>
-              </a:tr>
-              <a:tr h="408214">
-                <a:tc>
-                  <a:txBody>
-                    <a:bodyPr/>
-                    <a:lstStyle/>
-                    <a:p>
-                      <a:r>
-                        <a:rPr sz="900">
-                          <a:solidFill>
-                            <a:srgbClr val="0F172A"/>
-                          </a:solidFill>
-                        </a:rPr>
-                        <a:t>Amp L1</a:t>
-                      </a:r>
-                    </a:p>
-                  </a:txBody>
-                  <a:tcPr marL="91440" marR="91440" marT="45720" marB="45720"/>
-                </a:tc>
-                <a:tc>
-                  <a:txBody>
-                    <a:bodyPr/>
-                    <a:lstStyle/>
-                    <a:p>
-                      <a:r>
-                        <a:rPr sz="900">
-                          <a:solidFill>
-                            <a:srgbClr val="0F172A"/>
-                          </a:solidFill>
-                        </a:rPr>
-                        <a:t>0.0484</a:t>
-                      </a:r>
-                    </a:p>
-                  </a:txBody>
-                  <a:tcPr marL="91440" marR="91440" marT="45720" marB="45720"/>
-                </a:tc>
-              </a:tr>
-              <a:tr h="408214">
-                <a:tc>
-                  <a:txBody>
-                    <a:bodyPr/>
-                    <a:lstStyle/>
-                    <a:p>
-                      <a:r>
-                        <a:rPr sz="900">
-                          <a:solidFill>
-                            <a:srgbClr val="0F172A"/>
-                          </a:solidFill>
-                        </a:rPr>
-                        <a:t>Support Dice</a:t>
-                      </a:r>
-                    </a:p>
-                  </a:txBody>
-                  <a:tcPr marL="91440" marR="91440" marT="45720" marB="45720"/>
-                </a:tc>
-                <a:tc>
-                  <a:txBody>
-                    <a:bodyPr/>
-                    <a:lstStyle/>
-                    <a:p>
-                      <a:r>
-                        <a:rPr sz="900">
-                          <a:solidFill>
-                            <a:srgbClr val="0F172A"/>
-                          </a:solidFill>
-                        </a:rPr>
-                        <a:t>0.205</a:t>
-                      </a:r>
-                    </a:p>
-                  </a:txBody>
-                  <a:tcPr marL="91440" marR="91440" marT="45720" marB="45720"/>
-                </a:tc>
-              </a:tr>
-              <a:tr h="408214">
-                <a:tc>
-                  <a:txBody>
-                    <a:bodyPr/>
-                    <a:lstStyle/>
-                    <a:p>
-                      <a:r>
-                        <a:rPr sz="900">
-                          <a:solidFill>
-                            <a:srgbClr val="0F172A"/>
-                          </a:solidFill>
-                        </a:rPr>
-                        <a:t>Phase MAE</a:t>
-                      </a:r>
-                    </a:p>
-                  </a:txBody>
-                  <a:tcPr marL="91440" marR="91440" marT="45720" marB="45720"/>
-                </a:tc>
-                <a:tc>
-                  <a:txBody>
-                    <a:bodyPr/>
-                    <a:lstStyle/>
-                    <a:p>
-                      <a:r>
-                        <a:rPr sz="900">
-                          <a:solidFill>
-                            <a:srgbClr val="0F172A"/>
-                          </a:solidFill>
-                        </a:rPr>
-                        <a:t>1.037</a:t>
+              <a:tr h="500063">
+                <a:tc>
+                  <a:txBody>
+                    <a:bodyPr/>
+                    <a:lstStyle/>
+                    <a:p>
+                      <a:r>
+                        <a:rPr sz="900">
+                          <a:solidFill>
+                            <a:srgbClr val="0F172A"/>
+                          </a:solidFill>
+                        </a:rPr>
+                        <a:t>UMamba 软阈值</a:t>
+                      </a:r>
+                    </a:p>
+                  </a:txBody>
+                  <a:tcPr marL="91440" marR="91440" marT="45720" marB="45720"/>
+                </a:tc>
+                <a:tc>
+                  <a:txBody>
+                    <a:bodyPr/>
+                    <a:lstStyle/>
+                    <a:p>
+                      <a:r>
+                        <a:rPr sz="900">
+                          <a:solidFill>
+                            <a:srgbClr val="0F172A"/>
+                          </a:solidFill>
+                        </a:rPr>
+                        <a:t>soft support / only-diff 指标</a:t>
+                      </a:r>
+                    </a:p>
+                  </a:txBody>
+                  <a:tcPr marL="91440" marR="91440" marT="45720" marB="45720"/>
+                </a:tc>
+                <a:tc>
+                  <a:txBody>
+                    <a:bodyPr/>
+                    <a:lstStyle/>
+                    <a:p>
+                      <a:r>
+                        <a:rPr sz="900">
+                          <a:solidFill>
+                            <a:srgbClr val="0F172A"/>
+                          </a:solidFill>
+                        </a:rPr>
+                        <a:t>FT 指标可以较好，但实空间图仍需补充独立可视化</a:t>
                       </a:r>
                     </a:p>
                   </a:txBody>
@@ -4817,10 +7552,10 @@
       </p:graphicFrame>
       <p:sp>
         <p:nvSpPr>
-          <p:cNvPr id="6" name="">
+          <p:cNvPr id="17" name="">
             <a:extLst xmlns:a="http://schemas.openxmlformats.org/drawingml/2006/main">
               <a:ext uri="{FF2B5EF4-FFF2-40B4-BE49-F238E27FC236}">
-                <a16:creationId xmlns:a16="http://schemas.microsoft.com/office/drawing/2014/main" id="{69075C66-F0A2-4950-87CC-6C0E9C50C0C7}"/>
+                <a16:creationId xmlns:a16="http://schemas.microsoft.com/office/drawing/2014/main" id="{20CCCDA9-9999-4FDD-A49A-A7CD4D071A6D}"/>
               </a:ext>
             </a:extLst>
           </p:cNvPr>
@@ -4831,8 +7566,8 @@
         </p:nvSpPr>
         <p:spPr>
           <a:xfrm xmlns:a="http://schemas.openxmlformats.org/drawingml/2006/main">
-            <a:off x="8572500" y="4648200"/>
-            <a:ext cx="2714625" cy="609600"/>
+            <a:off x="857250" y="5619750"/>
+            <a:ext cx="10096500" cy="419100"/>
           </a:xfrm>
           <a:prstGeom xmlns:a="http://schemas.openxmlformats.org/drawingml/2006/main" prst="rect">
             <a:avLst/>
@@ -4848,19 +7583,19 @@
           <a:lstStyle xmlns:a="http://schemas.openxmlformats.org/drawingml/2006/main"/>
           <a:p xmlns:a="http://schemas.openxmlformats.org/drawingml/2006/main">
             <a:pPr>
-              <a:defRPr sz="1350" b="1">
-                <a:solidFill>
-                  <a:srgbClr val="B91C1C"/>
+              <a:defRPr sz="1125">
+                <a:solidFill>
+                  <a:srgbClr val="475569"/>
                 </a:solidFill>
               </a:defRPr>
             </a:pPr>
             <a:r>
-              <a:rPr sz="1350" b="1">
-                <a:solidFill>
-                  <a:srgbClr val="B91C1C"/>
+              <a:rPr sz="1125">
+                <a:solidFill>
+                  <a:srgbClr val="475569"/>
                 </a:solidFill>
               </a:rPr>
-              <a:t>虽然 FT 指标可以较好，但图中 amp/support 仍出现环状或错位结构。</a:t>
+              <a:t>图像说明：本版 PPT 不裁剪图片，直接放完整结果图；当前仓库缺少一张非空的 UMamba hard/soft 独立可视化图，已在对应页留位。</a:t>
             </a:r>
           </a:p>
         </p:txBody>
@@ -4868,7 +7603,7 @@
     </p:spTree>
     <p:extLst>
       <p:ext uri="{BB962C8B-B14F-4D97-AF65-F5344CB8AC3E}">
-        <p14:creationId xmlns:p14="http://schemas.microsoft.com/office/powerpoint/2010/main" val="200025379"/>
+        <p14:creationId xmlns:p14="http://schemas.microsoft.com/office/powerpoint/2010/main" val="879870755"/>
       </p:ext>
     </p:extLst>
   </p:cSld>
@@ -4899,7 +7634,7 @@
           <p:cNvPr id="1" name="">
             <a:extLst xmlns:a="http://schemas.openxmlformats.org/drawingml/2006/main">
               <a:ext uri="{FF2B5EF4-FFF2-40B4-BE49-F238E27FC236}">
-                <a16:creationId xmlns:a16="http://schemas.microsoft.com/office/drawing/2014/main" id="{0E0C1541-D840-47A1-A67E-59F9CF3F4310}"/>
+                <a16:creationId xmlns:a16="http://schemas.microsoft.com/office/drawing/2014/main" id="{3EB1BDA4-960A-4BA7-A45D-DF5EDD6DD8F2}"/>
               </a:ext>
             </a:extLst>
           </p:cNvPr>
@@ -4939,7 +7674,7 @@
                   <a:srgbClr val="0F172A"/>
                 </a:solidFill>
               </a:rPr>
-              <a:t>主要指标对比</a:t>
+              <a:t>训练损失下降曲线</a:t>
             </a:r>
           </a:p>
         </p:txBody>
@@ -4949,7 +7684,7 @@
           <p:cNvPr id="2" name="">
             <a:extLst xmlns:a="http://schemas.openxmlformats.org/drawingml/2006/main">
               <a:ext uri="{FF2B5EF4-FFF2-40B4-BE49-F238E27FC236}">
-                <a16:creationId xmlns:a16="http://schemas.microsoft.com/office/drawing/2014/main" id="{4DCBEEAC-52D5-473B-87CD-31C111F6FE17}"/>
+                <a16:creationId xmlns:a16="http://schemas.microsoft.com/office/drawing/2014/main" id="{B783973D-BE7D-4B27-ACD6-7D2F4E994DB4}"/>
               </a:ext>
             </a:extLst>
           </p:cNvPr>
@@ -4961,7 +7696,7 @@
         <p:spPr>
           <a:xfrm xmlns:a="http://schemas.openxmlformats.org/drawingml/2006/main">
             <a:off x="476250" y="742950"/>
-            <a:ext cx="9334500" cy="266700"/>
+            <a:ext cx="10096500" cy="266700"/>
           </a:xfrm>
           <a:prstGeom xmlns:a="http://schemas.openxmlformats.org/drawingml/2006/main" prst="rect">
             <a:avLst/>
@@ -4989,7 +7724,7 @@
                   <a:srgbClr val="475569"/>
                 </a:solidFill>
               </a:rPr>
-              <a:t>重点看 FT 指标和实空间指标是否一致</a:t>
+              <a:t>同图展示 AutoPhaseNN、UMamba hard、UMamba soft/support run 的 loss 变化</a:t>
             </a:r>
           </a:p>
         </p:txBody>
@@ -4999,7 +7734,7 @@
           <p:cNvPr id="3" name="">
             <a:extLst xmlns:a="http://schemas.openxmlformats.org/drawingml/2006/main">
               <a:ext uri="{FF2B5EF4-FFF2-40B4-BE49-F238E27FC236}">
-                <a16:creationId xmlns:a16="http://schemas.microsoft.com/office/drawing/2014/main" id="{AE417528-BABD-40CE-B2C0-0A5AC00242EF}"/>
+                <a16:creationId xmlns:a16="http://schemas.microsoft.com/office/drawing/2014/main" id="{D09E831E-6B5F-4556-8BF6-FAA4B7DEAECC}"/>
               </a:ext>
             </a:extLst>
           </p:cNvPr>
@@ -5029,531 +7764,17 @@
       </p:sp>
       <p:graphicFrame>
         <p:nvGraphicFramePr>
-          <p:cNvPr id="9" name=""/>
+          <p:cNvPr id="9" name="Chart"/>
           <p:cNvGraphicFramePr/>
           <p:nvPr/>
         </p:nvGraphicFramePr>
         <p:xfrm>
-          <a:off xmlns:a="http://schemas.openxmlformats.org/drawingml/2006/main" x="1047750" y="1428750"/>
-          <a:ext xmlns:a="http://schemas.openxmlformats.org/drawingml/2006/main" cx="9525000" cy="3429000"/>
+          <a:off xmlns:a="http://schemas.openxmlformats.org/drawingml/2006/main" x="685800" y="1381125"/>
+          <a:ext xmlns:a="http://schemas.openxmlformats.org/drawingml/2006/main" cx="10763250" cy="4191000"/>
         </p:xfrm>
         <a:graphic xmlns:a="http://schemas.openxmlformats.org/drawingml/2006/main">
-          <a:graphicData uri="http://schemas.openxmlformats.org/drawingml/2006/table">
-            <a:tbl>
-              <a:tblPr firstRow="1" bandRow="1"/>
-              <a:tblGrid>
-                <a:gridCol w="2000250"/>
-                <a:gridCol w="2476500"/>
-                <a:gridCol w="2476500"/>
-                <a:gridCol w="2571750"/>
-              </a:tblGrid>
-              <a:tr h="489857">
-                <a:tc>
-                  <a:txBody>
-                    <a:bodyPr/>
-                    <a:lstStyle/>
-                    <a:p>
-                      <a:r>
-                        <a:rPr sz="900" b="1">
-                          <a:solidFill>
-                            <a:srgbClr val="FFFFFF"/>
-                          </a:solidFill>
-                        </a:rPr>
-                        <a:t>指标</a:t>
-                      </a:r>
-                    </a:p>
-                  </a:txBody>
-                  <a:tcPr marL="91440" marR="91440" marT="45720" marB="45720">
-                    <a:solidFill>
-                      <a:srgbClr val="0F172A"/>
-                    </a:solidFill>
-                  </a:tcPr>
-                </a:tc>
-                <a:tc>
-                  <a:txBody>
-                    <a:bodyPr/>
-                    <a:lstStyle/>
-                    <a:p>
-                      <a:r>
-                        <a:rPr sz="900" b="1">
-                          <a:solidFill>
-                            <a:srgbClr val="FFFFFF"/>
-                          </a:solidFill>
-                        </a:rPr>
-                        <a:t>AutoPhaseNN</a:t>
-                      </a:r>
-                    </a:p>
-                  </a:txBody>
-                  <a:tcPr marL="91440" marR="91440" marT="45720" marB="45720">
-                    <a:solidFill>
-                      <a:srgbClr val="0F172A"/>
-                    </a:solidFill>
-                  </a:tcPr>
-                </a:tc>
-                <a:tc>
-                  <a:txBody>
-                    <a:bodyPr/>
-                    <a:lstStyle/>
-                    <a:p>
-                      <a:r>
-                        <a:rPr sz="900" b="1">
-                          <a:solidFill>
-                            <a:srgbClr val="FFFFFF"/>
-                          </a:solidFill>
-                        </a:rPr>
-                        <a:t>UMamba hard</a:t>
-                      </a:r>
-                    </a:p>
-                  </a:txBody>
-                  <a:tcPr marL="91440" marR="91440" marT="45720" marB="45720">
-                    <a:solidFill>
-                      <a:srgbClr val="0F172A"/>
-                    </a:solidFill>
-                  </a:tcPr>
-                </a:tc>
-                <a:tc>
-                  <a:txBody>
-                    <a:bodyPr/>
-                    <a:lstStyle/>
-                    <a:p>
-                      <a:r>
-                        <a:rPr sz="900" b="1">
-                          <a:solidFill>
-                            <a:srgbClr val="FFFFFF"/>
-                          </a:solidFill>
-                        </a:rPr>
-                        <a:t>UMamba soft/only-diff</a:t>
-                      </a:r>
-                    </a:p>
-                  </a:txBody>
-                  <a:tcPr marL="91440" marR="91440" marT="45720" marB="45720">
-                    <a:solidFill>
-                      <a:srgbClr val="0F172A"/>
-                    </a:solidFill>
-                  </a:tcPr>
-                </a:tc>
-              </a:tr>
-              <a:tr h="489857">
-                <a:tc>
-                  <a:txBody>
-                    <a:bodyPr/>
-                    <a:lstStyle/>
-                    <a:p>
-                      <a:r>
-                        <a:rPr sz="900">
-                          <a:solidFill>
-                            <a:srgbClr val="0F172A"/>
-                          </a:solidFill>
-                        </a:rPr>
-                        <a:t>FT L1 ↓</a:t>
-                      </a:r>
-                    </a:p>
-                  </a:txBody>
-                  <a:tcPr marL="91440" marR="91440" marT="45720" marB="45720"/>
-                </a:tc>
-                <a:tc>
-                  <a:txBody>
-                    <a:bodyPr/>
-                    <a:lstStyle/>
-                    <a:p>
-                      <a:r>
-                        <a:rPr sz="900">
-                          <a:solidFill>
-                            <a:srgbClr val="0F172A"/>
-                          </a:solidFill>
-                        </a:rPr>
-                        <a:t>5.09</a:t>
-                      </a:r>
-                    </a:p>
-                  </a:txBody>
-                  <a:tcPr marL="91440" marR="91440" marT="45720" marB="45720"/>
-                </a:tc>
-                <a:tc>
-                  <a:txBody>
-                    <a:bodyPr/>
-                    <a:lstStyle/>
-                    <a:p>
-                      <a:r>
-                        <a:rPr sz="900">
-                          <a:solidFill>
-                            <a:srgbClr val="0F172A"/>
-                          </a:solidFill>
-                        </a:rPr>
-                        <a:t>6.10</a:t>
-                      </a:r>
-                    </a:p>
-                  </a:txBody>
-                  <a:tcPr marL="91440" marR="91440" marT="45720" marB="45720"/>
-                </a:tc>
-                <a:tc>
-                  <a:txBody>
-                    <a:bodyPr/>
-                    <a:lstStyle/>
-                    <a:p>
-                      <a:r>
-                        <a:rPr sz="900">
-                          <a:solidFill>
-                            <a:srgbClr val="0F172A"/>
-                          </a:solidFill>
-                        </a:rPr>
-                        <a:t>4.63</a:t>
-                      </a:r>
-                    </a:p>
-                  </a:txBody>
-                  <a:tcPr marL="91440" marR="91440" marT="45720" marB="45720"/>
-                </a:tc>
-              </a:tr>
-              <a:tr h="489857">
-                <a:tc>
-                  <a:txBody>
-                    <a:bodyPr/>
-                    <a:lstStyle/>
-                    <a:p>
-                      <a:r>
-                        <a:rPr sz="900">
-                          <a:solidFill>
-                            <a:srgbClr val="0F172A"/>
-                          </a:solidFill>
-                        </a:rPr>
-                        <a:t>Rel L1 ↓</a:t>
-                      </a:r>
-                    </a:p>
-                  </a:txBody>
-                  <a:tcPr marL="91440" marR="91440" marT="45720" marB="45720"/>
-                </a:tc>
-                <a:tc>
-                  <a:txBody>
-                    <a:bodyPr/>
-                    <a:lstStyle/>
-                    <a:p>
-                      <a:r>
-                        <a:rPr sz="900">
-                          <a:solidFill>
-                            <a:srgbClr val="0F172A"/>
-                          </a:solidFill>
-                        </a:rPr>
-                        <a:t>0.429</a:t>
-                      </a:r>
-                    </a:p>
-                  </a:txBody>
-                  <a:tcPr marL="91440" marR="91440" marT="45720" marB="45720"/>
-                </a:tc>
-                <a:tc>
-                  <a:txBody>
-                    <a:bodyPr/>
-                    <a:lstStyle/>
-                    <a:p>
-                      <a:r>
-                        <a:rPr sz="900">
-                          <a:solidFill>
-                            <a:srgbClr val="0F172A"/>
-                          </a:solidFill>
-                        </a:rPr>
-                        <a:t>0.523</a:t>
-                      </a:r>
-                    </a:p>
-                  </a:txBody>
-                  <a:tcPr marL="91440" marR="91440" marT="45720" marB="45720"/>
-                </a:tc>
-                <a:tc>
-                  <a:txBody>
-                    <a:bodyPr/>
-                    <a:lstStyle/>
-                    <a:p>
-                      <a:r>
-                        <a:rPr sz="900">
-                          <a:solidFill>
-                            <a:srgbClr val="0F172A"/>
-                          </a:solidFill>
-                        </a:rPr>
-                        <a:t>0.394</a:t>
-                      </a:r>
-                    </a:p>
-                  </a:txBody>
-                  <a:tcPr marL="91440" marR="91440" marT="45720" marB="45720"/>
-                </a:tc>
-              </a:tr>
-              <a:tr h="489857">
-                <a:tc>
-                  <a:txBody>
-                    <a:bodyPr/>
-                    <a:lstStyle/>
-                    <a:p>
-                      <a:r>
-                        <a:rPr sz="900">
-                          <a:solidFill>
-                            <a:srgbClr val="0F172A"/>
-                          </a:solidFill>
-                        </a:rPr>
-                        <a:t>Pearson ↑</a:t>
-                      </a:r>
-                    </a:p>
-                  </a:txBody>
-                  <a:tcPr marL="91440" marR="91440" marT="45720" marB="45720"/>
-                </a:tc>
-                <a:tc>
-                  <a:txBody>
-                    <a:bodyPr/>
-                    <a:lstStyle/>
-                    <a:p>
-                      <a:r>
-                        <a:rPr sz="900">
-                          <a:solidFill>
-                            <a:srgbClr val="0F172A"/>
-                          </a:solidFill>
-                        </a:rPr>
-                        <a:t>0.923</a:t>
-                      </a:r>
-                    </a:p>
-                  </a:txBody>
-                  <a:tcPr marL="91440" marR="91440" marT="45720" marB="45720"/>
-                </a:tc>
-                <a:tc>
-                  <a:txBody>
-                    <a:bodyPr/>
-                    <a:lstStyle/>
-                    <a:p>
-                      <a:r>
-                        <a:rPr sz="900">
-                          <a:solidFill>
-                            <a:srgbClr val="0F172A"/>
-                          </a:solidFill>
-                        </a:rPr>
-                        <a:t>0.822</a:t>
-                      </a:r>
-                    </a:p>
-                  </a:txBody>
-                  <a:tcPr marL="91440" marR="91440" marT="45720" marB="45720"/>
-                </a:tc>
-                <a:tc>
-                  <a:txBody>
-                    <a:bodyPr/>
-                    <a:lstStyle/>
-                    <a:p>
-                      <a:r>
-                        <a:rPr sz="900">
-                          <a:solidFill>
-                            <a:srgbClr val="0F172A"/>
-                          </a:solidFill>
-                        </a:rPr>
-                        <a:t>0.980</a:t>
-                      </a:r>
-                    </a:p>
-                  </a:txBody>
-                  <a:tcPr marL="91440" marR="91440" marT="45720" marB="45720"/>
-                </a:tc>
-              </a:tr>
-              <a:tr h="489857">
-                <a:tc>
-                  <a:txBody>
-                    <a:bodyPr/>
-                    <a:lstStyle/>
-                    <a:p>
-                      <a:r>
-                        <a:rPr sz="900">
-                          <a:solidFill>
-                            <a:srgbClr val="0F172A"/>
-                          </a:solidFill>
-                        </a:rPr>
-                        <a:t>Amp L1 ↓</a:t>
-                      </a:r>
-                    </a:p>
-                  </a:txBody>
-                  <a:tcPr marL="91440" marR="91440" marT="45720" marB="45720"/>
-                </a:tc>
-                <a:tc>
-                  <a:txBody>
-                    <a:bodyPr/>
-                    <a:lstStyle/>
-                    <a:p>
-                      <a:r>
-                        <a:rPr sz="900">
-                          <a:solidFill>
-                            <a:srgbClr val="0F172A"/>
-                          </a:solidFill>
-                        </a:rPr>
-                        <a:t>0.0199</a:t>
-                      </a:r>
-                    </a:p>
-                  </a:txBody>
-                  <a:tcPr marL="91440" marR="91440" marT="45720" marB="45720"/>
-                </a:tc>
-                <a:tc>
-                  <a:txBody>
-                    <a:bodyPr/>
-                    <a:lstStyle/>
-                    <a:p>
-                      <a:r>
-                        <a:rPr sz="900">
-                          <a:solidFill>
-                            <a:srgbClr val="0F172A"/>
-                          </a:solidFill>
-                        </a:rPr>
-                        <a:t>0.0255</a:t>
-                      </a:r>
-                    </a:p>
-                  </a:txBody>
-                  <a:tcPr marL="91440" marR="91440" marT="45720" marB="45720"/>
-                </a:tc>
-                <a:tc>
-                  <a:txBody>
-                    <a:bodyPr/>
-                    <a:lstStyle/>
-                    <a:p>
-                      <a:r>
-                        <a:rPr sz="900">
-                          <a:solidFill>
-                            <a:srgbClr val="0F172A"/>
-                          </a:solidFill>
-                        </a:rPr>
-                        <a:t>0.0484</a:t>
-                      </a:r>
-                    </a:p>
-                  </a:txBody>
-                  <a:tcPr marL="91440" marR="91440" marT="45720" marB="45720"/>
-                </a:tc>
-              </a:tr>
-              <a:tr h="489857">
-                <a:tc>
-                  <a:txBody>
-                    <a:bodyPr/>
-                    <a:lstStyle/>
-                    <a:p>
-                      <a:r>
-                        <a:rPr sz="900">
-                          <a:solidFill>
-                            <a:srgbClr val="0F172A"/>
-                          </a:solidFill>
-                        </a:rPr>
-                        <a:t>Support Dice ↑</a:t>
-                      </a:r>
-                    </a:p>
-                  </a:txBody>
-                  <a:tcPr marL="91440" marR="91440" marT="45720" marB="45720"/>
-                </a:tc>
-                <a:tc>
-                  <a:txBody>
-                    <a:bodyPr/>
-                    <a:lstStyle/>
-                    <a:p>
-                      <a:r>
-                        <a:rPr sz="900">
-                          <a:solidFill>
-                            <a:srgbClr val="0F172A"/>
-                          </a:solidFill>
-                        </a:rPr>
-                        <a:t>0.330</a:t>
-                      </a:r>
-                    </a:p>
-                  </a:txBody>
-                  <a:tcPr marL="91440" marR="91440" marT="45720" marB="45720"/>
-                </a:tc>
-                <a:tc>
-                  <a:txBody>
-                    <a:bodyPr/>
-                    <a:lstStyle/>
-                    <a:p>
-                      <a:r>
-                        <a:rPr sz="900">
-                          <a:solidFill>
-                            <a:srgbClr val="0F172A"/>
-                          </a:solidFill>
-                        </a:rPr>
-                        <a:t>0.012</a:t>
-                      </a:r>
-                    </a:p>
-                  </a:txBody>
-                  <a:tcPr marL="91440" marR="91440" marT="45720" marB="45720"/>
-                </a:tc>
-                <a:tc>
-                  <a:txBody>
-                    <a:bodyPr/>
-                    <a:lstStyle/>
-                    <a:p>
-                      <a:r>
-                        <a:rPr sz="900">
-                          <a:solidFill>
-                            <a:srgbClr val="0F172A"/>
-                          </a:solidFill>
-                        </a:rPr>
-                        <a:t>0.205</a:t>
-                      </a:r>
-                    </a:p>
-                  </a:txBody>
-                  <a:tcPr marL="91440" marR="91440" marT="45720" marB="45720"/>
-                </a:tc>
-              </a:tr>
-              <a:tr h="489857">
-                <a:tc>
-                  <a:txBody>
-                    <a:bodyPr/>
-                    <a:lstStyle/>
-                    <a:p>
-                      <a:r>
-                        <a:rPr sz="900">
-                          <a:solidFill>
-                            <a:srgbClr val="0F172A"/>
-                          </a:solidFill>
-                        </a:rPr>
-                        <a:t>Phase MAE ↓</a:t>
-                      </a:r>
-                    </a:p>
-                  </a:txBody>
-                  <a:tcPr marL="91440" marR="91440" marT="45720" marB="45720"/>
-                </a:tc>
-                <a:tc>
-                  <a:txBody>
-                    <a:bodyPr/>
-                    <a:lstStyle/>
-                    <a:p>
-                      <a:r>
-                        <a:rPr sz="900">
-                          <a:solidFill>
-                            <a:srgbClr val="0F172A"/>
-                          </a:solidFill>
-                        </a:rPr>
-                        <a:t>0.873</a:t>
-                      </a:r>
-                    </a:p>
-                  </a:txBody>
-                  <a:tcPr marL="91440" marR="91440" marT="45720" marB="45720"/>
-                </a:tc>
-                <a:tc>
-                  <a:txBody>
-                    <a:bodyPr/>
-                    <a:lstStyle/>
-                    <a:p>
-                      <a:r>
-                        <a:rPr sz="900">
-                          <a:solidFill>
-                            <a:srgbClr val="0F172A"/>
-                          </a:solidFill>
-                        </a:rPr>
-                        <a:t>2.402</a:t>
-                      </a:r>
-                    </a:p>
-                  </a:txBody>
-                  <a:tcPr marL="91440" marR="91440" marT="45720" marB="45720"/>
-                </a:tc>
-                <a:tc>
-                  <a:txBody>
-                    <a:bodyPr/>
-                    <a:lstStyle/>
-                    <a:p>
-                      <a:r>
-                        <a:rPr sz="900">
-                          <a:solidFill>
-                            <a:srgbClr val="0F172A"/>
-                          </a:solidFill>
-                        </a:rPr>
-                        <a:t>1.037</a:t>
-                      </a:r>
-                    </a:p>
-                  </a:txBody>
-                  <a:tcPr marL="91440" marR="91440" marT="45720" marB="45720"/>
-                </a:tc>
-              </a:tr>
-            </a:tbl>
+          <a:graphicData uri="http://schemas.openxmlformats.org/drawingml/2006/chart">
+            <c:chart xmlns:r="http://schemas.openxmlformats.org/officeDocument/2006/relationships" xmlns:c="http://schemas.openxmlformats.org/drawingml/2006/chart" r:id="R269258be9aff4698"/>
           </a:graphicData>
         </a:graphic>
       </p:graphicFrame>
@@ -5562,7 +7783,7 @@
           <p:cNvPr id="5" name="">
             <a:extLst xmlns:a="http://schemas.openxmlformats.org/drawingml/2006/main">
               <a:ext uri="{FF2B5EF4-FFF2-40B4-BE49-F238E27FC236}">
-                <a16:creationId xmlns:a16="http://schemas.microsoft.com/office/drawing/2014/main" id="{038CC086-50F1-471C-A2BF-DE94C9DF454D}"/>
+                <a16:creationId xmlns:a16="http://schemas.microsoft.com/office/drawing/2014/main" id="{93213F5F-E213-4C38-8468-BB4675968174}"/>
               </a:ext>
             </a:extLst>
           </p:cNvPr>
@@ -5573,8 +7794,8 @@
         </p:nvSpPr>
         <p:spPr>
           <a:xfrm xmlns:a="http://schemas.openxmlformats.org/drawingml/2006/main">
-            <a:off x="1238250" y="5334000"/>
-            <a:ext cx="9048750" cy="571500"/>
+            <a:off x="857250" y="5810250"/>
+            <a:ext cx="9906000" cy="342900"/>
           </a:xfrm>
           <a:prstGeom xmlns:a="http://schemas.openxmlformats.org/drawingml/2006/main" prst="rect">
             <a:avLst/>
@@ -5589,20 +7810,20 @@
           <a:bodyPr xmlns:a="http://schemas.openxmlformats.org/drawingml/2006/main"/>
           <a:lstStyle xmlns:a="http://schemas.openxmlformats.org/drawingml/2006/main"/>
           <a:p xmlns:a="http://schemas.openxmlformats.org/drawingml/2006/main">
-            <a:pPr algn="ctr">
-              <a:defRPr sz="1575" b="1">
+            <a:pPr>
+              <a:defRPr sz="1275">
                 <a:solidFill>
                   <a:srgbClr val="0F172A"/>
                 </a:solidFill>
               </a:defRPr>
             </a:pPr>
             <a:r>
-              <a:rPr sz="1575" b="1">
+              <a:rPr sz="1275">
                 <a:solidFill>
                   <a:srgbClr val="0F172A"/>
                 </a:solidFill>
               </a:rPr>
-              <a:t>简短结论：AutoPhaseNN 的图像恢复更符合实空间物理结构；UMamba 即使 FT/Pearson 指标较好，也可能恢复出不正确的 amp、phase、support。</a:t>
+              <a:t>末值：AutoPhaseNN val=3.70；UMamba hard val=6.13；UMamba soft/support val=7.01。</a:t>
             </a:r>
           </a:p>
         </p:txBody>
@@ -5610,7 +7831,7 @@
     </p:spTree>
     <p:extLst>
       <p:ext uri="{BB962C8B-B14F-4D97-AF65-F5344CB8AC3E}">
-        <p14:creationId xmlns:p14="http://schemas.microsoft.com/office/powerpoint/2010/main" val="734448677"/>
+        <p14:creationId xmlns:p14="http://schemas.microsoft.com/office/powerpoint/2010/main" val="956321293"/>
       </p:ext>
     </p:extLst>
   </p:cSld>
@@ -5641,7 +7862,7 @@
           <p:cNvPr id="1" name="">
             <a:extLst xmlns:a="http://schemas.openxmlformats.org/drawingml/2006/main">
               <a:ext uri="{FF2B5EF4-FFF2-40B4-BE49-F238E27FC236}">
-                <a16:creationId xmlns:a16="http://schemas.microsoft.com/office/drawing/2014/main" id="{44209E73-1CC9-4CDE-B4B0-61F1F1BEE666}"/>
+                <a16:creationId xmlns:a16="http://schemas.microsoft.com/office/drawing/2014/main" id="{659DDBCB-7F63-49C4-8086-4CA3FA8C5398}"/>
               </a:ext>
             </a:extLst>
           </p:cNvPr>
@@ -5681,7 +7902,7 @@
                   <a:srgbClr val="0F172A"/>
                 </a:solidFill>
               </a:rPr>
-              <a:t>还需要补的图</a:t>
+              <a:t>AutoPhaseNN 复现图：完整可视化结果</a:t>
             </a:r>
           </a:p>
         </p:txBody>
@@ -5691,7 +7912,7 @@
           <p:cNvPr id="2" name="">
             <a:extLst xmlns:a="http://schemas.openxmlformats.org/drawingml/2006/main">
               <a:ext uri="{FF2B5EF4-FFF2-40B4-BE49-F238E27FC236}">
-                <a16:creationId xmlns:a16="http://schemas.microsoft.com/office/drawing/2014/main" id="{B5F0F147-C304-4598-B41D-07F7A8A78F7D}"/>
+                <a16:creationId xmlns:a16="http://schemas.microsoft.com/office/drawing/2014/main" id="{0DF8BE73-0C2D-449A-A578-BF91A432BB1F}"/>
               </a:ext>
             </a:extLst>
           </p:cNvPr>
@@ -5703,7 +7924,7 @@
         <p:spPr>
           <a:xfrm xmlns:a="http://schemas.openxmlformats.org/drawingml/2006/main">
             <a:off x="476250" y="742950"/>
-            <a:ext cx="9334500" cy="266700"/>
+            <a:ext cx="10096500" cy="266700"/>
           </a:xfrm>
           <a:prstGeom xmlns:a="http://schemas.openxmlformats.org/drawingml/2006/main" prst="rect">
             <a:avLst/>
@@ -5731,7 +7952,7 @@
                   <a:srgbClr val="475569"/>
                 </a:solidFill>
               </a:rPr>
-              <a:t>后续只要把图文件补到对应位置，就可以替换占位页</a:t>
+              <a:t>文件：autophasenn_training_pipeline/output/visualization.png</a:t>
             </a:r>
           </a:p>
         </p:txBody>
@@ -5741,7 +7962,7 @@
           <p:cNvPr id="3" name="">
             <a:extLst xmlns:a="http://schemas.openxmlformats.org/drawingml/2006/main">
               <a:ext uri="{FF2B5EF4-FFF2-40B4-BE49-F238E27FC236}">
-                <a16:creationId xmlns:a16="http://schemas.microsoft.com/office/drawing/2014/main" id="{FCD44AE8-4816-4C80-AD3C-875560CAE3DF}"/>
+                <a16:creationId xmlns:a16="http://schemas.microsoft.com/office/drawing/2014/main" id="{86904EE2-4355-4BBB-9151-77F7E00F8D2B}"/>
               </a:ext>
             </a:extLst>
           </p:cNvPr>
@@ -5769,26 +7990,49 @@
           </a:ln>
         </p:spPr>
       </p:sp>
+      <p:pic>
+        <p:nvPicPr>
+          <p:cNvPr id="10" name=""/>
+          <p:cNvPicPr>
+            <a:picLocks xmlns:a="http://schemas.openxmlformats.org/drawingml/2006/main" noChangeAspect="1"/>
+          </p:cNvPicPr>
+          <p:nvPr/>
+        </p:nvPicPr>
+        <p:blipFill>
+          <a:blip xmlns:r="http://schemas.openxmlformats.org/officeDocument/2006/relationships" xmlns:a="http://schemas.openxmlformats.org/drawingml/2006/main" r:embed="R8f95a1934f444906"/>
+          <a:stretch xmlns:a="http://schemas.openxmlformats.org/drawingml/2006/main"/>
+        </p:blipFill>
+        <p:spPr>
+          <a:xfrm xmlns:a="http://schemas.openxmlformats.org/drawingml/2006/main">
+            <a:off x="609600" y="1790700"/>
+            <a:ext cx="7620000" cy="4191000"/>
+          </a:xfrm>
+          <a:prstGeom xmlns:a="http://schemas.openxmlformats.org/drawingml/2006/main" prst="roundRect">
+            <a:avLst>
+              <a:gd name="adj" fmla="val 1429"/>
+            </a:avLst>
+          </a:prstGeom>
+        </p:spPr>
+      </p:pic>
       <p:graphicFrame>
         <p:nvGraphicFramePr>
-          <p:cNvPr id="9" name=""/>
+          <p:cNvPr id="11" name=""/>
           <p:cNvGraphicFramePr/>
           <p:nvPr/>
         </p:nvGraphicFramePr>
         <p:xfrm>
-          <a:off xmlns:a="http://schemas.openxmlformats.org/drawingml/2006/main" x="1238250" y="1714500"/>
-          <a:ext xmlns:a="http://schemas.openxmlformats.org/drawingml/2006/main" cx="9525000" cy="2095500"/>
+          <a:off xmlns:a="http://schemas.openxmlformats.org/drawingml/2006/main" x="8572500" y="1428750"/>
+          <a:ext xmlns:a="http://schemas.openxmlformats.org/drawingml/2006/main" cx="2714625" cy="2857500"/>
         </p:xfrm>
         <a:graphic xmlns:a="http://schemas.openxmlformats.org/drawingml/2006/main">
           <a:graphicData uri="http://schemas.openxmlformats.org/drawingml/2006/table">
             <a:tbl>
               <a:tblPr firstRow="1" bandRow="1"/>
               <a:tblGrid>
-                <a:gridCol w="3143250"/>
-                <a:gridCol w="2571750"/>
-                <a:gridCol w="3810000"/>
+                <a:gridCol w="1428750"/>
+                <a:gridCol w="1285875"/>
               </a:tblGrid>
-              <a:tr h="698500">
+              <a:tr h="408214">
                 <a:tc>
                   <a:txBody>
                     <a:bodyPr/>
@@ -5800,7 +8044,7 @@
                             <a:srgbClr val="FFFFFF"/>
                           </a:solidFill>
                         </a:rPr>
-                        <a:t>缺图</a:t>
+                        <a:t>指标</a:t>
                       </a:r>
                     </a:p>
                   </a:txBody>
@@ -5821,7 +8065,7 @@
                             <a:srgbClr val="FFFFFF"/>
                           </a:solidFill>
                         </a:rPr>
-                        <a:t>当前状态</a:t>
+                        <a:t>数值</a:t>
                       </a:r>
                     </a:p>
                   </a:txBody>
@@ -5831,128 +8075,217 @@
                     </a:solidFill>
                   </a:tcPr>
                 </a:tc>
-                <a:tc>
-                  <a:txBody>
-                    <a:bodyPr/>
-                    <a:lstStyle/>
-                    <a:p>
-                      <a:r>
-                        <a:rPr sz="900" b="1">
-                          <a:solidFill>
-                            <a:srgbClr val="FFFFFF"/>
-                          </a:solidFill>
-                        </a:rPr>
-                        <a:t>建议输出文件</a:t>
-                      </a:r>
-                    </a:p>
-                  </a:txBody>
-                  <a:tcPr marL="91440" marR="91440" marT="45720" marB="45720">
-                    <a:solidFill>
-                      <a:srgbClr val="0F172A"/>
-                    </a:solidFill>
-                  </a:tcPr>
-                </a:tc>
               </a:tr>
-              <a:tr h="698500">
-                <a:tc>
-                  <a:txBody>
-                    <a:bodyPr/>
-                    <a:lstStyle/>
-                    <a:p>
-                      <a:r>
-                        <a:rPr sz="900">
-                          <a:solidFill>
-                            <a:srgbClr val="0F172A"/>
-                          </a:solidFill>
-                        </a:rPr>
-                        <a:t>UMamba hard threshold 完整可视化</a:t>
-                      </a:r>
-                    </a:p>
-                  </a:txBody>
-                  <a:tcPr marL="91440" marR="91440" marT="45720" marB="45720"/>
-                </a:tc>
-                <a:tc>
-                  <a:txBody>
-                    <a:bodyPr/>
-                    <a:lstStyle/>
-                    <a:p>
-                      <a:r>
-                        <a:rPr sz="900">
-                          <a:solidFill>
-                            <a:srgbClr val="0F172A"/>
-                          </a:solidFill>
-                        </a:rPr>
-                        <a:t>现有文件 0 字节</a:t>
-                      </a:r>
-                    </a:p>
-                  </a:txBody>
-                  <a:tcPr marL="91440" marR="91440" marT="45720" marB="45720"/>
-                </a:tc>
-                <a:tc>
-                  <a:txBody>
-                    <a:bodyPr/>
-                    <a:lstStyle/>
-                    <a:p>
-                      <a:r>
-                        <a:rPr sz="900">
-                          <a:solidFill>
-                            <a:srgbClr val="0F172A"/>
-                          </a:solidFill>
-                        </a:rPr>
-                        <a:t>umamba_overfit100_l1_.../visualization_train_subset.png</a:t>
+              <a:tr h="408214">
+                <a:tc>
+                  <a:txBody>
+                    <a:bodyPr/>
+                    <a:lstStyle/>
+                    <a:p>
+                      <a:r>
+                        <a:rPr sz="900">
+                          <a:solidFill>
+                            <a:srgbClr val="0F172A"/>
+                          </a:solidFill>
+                        </a:rPr>
+                        <a:t>Full val L1</a:t>
+                      </a:r>
+                    </a:p>
+                  </a:txBody>
+                  <a:tcPr marL="91440" marR="91440" marT="45720" marB="45720"/>
+                </a:tc>
+                <a:tc>
+                  <a:txBody>
+                    <a:bodyPr/>
+                    <a:lstStyle/>
+                    <a:p>
+                      <a:r>
+                        <a:rPr sz="900">
+                          <a:solidFill>
+                            <a:srgbClr val="0F172A"/>
+                          </a:solidFill>
+                        </a:rPr>
+                        <a:t>3.70</a:t>
                       </a:r>
                     </a:p>
                   </a:txBody>
                   <a:tcPr marL="91440" marR="91440" marT="45720" marB="45720"/>
                 </a:tc>
               </a:tr>
-              <a:tr h="698500">
-                <a:tc>
-                  <a:txBody>
-                    <a:bodyPr/>
-                    <a:lstStyle/>
-                    <a:p>
-                      <a:r>
-                        <a:rPr sz="900">
-                          <a:solidFill>
-                            <a:srgbClr val="0F172A"/>
-                          </a:solidFill>
-                        </a:rPr>
-                        <a:t>UMamba soft threshold 独立完整可视化</a:t>
-                      </a:r>
-                    </a:p>
-                  </a:txBody>
-                  <a:tcPr marL="91440" marR="91440" marT="45720" marB="45720"/>
-                </a:tc>
-                <a:tc>
-                  <a:txBody>
-                    <a:bodyPr/>
-                    <a:lstStyle/>
-                    <a:p>
-                      <a:r>
-                        <a:rPr sz="900">
-                          <a:solidFill>
-                            <a:srgbClr val="0F172A"/>
-                          </a:solidFill>
-                        </a:rPr>
-                        <a:t>仓库中未看到单独成品图</a:t>
-                      </a:r>
-                    </a:p>
-                  </a:txBody>
-                  <a:tcPr marL="91440" marR="91440" marT="45720" marB="45720"/>
-                </a:tc>
-                <a:tc>
-                  <a:txBody>
-                    <a:bodyPr/>
-                    <a:lstStyle/>
-                    <a:p>
-                      <a:r>
-                        <a:rPr sz="900">
-                          <a:solidFill>
-                            <a:srgbClr val="0F172A"/>
-                          </a:solidFill>
-                        </a:rPr>
-                        <a:t>umamba_soft_threshold_.../visualization.png</a:t>
+              <a:tr h="408214">
+                <a:tc>
+                  <a:txBody>
+                    <a:bodyPr/>
+                    <a:lstStyle/>
+                    <a:p>
+                      <a:r>
+                        <a:rPr sz="900">
+                          <a:solidFill>
+                            <a:srgbClr val="0F172A"/>
+                          </a:solidFill>
+                        </a:rPr>
+                        <a:t>Subset FT L1</a:t>
+                      </a:r>
+                    </a:p>
+                  </a:txBody>
+                  <a:tcPr marL="91440" marR="91440" marT="45720" marB="45720"/>
+                </a:tc>
+                <a:tc>
+                  <a:txBody>
+                    <a:bodyPr/>
+                    <a:lstStyle/>
+                    <a:p>
+                      <a:r>
+                        <a:rPr sz="900">
+                          <a:solidFill>
+                            <a:srgbClr val="0F172A"/>
+                          </a:solidFill>
+                        </a:rPr>
+                        <a:t>5.09</a:t>
+                      </a:r>
+                    </a:p>
+                  </a:txBody>
+                  <a:tcPr marL="91440" marR="91440" marT="45720" marB="45720"/>
+                </a:tc>
+              </a:tr>
+              <a:tr h="408214">
+                <a:tc>
+                  <a:txBody>
+                    <a:bodyPr/>
+                    <a:lstStyle/>
+                    <a:p>
+                      <a:r>
+                        <a:rPr sz="900">
+                          <a:solidFill>
+                            <a:srgbClr val="0F172A"/>
+                          </a:solidFill>
+                        </a:rPr>
+                        <a:t>Pearson</a:t>
+                      </a:r>
+                    </a:p>
+                  </a:txBody>
+                  <a:tcPr marL="91440" marR="91440" marT="45720" marB="45720"/>
+                </a:tc>
+                <a:tc>
+                  <a:txBody>
+                    <a:bodyPr/>
+                    <a:lstStyle/>
+                    <a:p>
+                      <a:r>
+                        <a:rPr sz="900">
+                          <a:solidFill>
+                            <a:srgbClr val="0F172A"/>
+                          </a:solidFill>
+                        </a:rPr>
+                        <a:t>0.923</a:t>
+                      </a:r>
+                    </a:p>
+                  </a:txBody>
+                  <a:tcPr marL="91440" marR="91440" marT="45720" marB="45720"/>
+                </a:tc>
+              </a:tr>
+              <a:tr h="408214">
+                <a:tc>
+                  <a:txBody>
+                    <a:bodyPr/>
+                    <a:lstStyle/>
+                    <a:p>
+                      <a:r>
+                        <a:rPr sz="900">
+                          <a:solidFill>
+                            <a:srgbClr val="0F172A"/>
+                          </a:solidFill>
+                        </a:rPr>
+                        <a:t>Amp L1</a:t>
+                      </a:r>
+                    </a:p>
+                  </a:txBody>
+                  <a:tcPr marL="91440" marR="91440" marT="45720" marB="45720"/>
+                </a:tc>
+                <a:tc>
+                  <a:txBody>
+                    <a:bodyPr/>
+                    <a:lstStyle/>
+                    <a:p>
+                      <a:r>
+                        <a:rPr sz="900">
+                          <a:solidFill>
+                            <a:srgbClr val="0F172A"/>
+                          </a:solidFill>
+                        </a:rPr>
+                        <a:t>0.0199</a:t>
+                      </a:r>
+                    </a:p>
+                  </a:txBody>
+                  <a:tcPr marL="91440" marR="91440" marT="45720" marB="45720"/>
+                </a:tc>
+              </a:tr>
+              <a:tr h="408214">
+                <a:tc>
+                  <a:txBody>
+                    <a:bodyPr/>
+                    <a:lstStyle/>
+                    <a:p>
+                      <a:r>
+                        <a:rPr sz="900">
+                          <a:solidFill>
+                            <a:srgbClr val="0F172A"/>
+                          </a:solidFill>
+                        </a:rPr>
+                        <a:t>Support Dice</a:t>
+                      </a:r>
+                    </a:p>
+                  </a:txBody>
+                  <a:tcPr marL="91440" marR="91440" marT="45720" marB="45720"/>
+                </a:tc>
+                <a:tc>
+                  <a:txBody>
+                    <a:bodyPr/>
+                    <a:lstStyle/>
+                    <a:p>
+                      <a:r>
+                        <a:rPr sz="900">
+                          <a:solidFill>
+                            <a:srgbClr val="0F172A"/>
+                          </a:solidFill>
+                        </a:rPr>
+                        <a:t>0.330</a:t>
+                      </a:r>
+                    </a:p>
+                  </a:txBody>
+                  <a:tcPr marL="91440" marR="91440" marT="45720" marB="45720"/>
+                </a:tc>
+              </a:tr>
+              <a:tr h="408214">
+                <a:tc>
+                  <a:txBody>
+                    <a:bodyPr/>
+                    <a:lstStyle/>
+                    <a:p>
+                      <a:r>
+                        <a:rPr sz="900">
+                          <a:solidFill>
+                            <a:srgbClr val="0F172A"/>
+                          </a:solidFill>
+                        </a:rPr>
+                        <a:t>Phase MAE</a:t>
+                      </a:r>
+                    </a:p>
+                  </a:txBody>
+                  <a:tcPr marL="91440" marR="91440" marT="45720" marB="45720"/>
+                </a:tc>
+                <a:tc>
+                  <a:txBody>
+                    <a:bodyPr/>
+                    <a:lstStyle/>
+                    <a:p>
+                      <a:r>
+                        <a:rPr sz="900">
+                          <a:solidFill>
+                            <a:srgbClr val="0F172A"/>
+                          </a:solidFill>
+                        </a:rPr>
+                        <a:t>0.873</a:t>
                       </a:r>
                     </a:p>
                   </a:txBody>
@@ -5965,10 +8298,257 @@
       </p:graphicFrame>
       <p:sp>
         <p:nvSpPr>
+          <p:cNvPr id="6" name="">
+            <a:extLst xmlns:a="http://schemas.openxmlformats.org/drawingml/2006/main">
+              <a:ext uri="{FF2B5EF4-FFF2-40B4-BE49-F238E27FC236}">
+                <a16:creationId xmlns:a16="http://schemas.microsoft.com/office/drawing/2014/main" id="{0F370641-61AD-4EFB-9AD9-7E5F68BE45ED}"/>
+              </a:ext>
+            </a:extLst>
+          </p:cNvPr>
+          <p:cNvSpPr>
+            <a:spLocks xmlns:a="http://schemas.openxmlformats.org/drawingml/2006/main" noGrp="1"/>
+          </p:cNvSpPr>
+          <p:nvPr/>
+        </p:nvSpPr>
+        <p:spPr>
+          <a:xfrm xmlns:a="http://schemas.openxmlformats.org/drawingml/2006/main">
+            <a:off x="8572500" y="4648200"/>
+            <a:ext cx="2714625" cy="552450"/>
+          </a:xfrm>
+          <a:prstGeom xmlns:a="http://schemas.openxmlformats.org/drawingml/2006/main" prst="rect">
+            <a:avLst/>
+          </a:prstGeom>
+          <a:noFill xmlns:a="http://schemas.openxmlformats.org/drawingml/2006/main"/>
+          <a:ln xmlns:a="http://schemas.openxmlformats.org/drawingml/2006/main" w="0">
+            <a:noFill/>
+            <a:prstDash val="solid"/>
+          </a:ln>
+        </p:spPr>
+        <p:txBody>
+          <a:bodyPr xmlns:a="http://schemas.openxmlformats.org/drawingml/2006/main"/>
+          <a:lstStyle xmlns:a="http://schemas.openxmlformats.org/drawingml/2006/main"/>
+          <a:p xmlns:a="http://schemas.openxmlformats.org/drawingml/2006/main">
+            <a:pPr>
+              <a:defRPr sz="1350" b="1">
+                <a:solidFill>
+                  <a:srgbClr val="0F766E"/>
+                </a:solidFill>
+              </a:defRPr>
+            </a:pPr>
+            <a:r>
+              <a:rPr sz="1350" b="1">
+                <a:solidFill>
+                  <a:srgbClr val="0F766E"/>
+                </a:solidFill>
+              </a:rPr>
+              <a:t>结论：这组图可以作为 AutoPhaseNN 复现成功的主要证据。</a:t>
+            </a:r>
+          </a:p>
+        </p:txBody>
+      </p:sp>
+    </p:spTree>
+    <p:extLst>
+      <p:ext uri="{BB962C8B-B14F-4D97-AF65-F5344CB8AC3E}">
+        <p14:creationId xmlns:p14="http://schemas.microsoft.com/office/powerpoint/2010/main" val="2055504622"/>
+      </p:ext>
+    </p:extLst>
+  </p:cSld>
+</p:sld>
+</file>
+
+<file path=ppt/slides/slide8.xml><?xml version="1.0" encoding="utf-8"?>
+<p:sld xmlns:p="http://schemas.openxmlformats.org/presentationml/2006/main">
+  <p:cSld>
+    <p:bg>
+      <p:bgPr>
+        <a:solidFill xmlns:a="http://schemas.openxmlformats.org/drawingml/2006/main">
+          <a:srgbClr val="F8FAFC"/>
+        </a:solidFill>
+      </p:bgPr>
+    </p:bg>
+    <p:spTree>
+      <p:nvGrpSpPr>
+        <p:cNvPr id="1" name=""/>
+        <p:cNvGrpSpPr/>
+        <p:nvPr/>
+      </p:nvGrpSpPr>
+      <p:grpSpPr>
+        <a:xfrm xmlns:a="http://schemas.openxmlformats.org/drawingml/2006/main"/>
+      </p:grpSpPr>
+      <p:sp>
+        <p:nvSpPr>
+          <p:cNvPr id="1" name="">
+            <a:extLst xmlns:a="http://schemas.openxmlformats.org/drawingml/2006/main">
+              <a:ext uri="{FF2B5EF4-FFF2-40B4-BE49-F238E27FC236}">
+                <a16:creationId xmlns:a16="http://schemas.microsoft.com/office/drawing/2014/main" id="{4B5D0FE8-0CE7-44F1-BAFB-A128B136AB70}"/>
+              </a:ext>
+            </a:extLst>
+          </p:cNvPr>
+          <p:cNvSpPr>
+            <a:spLocks xmlns:a="http://schemas.openxmlformats.org/drawingml/2006/main" noGrp="1"/>
+          </p:cNvSpPr>
+          <p:nvPr/>
+        </p:nvSpPr>
+        <p:spPr>
+          <a:xfrm xmlns:a="http://schemas.openxmlformats.org/drawingml/2006/main">
+            <a:off x="457200" y="304800"/>
+            <a:ext cx="8858250" cy="438150"/>
+          </a:xfrm>
+          <a:prstGeom xmlns:a="http://schemas.openxmlformats.org/drawingml/2006/main" prst="rect">
+            <a:avLst/>
+          </a:prstGeom>
+          <a:noFill xmlns:a="http://schemas.openxmlformats.org/drawingml/2006/main"/>
+          <a:ln xmlns:a="http://schemas.openxmlformats.org/drawingml/2006/main" w="0">
+            <a:noFill/>
+            <a:prstDash val="solid"/>
+          </a:ln>
+        </p:spPr>
+        <p:txBody>
+          <a:bodyPr xmlns:a="http://schemas.openxmlformats.org/drawingml/2006/main"/>
+          <a:lstStyle xmlns:a="http://schemas.openxmlformats.org/drawingml/2006/main"/>
+          <a:p xmlns:a="http://schemas.openxmlformats.org/drawingml/2006/main">
+            <a:pPr>
+              <a:defRPr sz="2250" b="1">
+                <a:solidFill>
+                  <a:srgbClr val="0F172A"/>
+                </a:solidFill>
+              </a:defRPr>
+            </a:pPr>
+            <a:r>
+              <a:rPr sz="2250" b="1">
+                <a:solidFill>
+                  <a:srgbClr val="0F172A"/>
+                </a:solidFill>
+              </a:rPr>
+              <a:t>UMamba 原始硬阈值结果图</a:t>
+            </a:r>
+          </a:p>
+        </p:txBody>
+      </p:sp>
+      <p:sp>
+        <p:nvSpPr>
+          <p:cNvPr id="2" name="">
+            <a:extLst xmlns:a="http://schemas.openxmlformats.org/drawingml/2006/main">
+              <a:ext uri="{FF2B5EF4-FFF2-40B4-BE49-F238E27FC236}">
+                <a16:creationId xmlns:a16="http://schemas.microsoft.com/office/drawing/2014/main" id="{F388D324-8385-4085-8D75-41F3D29F9325}"/>
+              </a:ext>
+            </a:extLst>
+          </p:cNvPr>
+          <p:cNvSpPr>
+            <a:spLocks xmlns:a="http://schemas.openxmlformats.org/drawingml/2006/main" noGrp="1"/>
+          </p:cNvSpPr>
+          <p:nvPr/>
+        </p:nvSpPr>
+        <p:spPr>
+          <a:xfrm xmlns:a="http://schemas.openxmlformats.org/drawingml/2006/main">
+            <a:off x="476250" y="742950"/>
+            <a:ext cx="10096500" cy="266700"/>
+          </a:xfrm>
+          <a:prstGeom xmlns:a="http://schemas.openxmlformats.org/drawingml/2006/main" prst="rect">
+            <a:avLst/>
+          </a:prstGeom>
+          <a:noFill xmlns:a="http://schemas.openxmlformats.org/drawingml/2006/main"/>
+          <a:ln xmlns:a="http://schemas.openxmlformats.org/drawingml/2006/main" w="0">
+            <a:noFill/>
+            <a:prstDash val="solid"/>
+          </a:ln>
+        </p:spPr>
+        <p:txBody>
+          <a:bodyPr xmlns:a="http://schemas.openxmlformats.org/drawingml/2006/main"/>
+          <a:lstStyle xmlns:a="http://schemas.openxmlformats.org/drawingml/2006/main"/>
+          <a:p xmlns:a="http://schemas.openxmlformats.org/drawingml/2006/main">
+            <a:pPr>
+              <a:defRPr sz="975">
+                <a:solidFill>
+                  <a:srgbClr val="475569"/>
+                </a:solidFill>
+              </a:defRPr>
+            </a:pPr>
+            <a:r>
+              <a:rPr sz="975">
+                <a:solidFill>
+                  <a:srgbClr val="475569"/>
+                </a:solidFill>
+              </a:rPr>
+              <a:t>当前仓库中对应 visualization_train_subset.png 为 0 字节，先保留图片位置</a:t>
+            </a:r>
+          </a:p>
+        </p:txBody>
+      </p:sp>
+      <p:sp>
+        <p:nvSpPr>
+          <p:cNvPr id="3" name="">
+            <a:extLst xmlns:a="http://schemas.openxmlformats.org/drawingml/2006/main">
+              <a:ext uri="{FF2B5EF4-FFF2-40B4-BE49-F238E27FC236}">
+                <a16:creationId xmlns:a16="http://schemas.microsoft.com/office/drawing/2014/main" id="{D98A311B-6063-4C97-BCC0-2F53D97FD2AB}"/>
+              </a:ext>
+            </a:extLst>
+          </p:cNvPr>
+          <p:cNvSpPr>
+            <a:spLocks xmlns:a="http://schemas.openxmlformats.org/drawingml/2006/main" noGrp="1"/>
+          </p:cNvSpPr>
+          <p:nvPr/>
+        </p:nvSpPr>
+        <p:spPr>
+          <a:xfrm xmlns:a="http://schemas.openxmlformats.org/drawingml/2006/main">
+            <a:off x="457200" y="1066800"/>
+            <a:ext cx="11277600" cy="9525"/>
+          </a:xfrm>
+          <a:prstGeom xmlns:a="http://schemas.openxmlformats.org/drawingml/2006/main" prst="rect">
+            <a:avLst/>
+          </a:prstGeom>
+          <a:solidFill xmlns:a="http://schemas.openxmlformats.org/drawingml/2006/main">
+            <a:srgbClr val="CBD5E1"/>
+          </a:solidFill>
+          <a:ln xmlns:a="http://schemas.openxmlformats.org/drawingml/2006/main" w="0">
+            <a:solidFill>
+              <a:srgbClr val="CBD5E1"/>
+            </a:solidFill>
+            <a:prstDash val="solid"/>
+          </a:ln>
+        </p:spPr>
+      </p:sp>
+      <p:sp>
+        <p:nvSpPr>
+          <p:cNvPr id="4" name="">
+            <a:extLst xmlns:a="http://schemas.openxmlformats.org/drawingml/2006/main">
+              <a:ext uri="{FF2B5EF4-FFF2-40B4-BE49-F238E27FC236}">
+                <a16:creationId xmlns:a16="http://schemas.microsoft.com/office/drawing/2014/main" id="{99FCDADF-7772-4641-AEA6-CD042BB5BCA9}"/>
+              </a:ext>
+            </a:extLst>
+          </p:cNvPr>
+          <p:cNvSpPr>
+            <a:spLocks xmlns:a="http://schemas.openxmlformats.org/drawingml/2006/main" noGrp="1"/>
+          </p:cNvSpPr>
+          <p:nvPr/>
+        </p:nvSpPr>
+        <p:spPr>
+          <a:xfrm xmlns:a="http://schemas.openxmlformats.org/drawingml/2006/main">
+            <a:off x="685800" y="1381125"/>
+            <a:ext cx="7239000" cy="4381500"/>
+          </a:xfrm>
+          <a:prstGeom xmlns:a="http://schemas.openxmlformats.org/drawingml/2006/main" prst="roundRect">
+            <a:avLst>
+              <a:gd name="adj" fmla="val 2609"/>
+            </a:avLst>
+          </a:prstGeom>
+          <a:solidFill xmlns:a="http://schemas.openxmlformats.org/drawingml/2006/main">
+            <a:srgbClr val="FFF7ED"/>
+          </a:solidFill>
+          <a:ln xmlns:a="http://schemas.openxmlformats.org/drawingml/2006/main" w="19050">
+            <a:solidFill>
+              <a:srgbClr val="D97706"/>
+            </a:solidFill>
+            <a:prstDash val="dash"/>
+          </a:ln>
+        </p:spPr>
+      </p:sp>
+      <p:sp>
+        <p:nvSpPr>
           <p:cNvPr id="5" name="">
             <a:extLst xmlns:a="http://schemas.openxmlformats.org/drawingml/2006/main">
               <a:ext uri="{FF2B5EF4-FFF2-40B4-BE49-F238E27FC236}">
-                <a16:creationId xmlns:a16="http://schemas.microsoft.com/office/drawing/2014/main" id="{999D769B-079E-43E8-B498-5DB34629AB60}"/>
+                <a16:creationId xmlns:a16="http://schemas.microsoft.com/office/drawing/2014/main" id="{4DFA5AB8-5C56-4513-886B-BBA3CA7A9846}"/>
               </a:ext>
             </a:extLst>
           </p:cNvPr>
@@ -5979,8 +8559,8 @@
         </p:nvSpPr>
         <p:spPr>
           <a:xfrm xmlns:a="http://schemas.openxmlformats.org/drawingml/2006/main">
-            <a:off x="1524000" y="4476750"/>
-            <a:ext cx="8572500" cy="514350"/>
+            <a:off x="914400" y="1724025"/>
+            <a:ext cx="6781800" cy="361950"/>
           </a:xfrm>
           <a:prstGeom xmlns:a="http://schemas.openxmlformats.org/drawingml/2006/main" prst="rect">
             <a:avLst/>
@@ -5998,25 +8578,925 @@
             <a:pPr algn="ctr">
               <a:defRPr sz="1800" b="1">
                 <a:solidFill>
-                  <a:srgbClr val="0F766E"/>
+                  <a:srgbClr val="D97706"/>
                 </a:solidFill>
               </a:defRPr>
             </a:pPr>
             <a:r>
               <a:rPr sz="1800" b="1">
                 <a:solidFill>
-                  <a:srgbClr val="0F766E"/>
+                  <a:srgbClr val="D97706"/>
                 </a:solidFill>
               </a:rPr>
-              <a:t>我已经保留了图片位置；下一次补图后只需要替换对应 slide 的图片，不需要重写汇报结构。</a:t>
+              <a:t>待补图：UMamba hard threshold</a:t>
             </a:r>
           </a:p>
         </p:txBody>
       </p:sp>
+      <p:sp>
+        <p:nvSpPr>
+          <p:cNvPr id="6" name="">
+            <a:extLst xmlns:a="http://schemas.openxmlformats.org/drawingml/2006/main">
+              <a:ext uri="{FF2B5EF4-FFF2-40B4-BE49-F238E27FC236}">
+                <a16:creationId xmlns:a16="http://schemas.microsoft.com/office/drawing/2014/main" id="{AB450924-8FAC-414F-BBFD-24EEA904E68A}"/>
+              </a:ext>
+            </a:extLst>
+          </p:cNvPr>
+          <p:cNvSpPr>
+            <a:spLocks xmlns:a="http://schemas.openxmlformats.org/drawingml/2006/main" noGrp="1"/>
+          </p:cNvSpPr>
+          <p:nvPr/>
+        </p:nvSpPr>
+        <p:spPr>
+          <a:xfrm xmlns:a="http://schemas.openxmlformats.org/drawingml/2006/main">
+            <a:off x="1047750" y="2238375"/>
+            <a:ext cx="6515100" cy="876300"/>
+          </a:xfrm>
+          <a:prstGeom xmlns:a="http://schemas.openxmlformats.org/drawingml/2006/main" prst="rect">
+            <a:avLst/>
+          </a:prstGeom>
+          <a:noFill xmlns:a="http://schemas.openxmlformats.org/drawingml/2006/main"/>
+          <a:ln xmlns:a="http://schemas.openxmlformats.org/drawingml/2006/main" w="0">
+            <a:noFill/>
+            <a:prstDash val="solid"/>
+          </a:ln>
+        </p:spPr>
+        <p:txBody>
+          <a:bodyPr xmlns:a="http://schemas.openxmlformats.org/drawingml/2006/main"/>
+          <a:lstStyle xmlns:a="http://schemas.openxmlformats.org/drawingml/2006/main"/>
+          <a:p xmlns:a="http://schemas.openxmlformats.org/drawingml/2006/main">
+            <a:pPr algn="ctr">
+              <a:defRPr sz="1200">
+                <a:solidFill>
+                  <a:srgbClr val="475569"/>
+                </a:solidFill>
+              </a:defRPr>
+            </a:pPr>
+            <a:r>
+              <a:rPr sz="1200">
+                <a:solidFill>
+                  <a:srgbClr val="475569"/>
+                </a:solidFill>
+              </a:rPr>
+              <a:t>缺失文件：umamba_overfit100_l1_20260604_134304/visualization_train_subset.png 当前为 0 字节。</a:t>
+            </a:r>
+          </a:p>
+        </p:txBody>
+      </p:sp>
+      <p:graphicFrame>
+        <p:nvGraphicFramePr>
+          <p:cNvPr id="15" name=""/>
+          <p:cNvGraphicFramePr/>
+          <p:nvPr/>
+        </p:nvGraphicFramePr>
+        <p:xfrm>
+          <a:off xmlns:a="http://schemas.openxmlformats.org/drawingml/2006/main" x="8572500" y="1428750"/>
+          <a:ext xmlns:a="http://schemas.openxmlformats.org/drawingml/2006/main" cx="2714625" cy="2857500"/>
+        </p:xfrm>
+        <a:graphic xmlns:a="http://schemas.openxmlformats.org/drawingml/2006/main">
+          <a:graphicData uri="http://schemas.openxmlformats.org/drawingml/2006/table">
+            <a:tbl>
+              <a:tblPr firstRow="1" bandRow="1"/>
+              <a:tblGrid>
+                <a:gridCol w="1428750"/>
+                <a:gridCol w="1285875"/>
+              </a:tblGrid>
+              <a:tr h="408214">
+                <a:tc>
+                  <a:txBody>
+                    <a:bodyPr/>
+                    <a:lstStyle/>
+                    <a:p>
+                      <a:r>
+                        <a:rPr sz="900" b="1">
+                          <a:solidFill>
+                            <a:srgbClr val="FFFFFF"/>
+                          </a:solidFill>
+                        </a:rPr>
+                        <a:t>指标</a:t>
+                      </a:r>
+                    </a:p>
+                  </a:txBody>
+                  <a:tcPr marL="91440" marR="91440" marT="45720" marB="45720">
+                    <a:solidFill>
+                      <a:srgbClr val="0F172A"/>
+                    </a:solidFill>
+                  </a:tcPr>
+                </a:tc>
+                <a:tc>
+                  <a:txBody>
+                    <a:bodyPr/>
+                    <a:lstStyle/>
+                    <a:p>
+                      <a:r>
+                        <a:rPr sz="900" b="1">
+                          <a:solidFill>
+                            <a:srgbClr val="FFFFFF"/>
+                          </a:solidFill>
+                        </a:rPr>
+                        <a:t>数值</a:t>
+                      </a:r>
+                    </a:p>
+                  </a:txBody>
+                  <a:tcPr marL="91440" marR="91440" marT="45720" marB="45720">
+                    <a:solidFill>
+                      <a:srgbClr val="0F172A"/>
+                    </a:solidFill>
+                  </a:tcPr>
+                </a:tc>
+              </a:tr>
+              <a:tr h="408214">
+                <a:tc>
+                  <a:txBody>
+                    <a:bodyPr/>
+                    <a:lstStyle/>
+                    <a:p>
+                      <a:r>
+                        <a:rPr sz="900">
+                          <a:solidFill>
+                            <a:srgbClr val="0F172A"/>
+                          </a:solidFill>
+                        </a:rPr>
+                        <a:t>Val L1</a:t>
+                      </a:r>
+                    </a:p>
+                  </a:txBody>
+                  <a:tcPr marL="91440" marR="91440" marT="45720" marB="45720"/>
+                </a:tc>
+                <a:tc>
+                  <a:txBody>
+                    <a:bodyPr/>
+                    <a:lstStyle/>
+                    <a:p>
+                      <a:r>
+                        <a:rPr sz="900">
+                          <a:solidFill>
+                            <a:srgbClr val="0F172A"/>
+                          </a:solidFill>
+                        </a:rPr>
+                        <a:t>6.13</a:t>
+                      </a:r>
+                    </a:p>
+                  </a:txBody>
+                  <a:tcPr marL="91440" marR="91440" marT="45720" marB="45720"/>
+                </a:tc>
+              </a:tr>
+              <a:tr h="408214">
+                <a:tc>
+                  <a:txBody>
+                    <a:bodyPr/>
+                    <a:lstStyle/>
+                    <a:p>
+                      <a:r>
+                        <a:rPr sz="900">
+                          <a:solidFill>
+                            <a:srgbClr val="0F172A"/>
+                          </a:solidFill>
+                        </a:rPr>
+                        <a:t>Subset FT L1</a:t>
+                      </a:r>
+                    </a:p>
+                  </a:txBody>
+                  <a:tcPr marL="91440" marR="91440" marT="45720" marB="45720"/>
+                </a:tc>
+                <a:tc>
+                  <a:txBody>
+                    <a:bodyPr/>
+                    <a:lstStyle/>
+                    <a:p>
+                      <a:r>
+                        <a:rPr sz="900">
+                          <a:solidFill>
+                            <a:srgbClr val="0F172A"/>
+                          </a:solidFill>
+                        </a:rPr>
+                        <a:t>6.10</a:t>
+                      </a:r>
+                    </a:p>
+                  </a:txBody>
+                  <a:tcPr marL="91440" marR="91440" marT="45720" marB="45720"/>
+                </a:tc>
+              </a:tr>
+              <a:tr h="408214">
+                <a:tc>
+                  <a:txBody>
+                    <a:bodyPr/>
+                    <a:lstStyle/>
+                    <a:p>
+                      <a:r>
+                        <a:rPr sz="900">
+                          <a:solidFill>
+                            <a:srgbClr val="0F172A"/>
+                          </a:solidFill>
+                        </a:rPr>
+                        <a:t>Pearson</a:t>
+                      </a:r>
+                    </a:p>
+                  </a:txBody>
+                  <a:tcPr marL="91440" marR="91440" marT="45720" marB="45720"/>
+                </a:tc>
+                <a:tc>
+                  <a:txBody>
+                    <a:bodyPr/>
+                    <a:lstStyle/>
+                    <a:p>
+                      <a:r>
+                        <a:rPr sz="900">
+                          <a:solidFill>
+                            <a:srgbClr val="0F172A"/>
+                          </a:solidFill>
+                        </a:rPr>
+                        <a:t>0.822</a:t>
+                      </a:r>
+                    </a:p>
+                  </a:txBody>
+                  <a:tcPr marL="91440" marR="91440" marT="45720" marB="45720"/>
+                </a:tc>
+              </a:tr>
+              <a:tr h="408214">
+                <a:tc>
+                  <a:txBody>
+                    <a:bodyPr/>
+                    <a:lstStyle/>
+                    <a:p>
+                      <a:r>
+                        <a:rPr sz="900">
+                          <a:solidFill>
+                            <a:srgbClr val="0F172A"/>
+                          </a:solidFill>
+                        </a:rPr>
+                        <a:t>Amp L1</a:t>
+                      </a:r>
+                    </a:p>
+                  </a:txBody>
+                  <a:tcPr marL="91440" marR="91440" marT="45720" marB="45720"/>
+                </a:tc>
+                <a:tc>
+                  <a:txBody>
+                    <a:bodyPr/>
+                    <a:lstStyle/>
+                    <a:p>
+                      <a:r>
+                        <a:rPr sz="900">
+                          <a:solidFill>
+                            <a:srgbClr val="0F172A"/>
+                          </a:solidFill>
+                        </a:rPr>
+                        <a:t>0.0255</a:t>
+                      </a:r>
+                    </a:p>
+                  </a:txBody>
+                  <a:tcPr marL="91440" marR="91440" marT="45720" marB="45720"/>
+                </a:tc>
+              </a:tr>
+              <a:tr h="408214">
+                <a:tc>
+                  <a:txBody>
+                    <a:bodyPr/>
+                    <a:lstStyle/>
+                    <a:p>
+                      <a:r>
+                        <a:rPr sz="900">
+                          <a:solidFill>
+                            <a:srgbClr val="0F172A"/>
+                          </a:solidFill>
+                        </a:rPr>
+                        <a:t>Support Dice</a:t>
+                      </a:r>
+                    </a:p>
+                  </a:txBody>
+                  <a:tcPr marL="91440" marR="91440" marT="45720" marB="45720"/>
+                </a:tc>
+                <a:tc>
+                  <a:txBody>
+                    <a:bodyPr/>
+                    <a:lstStyle/>
+                    <a:p>
+                      <a:r>
+                        <a:rPr sz="900">
+                          <a:solidFill>
+                            <a:srgbClr val="0F172A"/>
+                          </a:solidFill>
+                        </a:rPr>
+                        <a:t>0.012</a:t>
+                      </a:r>
+                    </a:p>
+                  </a:txBody>
+                  <a:tcPr marL="91440" marR="91440" marT="45720" marB="45720"/>
+                </a:tc>
+              </a:tr>
+              <a:tr h="408214">
+                <a:tc>
+                  <a:txBody>
+                    <a:bodyPr/>
+                    <a:lstStyle/>
+                    <a:p>
+                      <a:r>
+                        <a:rPr sz="900">
+                          <a:solidFill>
+                            <a:srgbClr val="0F172A"/>
+                          </a:solidFill>
+                        </a:rPr>
+                        <a:t>Phase MAE</a:t>
+                      </a:r>
+                    </a:p>
+                  </a:txBody>
+                  <a:tcPr marL="91440" marR="91440" marT="45720" marB="45720"/>
+                </a:tc>
+                <a:tc>
+                  <a:txBody>
+                    <a:bodyPr/>
+                    <a:lstStyle/>
+                    <a:p>
+                      <a:r>
+                        <a:rPr sz="900">
+                          <a:solidFill>
+                            <a:srgbClr val="0F172A"/>
+                          </a:solidFill>
+                        </a:rPr>
+                        <a:t>2.402</a:t>
+                      </a:r>
+                    </a:p>
+                  </a:txBody>
+                  <a:tcPr marL="91440" marR="91440" marT="45720" marB="45720"/>
+                </a:tc>
+              </a:tr>
+            </a:tbl>
+          </a:graphicData>
+        </a:graphic>
+      </p:graphicFrame>
+      <p:sp>
+        <p:nvSpPr>
+          <p:cNvPr id="8" name="">
+            <a:extLst xmlns:a="http://schemas.openxmlformats.org/drawingml/2006/main">
+              <a:ext uri="{FF2B5EF4-FFF2-40B4-BE49-F238E27FC236}">
+                <a16:creationId xmlns:a16="http://schemas.microsoft.com/office/drawing/2014/main" id="{A69E01AC-31FF-4E3A-9234-126A434E7468}"/>
+              </a:ext>
+            </a:extLst>
+          </p:cNvPr>
+          <p:cNvSpPr>
+            <a:spLocks xmlns:a="http://schemas.openxmlformats.org/drawingml/2006/main" noGrp="1"/>
+          </p:cNvSpPr>
+          <p:nvPr/>
+        </p:nvSpPr>
+        <p:spPr>
+          <a:xfrm xmlns:a="http://schemas.openxmlformats.org/drawingml/2006/main">
+            <a:off x="8572500" y="4648200"/>
+            <a:ext cx="2714625" cy="609600"/>
+          </a:xfrm>
+          <a:prstGeom xmlns:a="http://schemas.openxmlformats.org/drawingml/2006/main" prst="rect">
+            <a:avLst/>
+          </a:prstGeom>
+          <a:noFill xmlns:a="http://schemas.openxmlformats.org/drawingml/2006/main"/>
+          <a:ln xmlns:a="http://schemas.openxmlformats.org/drawingml/2006/main" w="0">
+            <a:noFill/>
+            <a:prstDash val="solid"/>
+          </a:ln>
+        </p:spPr>
+        <p:txBody>
+          <a:bodyPr xmlns:a="http://schemas.openxmlformats.org/drawingml/2006/main"/>
+          <a:lstStyle xmlns:a="http://schemas.openxmlformats.org/drawingml/2006/main"/>
+          <a:p xmlns:a="http://schemas.openxmlformats.org/drawingml/2006/main">
+            <a:pPr>
+              <a:defRPr sz="1350" b="1">
+                <a:solidFill>
+                  <a:srgbClr val="D97706"/>
+                </a:solidFill>
+              </a:defRPr>
+            </a:pPr>
+            <a:r>
+              <a:rPr sz="1350" b="1">
+                <a:solidFill>
+                  <a:srgbClr val="D97706"/>
+                </a:solidFill>
+              </a:rPr>
+              <a:t>结论：损失下降，但 support/phase 指标远弱于 AutoPhaseNN。</a:t>
+            </a:r>
+          </a:p>
+        </p:txBody>
+      </p:sp>
     </p:spTree>
     <p:extLst>
       <p:ext uri="{BB962C8B-B14F-4D97-AF65-F5344CB8AC3E}">
-        <p14:creationId xmlns:p14="http://schemas.microsoft.com/office/powerpoint/2010/main" val="990065461"/>
+        <p14:creationId xmlns:p14="http://schemas.microsoft.com/office/powerpoint/2010/main" val="1561983548"/>
+      </p:ext>
+    </p:extLst>
+  </p:cSld>
+</p:sld>
+</file>
+
+<file path=ppt/slides/slide9.xml><?xml version="1.0" encoding="utf-8"?>
+<p:sld xmlns:p="http://schemas.openxmlformats.org/presentationml/2006/main">
+  <p:cSld>
+    <p:bg>
+      <p:bgPr>
+        <a:solidFill xmlns:a="http://schemas.openxmlformats.org/drawingml/2006/main">
+          <a:srgbClr val="F8FAFC"/>
+        </a:solidFill>
+      </p:bgPr>
+    </p:bg>
+    <p:spTree>
+      <p:nvGrpSpPr>
+        <p:cNvPr id="1" name=""/>
+        <p:cNvGrpSpPr/>
+        <p:nvPr/>
+      </p:nvGrpSpPr>
+      <p:grpSpPr>
+        <a:xfrm xmlns:a="http://schemas.openxmlformats.org/drawingml/2006/main"/>
+      </p:grpSpPr>
+      <p:sp>
+        <p:nvSpPr>
+          <p:cNvPr id="1" name="">
+            <a:extLst xmlns:a="http://schemas.openxmlformats.org/drawingml/2006/main">
+              <a:ext uri="{FF2B5EF4-FFF2-40B4-BE49-F238E27FC236}">
+                <a16:creationId xmlns:a16="http://schemas.microsoft.com/office/drawing/2014/main" id="{48A709CD-0D89-4209-AB0D-F47ACAD5DD61}"/>
+              </a:ext>
+            </a:extLst>
+          </p:cNvPr>
+          <p:cNvSpPr>
+            <a:spLocks xmlns:a="http://schemas.openxmlformats.org/drawingml/2006/main" noGrp="1"/>
+          </p:cNvSpPr>
+          <p:nvPr/>
+        </p:nvSpPr>
+        <p:spPr>
+          <a:xfrm xmlns:a="http://schemas.openxmlformats.org/drawingml/2006/main">
+            <a:off x="457200" y="304800"/>
+            <a:ext cx="8858250" cy="438150"/>
+          </a:xfrm>
+          <a:prstGeom xmlns:a="http://schemas.openxmlformats.org/drawingml/2006/main" prst="rect">
+            <a:avLst/>
+          </a:prstGeom>
+          <a:noFill xmlns:a="http://schemas.openxmlformats.org/drawingml/2006/main"/>
+          <a:ln xmlns:a="http://schemas.openxmlformats.org/drawingml/2006/main" w="0">
+            <a:noFill/>
+            <a:prstDash val="solid"/>
+          </a:ln>
+        </p:spPr>
+        <p:txBody>
+          <a:bodyPr xmlns:a="http://schemas.openxmlformats.org/drawingml/2006/main"/>
+          <a:lstStyle xmlns:a="http://schemas.openxmlformats.org/drawingml/2006/main"/>
+          <a:p xmlns:a="http://schemas.openxmlformats.org/drawingml/2006/main">
+            <a:pPr>
+              <a:defRPr sz="2250" b="1">
+                <a:solidFill>
+                  <a:srgbClr val="0F172A"/>
+                </a:solidFill>
+              </a:defRPr>
+            </a:pPr>
+            <a:r>
+              <a:rPr sz="2250" b="1">
+                <a:solidFill>
+                  <a:srgbClr val="0F172A"/>
+                </a:solidFill>
+              </a:rPr>
+              <a:t>UMamba 可用完整图：实空间结构不理想</a:t>
+            </a:r>
+          </a:p>
+        </p:txBody>
+      </p:sp>
+      <p:sp>
+        <p:nvSpPr>
+          <p:cNvPr id="2" name="">
+            <a:extLst xmlns:a="http://schemas.openxmlformats.org/drawingml/2006/main">
+              <a:ext uri="{FF2B5EF4-FFF2-40B4-BE49-F238E27FC236}">
+                <a16:creationId xmlns:a16="http://schemas.microsoft.com/office/drawing/2014/main" id="{2BB0C951-D482-4B17-9E10-A45945368003}"/>
+              </a:ext>
+            </a:extLst>
+          </p:cNvPr>
+          <p:cNvSpPr>
+            <a:spLocks xmlns:a="http://schemas.openxmlformats.org/drawingml/2006/main" noGrp="1"/>
+          </p:cNvSpPr>
+          <p:nvPr/>
+        </p:nvSpPr>
+        <p:spPr>
+          <a:xfrm xmlns:a="http://schemas.openxmlformats.org/drawingml/2006/main">
+            <a:off x="476250" y="742950"/>
+            <a:ext cx="10096500" cy="266700"/>
+          </a:xfrm>
+          <a:prstGeom xmlns:a="http://schemas.openxmlformats.org/drawingml/2006/main" prst="rect">
+            <a:avLst/>
+          </a:prstGeom>
+          <a:noFill xmlns:a="http://schemas.openxmlformats.org/drawingml/2006/main"/>
+          <a:ln xmlns:a="http://schemas.openxmlformats.org/drawingml/2006/main" w="0">
+            <a:noFill/>
+            <a:prstDash val="solid"/>
+          </a:ln>
+        </p:spPr>
+        <p:txBody>
+          <a:bodyPr xmlns:a="http://schemas.openxmlformats.org/drawingml/2006/main"/>
+          <a:lstStyle xmlns:a="http://schemas.openxmlformats.org/drawingml/2006/main"/>
+          <a:p xmlns:a="http://schemas.openxmlformats.org/drawingml/2006/main">
+            <a:pPr>
+              <a:defRPr sz="975">
+                <a:solidFill>
+                  <a:srgbClr val="475569"/>
+                </a:solidFill>
+              </a:defRPr>
+            </a:pPr>
+            <a:r>
+              <a:rPr sz="975">
+                <a:solidFill>
+                  <a:srgbClr val="475569"/>
+                </a:solidFill>
+              </a:rPr>
+              <a:t>文件：umamba_training_pipeline/output/visualization.png</a:t>
+            </a:r>
+          </a:p>
+        </p:txBody>
+      </p:sp>
+      <p:sp>
+        <p:nvSpPr>
+          <p:cNvPr id="3" name="">
+            <a:extLst xmlns:a="http://schemas.openxmlformats.org/drawingml/2006/main">
+              <a:ext uri="{FF2B5EF4-FFF2-40B4-BE49-F238E27FC236}">
+                <a16:creationId xmlns:a16="http://schemas.microsoft.com/office/drawing/2014/main" id="{BBAC2219-4D8B-4826-A39B-DD3F60CCAA4A}"/>
+              </a:ext>
+            </a:extLst>
+          </p:cNvPr>
+          <p:cNvSpPr>
+            <a:spLocks xmlns:a="http://schemas.openxmlformats.org/drawingml/2006/main" noGrp="1"/>
+          </p:cNvSpPr>
+          <p:nvPr/>
+        </p:nvSpPr>
+        <p:spPr>
+          <a:xfrm xmlns:a="http://schemas.openxmlformats.org/drawingml/2006/main">
+            <a:off x="457200" y="1066800"/>
+            <a:ext cx="11277600" cy="9525"/>
+          </a:xfrm>
+          <a:prstGeom xmlns:a="http://schemas.openxmlformats.org/drawingml/2006/main" prst="rect">
+            <a:avLst/>
+          </a:prstGeom>
+          <a:solidFill xmlns:a="http://schemas.openxmlformats.org/drawingml/2006/main">
+            <a:srgbClr val="CBD5E1"/>
+          </a:solidFill>
+          <a:ln xmlns:a="http://schemas.openxmlformats.org/drawingml/2006/main" w="0">
+            <a:solidFill>
+              <a:srgbClr val="CBD5E1"/>
+            </a:solidFill>
+            <a:prstDash val="solid"/>
+          </a:ln>
+        </p:spPr>
+      </p:sp>
+      <p:pic>
+        <p:nvPicPr>
+          <p:cNvPr id="10" name=""/>
+          <p:cNvPicPr>
+            <a:picLocks xmlns:a="http://schemas.openxmlformats.org/drawingml/2006/main" noChangeAspect="1"/>
+          </p:cNvPicPr>
+          <p:nvPr/>
+        </p:nvPicPr>
+        <p:blipFill>
+          <a:blip xmlns:r="http://schemas.openxmlformats.org/officeDocument/2006/relationships" xmlns:a="http://schemas.openxmlformats.org/drawingml/2006/main" r:embed="R37887bd78f774ecb"/>
+          <a:stretch xmlns:a="http://schemas.openxmlformats.org/drawingml/2006/main"/>
+        </p:blipFill>
+        <p:spPr>
+          <a:xfrm xmlns:a="http://schemas.openxmlformats.org/drawingml/2006/main">
+            <a:off x="1995055" y="1219200"/>
+            <a:ext cx="4849091" cy="5334000"/>
+          </a:xfrm>
+          <a:prstGeom xmlns:a="http://schemas.openxmlformats.org/drawingml/2006/main" prst="roundRect">
+            <a:avLst>
+              <a:gd name="adj" fmla="val 1429"/>
+            </a:avLst>
+          </a:prstGeom>
+        </p:spPr>
+      </p:pic>
+      <p:graphicFrame>
+        <p:nvGraphicFramePr>
+          <p:cNvPr id="11" name=""/>
+          <p:cNvGraphicFramePr/>
+          <p:nvPr/>
+        </p:nvGraphicFramePr>
+        <p:xfrm>
+          <a:off xmlns:a="http://schemas.openxmlformats.org/drawingml/2006/main" x="8572500" y="1428750"/>
+          <a:ext xmlns:a="http://schemas.openxmlformats.org/drawingml/2006/main" cx="2714625" cy="2857500"/>
+        </p:xfrm>
+        <a:graphic xmlns:a="http://schemas.openxmlformats.org/drawingml/2006/main">
+          <a:graphicData uri="http://schemas.openxmlformats.org/drawingml/2006/table">
+            <a:tbl>
+              <a:tblPr firstRow="1" bandRow="1"/>
+              <a:tblGrid>
+                <a:gridCol w="1428750"/>
+                <a:gridCol w="1285875"/>
+              </a:tblGrid>
+              <a:tr h="408214">
+                <a:tc>
+                  <a:txBody>
+                    <a:bodyPr/>
+                    <a:lstStyle/>
+                    <a:p>
+                      <a:r>
+                        <a:rPr sz="900" b="1">
+                          <a:solidFill>
+                            <a:srgbClr val="FFFFFF"/>
+                          </a:solidFill>
+                        </a:rPr>
+                        <a:t>指标</a:t>
+                      </a:r>
+                    </a:p>
+                  </a:txBody>
+                  <a:tcPr marL="91440" marR="91440" marT="45720" marB="45720">
+                    <a:solidFill>
+                      <a:srgbClr val="0F172A"/>
+                    </a:solidFill>
+                  </a:tcPr>
+                </a:tc>
+                <a:tc>
+                  <a:txBody>
+                    <a:bodyPr/>
+                    <a:lstStyle/>
+                    <a:p>
+                      <a:r>
+                        <a:rPr sz="900" b="1">
+                          <a:solidFill>
+                            <a:srgbClr val="FFFFFF"/>
+                          </a:solidFill>
+                        </a:rPr>
+                        <a:t>soft/only-diff</a:t>
+                      </a:r>
+                    </a:p>
+                  </a:txBody>
+                  <a:tcPr marL="91440" marR="91440" marT="45720" marB="45720">
+                    <a:solidFill>
+                      <a:srgbClr val="0F172A"/>
+                    </a:solidFill>
+                  </a:tcPr>
+                </a:tc>
+              </a:tr>
+              <a:tr h="408214">
+                <a:tc>
+                  <a:txBody>
+                    <a:bodyPr/>
+                    <a:lstStyle/>
+                    <a:p>
+                      <a:r>
+                        <a:rPr sz="900">
+                          <a:solidFill>
+                            <a:srgbClr val="0F172A"/>
+                          </a:solidFill>
+                        </a:rPr>
+                        <a:t>FT L1</a:t>
+                      </a:r>
+                    </a:p>
+                  </a:txBody>
+                  <a:tcPr marL="91440" marR="91440" marT="45720" marB="45720"/>
+                </a:tc>
+                <a:tc>
+                  <a:txBody>
+                    <a:bodyPr/>
+                    <a:lstStyle/>
+                    <a:p>
+                      <a:r>
+                        <a:rPr sz="900">
+                          <a:solidFill>
+                            <a:srgbClr val="0F172A"/>
+                          </a:solidFill>
+                        </a:rPr>
+                        <a:t>4.63</a:t>
+                      </a:r>
+                    </a:p>
+                  </a:txBody>
+                  <a:tcPr marL="91440" marR="91440" marT="45720" marB="45720"/>
+                </a:tc>
+              </a:tr>
+              <a:tr h="408214">
+                <a:tc>
+                  <a:txBody>
+                    <a:bodyPr/>
+                    <a:lstStyle/>
+                    <a:p>
+                      <a:r>
+                        <a:rPr sz="900">
+                          <a:solidFill>
+                            <a:srgbClr val="0F172A"/>
+                          </a:solidFill>
+                        </a:rPr>
+                        <a:t>Rel L1</a:t>
+                      </a:r>
+                    </a:p>
+                  </a:txBody>
+                  <a:tcPr marL="91440" marR="91440" marT="45720" marB="45720"/>
+                </a:tc>
+                <a:tc>
+                  <a:txBody>
+                    <a:bodyPr/>
+                    <a:lstStyle/>
+                    <a:p>
+                      <a:r>
+                        <a:rPr sz="900">
+                          <a:solidFill>
+                            <a:srgbClr val="0F172A"/>
+                          </a:solidFill>
+                        </a:rPr>
+                        <a:t>0.394</a:t>
+                      </a:r>
+                    </a:p>
+                  </a:txBody>
+                  <a:tcPr marL="91440" marR="91440" marT="45720" marB="45720"/>
+                </a:tc>
+              </a:tr>
+              <a:tr h="408214">
+                <a:tc>
+                  <a:txBody>
+                    <a:bodyPr/>
+                    <a:lstStyle/>
+                    <a:p>
+                      <a:r>
+                        <a:rPr sz="900">
+                          <a:solidFill>
+                            <a:srgbClr val="0F172A"/>
+                          </a:solidFill>
+                        </a:rPr>
+                        <a:t>Pearson</a:t>
+                      </a:r>
+                    </a:p>
+                  </a:txBody>
+                  <a:tcPr marL="91440" marR="91440" marT="45720" marB="45720"/>
+                </a:tc>
+                <a:tc>
+                  <a:txBody>
+                    <a:bodyPr/>
+                    <a:lstStyle/>
+                    <a:p>
+                      <a:r>
+                        <a:rPr sz="900">
+                          <a:solidFill>
+                            <a:srgbClr val="0F172A"/>
+                          </a:solidFill>
+                        </a:rPr>
+                        <a:t>0.980</a:t>
+                      </a:r>
+                    </a:p>
+                  </a:txBody>
+                  <a:tcPr marL="91440" marR="91440" marT="45720" marB="45720"/>
+                </a:tc>
+              </a:tr>
+              <a:tr h="408214">
+                <a:tc>
+                  <a:txBody>
+                    <a:bodyPr/>
+                    <a:lstStyle/>
+                    <a:p>
+                      <a:r>
+                        <a:rPr sz="900">
+                          <a:solidFill>
+                            <a:srgbClr val="0F172A"/>
+                          </a:solidFill>
+                        </a:rPr>
+                        <a:t>Amp L1</a:t>
+                      </a:r>
+                    </a:p>
+                  </a:txBody>
+                  <a:tcPr marL="91440" marR="91440" marT="45720" marB="45720"/>
+                </a:tc>
+                <a:tc>
+                  <a:txBody>
+                    <a:bodyPr/>
+                    <a:lstStyle/>
+                    <a:p>
+                      <a:r>
+                        <a:rPr sz="900">
+                          <a:solidFill>
+                            <a:srgbClr val="0F172A"/>
+                          </a:solidFill>
+                        </a:rPr>
+                        <a:t>0.0484</a:t>
+                      </a:r>
+                    </a:p>
+                  </a:txBody>
+                  <a:tcPr marL="91440" marR="91440" marT="45720" marB="45720"/>
+                </a:tc>
+              </a:tr>
+              <a:tr h="408214">
+                <a:tc>
+                  <a:txBody>
+                    <a:bodyPr/>
+                    <a:lstStyle/>
+                    <a:p>
+                      <a:r>
+                        <a:rPr sz="900">
+                          <a:solidFill>
+                            <a:srgbClr val="0F172A"/>
+                          </a:solidFill>
+                        </a:rPr>
+                        <a:t>Support Dice</a:t>
+                      </a:r>
+                    </a:p>
+                  </a:txBody>
+                  <a:tcPr marL="91440" marR="91440" marT="45720" marB="45720"/>
+                </a:tc>
+                <a:tc>
+                  <a:txBody>
+                    <a:bodyPr/>
+                    <a:lstStyle/>
+                    <a:p>
+                      <a:r>
+                        <a:rPr sz="900">
+                          <a:solidFill>
+                            <a:srgbClr val="0F172A"/>
+                          </a:solidFill>
+                        </a:rPr>
+                        <a:t>0.205</a:t>
+                      </a:r>
+                    </a:p>
+                  </a:txBody>
+                  <a:tcPr marL="91440" marR="91440" marT="45720" marB="45720"/>
+                </a:tc>
+              </a:tr>
+              <a:tr h="408214">
+                <a:tc>
+                  <a:txBody>
+                    <a:bodyPr/>
+                    <a:lstStyle/>
+                    <a:p>
+                      <a:r>
+                        <a:rPr sz="900">
+                          <a:solidFill>
+                            <a:srgbClr val="0F172A"/>
+                          </a:solidFill>
+                        </a:rPr>
+                        <a:t>Phase MAE</a:t>
+                      </a:r>
+                    </a:p>
+                  </a:txBody>
+                  <a:tcPr marL="91440" marR="91440" marT="45720" marB="45720"/>
+                </a:tc>
+                <a:tc>
+                  <a:txBody>
+                    <a:bodyPr/>
+                    <a:lstStyle/>
+                    <a:p>
+                      <a:r>
+                        <a:rPr sz="900">
+                          <a:solidFill>
+                            <a:srgbClr val="0F172A"/>
+                          </a:solidFill>
+                        </a:rPr>
+                        <a:t>1.037</a:t>
+                      </a:r>
+                    </a:p>
+                  </a:txBody>
+                  <a:tcPr marL="91440" marR="91440" marT="45720" marB="45720"/>
+                </a:tc>
+              </a:tr>
+            </a:tbl>
+          </a:graphicData>
+        </a:graphic>
+      </p:graphicFrame>
+      <p:sp>
+        <p:nvSpPr>
+          <p:cNvPr id="6" name="">
+            <a:extLst xmlns:a="http://schemas.openxmlformats.org/drawingml/2006/main">
+              <a:ext uri="{FF2B5EF4-FFF2-40B4-BE49-F238E27FC236}">
+                <a16:creationId xmlns:a16="http://schemas.microsoft.com/office/drawing/2014/main" id="{86340B80-56AD-48FB-8170-9CF6A5E70375}"/>
+              </a:ext>
+            </a:extLst>
+          </p:cNvPr>
+          <p:cNvSpPr>
+            <a:spLocks xmlns:a="http://schemas.openxmlformats.org/drawingml/2006/main" noGrp="1"/>
+          </p:cNvSpPr>
+          <p:nvPr/>
+        </p:nvSpPr>
+        <p:spPr>
+          <a:xfrm xmlns:a="http://schemas.openxmlformats.org/drawingml/2006/main">
+            <a:off x="8572500" y="4648200"/>
+            <a:ext cx="2714625" cy="609600"/>
+          </a:xfrm>
+          <a:prstGeom xmlns:a="http://schemas.openxmlformats.org/drawingml/2006/main" prst="rect">
+            <a:avLst/>
+          </a:prstGeom>
+          <a:noFill xmlns:a="http://schemas.openxmlformats.org/drawingml/2006/main"/>
+          <a:ln xmlns:a="http://schemas.openxmlformats.org/drawingml/2006/main" w="0">
+            <a:noFill/>
+            <a:prstDash val="solid"/>
+          </a:ln>
+        </p:spPr>
+        <p:txBody>
+          <a:bodyPr xmlns:a="http://schemas.openxmlformats.org/drawingml/2006/main"/>
+          <a:lstStyle xmlns:a="http://schemas.openxmlformats.org/drawingml/2006/main"/>
+          <a:p xmlns:a="http://schemas.openxmlformats.org/drawingml/2006/main">
+            <a:pPr>
+              <a:defRPr sz="1350" b="1">
+                <a:solidFill>
+                  <a:srgbClr val="B91C1C"/>
+                </a:solidFill>
+              </a:defRPr>
+            </a:pPr>
+            <a:r>
+              <a:rPr sz="1350" b="1">
+                <a:solidFill>
+                  <a:srgbClr val="B91C1C"/>
+                </a:solidFill>
+              </a:rPr>
+              <a:t>虽然 FT 指标可以较好，但图中 amp/support 仍出现环状或错位结构。</a:t>
+            </a:r>
+          </a:p>
+        </p:txBody>
+      </p:sp>
+    </p:spTree>
+    <p:extLst>
+      <p:ext uri="{BB962C8B-B14F-4D97-AF65-F5344CB8AC3E}">
+        <p14:creationId xmlns:p14="http://schemas.microsoft.com/office/powerpoint/2010/main" val="1543784694"/>
       </p:ext>
     </p:extLst>
   </p:cSld>
